--- a/ADLC-in-Action.pptx
+++ b/ADLC-in-Action.pptx
@@ -2,1861 +2,31 @@
 <file path=ppt/presentation.xml><?xml version="1.0" encoding="utf-8"?>
 <p:presentation xmlns:p="http://schemas.openxmlformats.org/presentationml/2006/main">
   <p:sldMasterIdLst>
-    <p:sldMasterId xmlns:r="http://schemas.openxmlformats.org/officeDocument/2006/relationships" id="2147483648" r:id="Rebcba9dbb13e4fd0"/>
+    <p:sldMasterId xmlns:r="http://schemas.openxmlformats.org/officeDocument/2006/relationships" id="2147483648" r:id="Rb63011a6f7834a18"/>
   </p:sldMasterIdLst>
-  <p:notesMasterIdLst>
-    <p:notesMasterId xmlns:r="http://schemas.openxmlformats.org/officeDocument/2006/relationships" r:id="R0baf4396f4a341c9"/>
-  </p:notesMasterIdLst>
   <p:sldIdLst>
-    <p:sldId xmlns:r="http://schemas.openxmlformats.org/officeDocument/2006/relationships" id="256" r:id="R80191d97c53e4004"/>
-    <p:sldId xmlns:r="http://schemas.openxmlformats.org/officeDocument/2006/relationships" id="257" r:id="R6813168052ee4f51"/>
-    <p:sldId xmlns:r="http://schemas.openxmlformats.org/officeDocument/2006/relationships" id="258" r:id="R632f488b007b4546"/>
-    <p:sldId xmlns:r="http://schemas.openxmlformats.org/officeDocument/2006/relationships" id="259" r:id="R1f9074a6c7914b05"/>
-    <p:sldId xmlns:r="http://schemas.openxmlformats.org/officeDocument/2006/relationships" id="260" r:id="R93882e8ff77e48c0"/>
-    <p:sldId xmlns:r="http://schemas.openxmlformats.org/officeDocument/2006/relationships" id="261" r:id="R0ce98ae12fc94859"/>
-    <p:sldId xmlns:r="http://schemas.openxmlformats.org/officeDocument/2006/relationships" id="262" r:id="R37ae1e51dc2d4361"/>
-    <p:sldId xmlns:r="http://schemas.openxmlformats.org/officeDocument/2006/relationships" id="263" r:id="R00fca04e18774e7a"/>
-    <p:sldId xmlns:r="http://schemas.openxmlformats.org/officeDocument/2006/relationships" id="264" r:id="Rfaa72176942c4e45"/>
-    <p:sldId xmlns:r="http://schemas.openxmlformats.org/officeDocument/2006/relationships" id="265" r:id="Rea56cfd5d1ac4176"/>
-    <p:sldId xmlns:r="http://schemas.openxmlformats.org/officeDocument/2006/relationships" id="266" r:id="Rbf5b11eb8b20483c"/>
-    <p:sldId xmlns:r="http://schemas.openxmlformats.org/officeDocument/2006/relationships" id="267" r:id="R69a675ba76f94547"/>
-    <p:sldId xmlns:r="http://schemas.openxmlformats.org/officeDocument/2006/relationships" id="268" r:id="Rc28dc9995abc4473"/>
-    <p:sldId xmlns:r="http://schemas.openxmlformats.org/officeDocument/2006/relationships" id="269" r:id="R607be229a78048a0"/>
-    <p:sldId xmlns:r="http://schemas.openxmlformats.org/officeDocument/2006/relationships" id="270" r:id="R8f15534a97c044c3"/>
-    <p:sldId xmlns:r="http://schemas.openxmlformats.org/officeDocument/2006/relationships" id="271" r:id="R4109b46afadc461a"/>
-    <p:sldId xmlns:r="http://schemas.openxmlformats.org/officeDocument/2006/relationships" id="272" r:id="Raf6a0931fd8e40fd"/>
-    <p:sldId xmlns:r="http://schemas.openxmlformats.org/officeDocument/2006/relationships" id="273" r:id="R5c71059792f345c2"/>
+    <p:sldId xmlns:r="http://schemas.openxmlformats.org/officeDocument/2006/relationships" id="256" r:id="Rdfda1e1a84724ee4"/>
+    <p:sldId xmlns:r="http://schemas.openxmlformats.org/officeDocument/2006/relationships" id="257" r:id="Raf8ff59d481a44da"/>
+    <p:sldId xmlns:r="http://schemas.openxmlformats.org/officeDocument/2006/relationships" id="258" r:id="Raf9b513bebbf4ee6"/>
+    <p:sldId xmlns:r="http://schemas.openxmlformats.org/officeDocument/2006/relationships" id="259" r:id="R0fece9061ece4d27"/>
+    <p:sldId xmlns:r="http://schemas.openxmlformats.org/officeDocument/2006/relationships" id="260" r:id="R439072726c4c40da"/>
+    <p:sldId xmlns:r="http://schemas.openxmlformats.org/officeDocument/2006/relationships" id="261" r:id="R4b57bc2d7d5b42cf"/>
+    <p:sldId xmlns:r="http://schemas.openxmlformats.org/officeDocument/2006/relationships" id="262" r:id="R412fbecd3dfd4d84"/>
+    <p:sldId xmlns:r="http://schemas.openxmlformats.org/officeDocument/2006/relationships" id="263" r:id="R2580661b84634e1d"/>
+    <p:sldId xmlns:r="http://schemas.openxmlformats.org/officeDocument/2006/relationships" id="264" r:id="R576e48496cf64ebc"/>
+    <p:sldId xmlns:r="http://schemas.openxmlformats.org/officeDocument/2006/relationships" id="265" r:id="R76e980a9c9b94efb"/>
+    <p:sldId xmlns:r="http://schemas.openxmlformats.org/officeDocument/2006/relationships" id="266" r:id="R68b4ae8c7e9b4d13"/>
+    <p:sldId xmlns:r="http://schemas.openxmlformats.org/officeDocument/2006/relationships" id="267" r:id="R37a21d15f40e4d94"/>
+    <p:sldId xmlns:r="http://schemas.openxmlformats.org/officeDocument/2006/relationships" id="268" r:id="Re312969de1cb43cb"/>
+    <p:sldId xmlns:r="http://schemas.openxmlformats.org/officeDocument/2006/relationships" id="269" r:id="R6fe56a32481040f7"/>
+    <p:sldId xmlns:r="http://schemas.openxmlformats.org/officeDocument/2006/relationships" id="270" r:id="R58c6dc9caac34612"/>
+    <p:sldId xmlns:r="http://schemas.openxmlformats.org/officeDocument/2006/relationships" id="271" r:id="Rf481133715f44a87"/>
+    <p:sldId xmlns:r="http://schemas.openxmlformats.org/officeDocument/2006/relationships" id="272" r:id="R38977e477aff4569"/>
+    <p:sldId xmlns:r="http://schemas.openxmlformats.org/officeDocument/2006/relationships" id="273" r:id="Rb5ba3c943e534f6b"/>
   </p:sldIdLst>
   <p:sldSz cx="12192000" cy="6858000"/>
   <p:notesSz cx="6858000" cy="9144000"/>
 </p:presentation>
-</file>
-
-<file path=ppt/notesMasters/notesMaster1.xml><?xml version="1.0" encoding="utf-8"?>
-<p:notesMaster xmlns:p="http://schemas.openxmlformats.org/presentationml/2006/main">
-  <p:cSld>
-    <p:bg>
-      <p:bgRef idx="1001">
-        <a:schemeClr xmlns:a="http://schemas.openxmlformats.org/drawingml/2006/main" val="bg1"/>
-      </p:bgRef>
-    </p:bg>
-    <p:spTree>
-      <p:nvGrpSpPr>
-        <p:cNvPr id="1" name=""/>
-        <p:cNvGrpSpPr/>
-        <p:nvPr/>
-      </p:nvGrpSpPr>
-      <p:grpSpPr>
-        <a:xfrm xmlns:a="http://schemas.openxmlformats.org/drawingml/2006/main"/>
-      </p:grpSpPr>
-      <p:sp>
-        <p:nvSpPr>
-          <p:cNvPr id="2" name="Header Placeholder"/>
-          <p:cNvSpPr/>
-          <p:nvPr>
-            <p:ph type="hdr" sz="quarter"/>
-          </p:nvPr>
-        </p:nvSpPr>
-        <p:spPr>
-          <a:prstGeom xmlns:a="http://schemas.openxmlformats.org/drawingml/2006/main" prst="rect">
-            <a:avLst/>
-          </a:prstGeom>
-        </p:spPr>
-        <p:txBody>
-          <a:bodyPr xmlns:a="http://schemas.openxmlformats.org/drawingml/2006/main"/>
-          <a:lstStyle xmlns:a="http://schemas.openxmlformats.org/drawingml/2006/main"/>
-          <a:p xmlns:a="http://schemas.openxmlformats.org/drawingml/2006/main"/>
-        </p:txBody>
-      </p:sp>
-      <p:sp>
-        <p:nvSpPr>
-          <p:cNvPr id="3" name="Date Placeholder"/>
-          <p:cNvSpPr/>
-          <p:nvPr>
-            <p:ph type="dt" sz="quarter" idx="1"/>
-          </p:nvPr>
-        </p:nvSpPr>
-        <p:spPr>
-          <a:prstGeom xmlns:a="http://schemas.openxmlformats.org/drawingml/2006/main" prst="rect">
-            <a:avLst/>
-          </a:prstGeom>
-        </p:spPr>
-        <p:txBody>
-          <a:bodyPr xmlns:a="http://schemas.openxmlformats.org/drawingml/2006/main"/>
-          <a:lstStyle xmlns:a="http://schemas.openxmlformats.org/drawingml/2006/main"/>
-          <a:p xmlns:a="http://schemas.openxmlformats.org/drawingml/2006/main"/>
-        </p:txBody>
-      </p:sp>
-      <p:sp>
-        <p:nvSpPr>
-          <p:cNvPr id="4" name="Slide Image Placeholder"/>
-          <p:cNvSpPr/>
-          <p:nvPr>
-            <p:ph type="sldImg" idx="2"/>
-          </p:nvPr>
-        </p:nvSpPr>
-        <p:spPr>
-          <a:prstGeom xmlns:a="http://schemas.openxmlformats.org/drawingml/2006/main" prst="rect">
-            <a:avLst/>
-          </a:prstGeom>
-        </p:spPr>
-        <p:txBody>
-          <a:bodyPr xmlns:a="http://schemas.openxmlformats.org/drawingml/2006/main"/>
-          <a:lstStyle xmlns:a="http://schemas.openxmlformats.org/drawingml/2006/main"/>
-          <a:p xmlns:a="http://schemas.openxmlformats.org/drawingml/2006/main"/>
-        </p:txBody>
-      </p:sp>
-      <p:sp>
-        <p:nvSpPr>
-          <p:cNvPr id="5" name="Notes Placeholder"/>
-          <p:cNvSpPr/>
-          <p:nvPr>
-            <p:ph type="body" sz="quarter" idx="3"/>
-          </p:nvPr>
-        </p:nvSpPr>
-        <p:spPr>
-          <a:prstGeom xmlns:a="http://schemas.openxmlformats.org/drawingml/2006/main" prst="rect">
-            <a:avLst/>
-          </a:prstGeom>
-        </p:spPr>
-        <p:txBody>
-          <a:bodyPr xmlns:a="http://schemas.openxmlformats.org/drawingml/2006/main"/>
-          <a:lstStyle xmlns:a="http://schemas.openxmlformats.org/drawingml/2006/main"/>
-          <a:p xmlns:a="http://schemas.openxmlformats.org/drawingml/2006/main"/>
-        </p:txBody>
-      </p:sp>
-      <p:sp>
-        <p:nvSpPr>
-          <p:cNvPr id="6" name="Footer Placeholder"/>
-          <p:cNvSpPr/>
-          <p:nvPr>
-            <p:ph type="ftr" sz="quarter" idx="4"/>
-          </p:nvPr>
-        </p:nvSpPr>
-        <p:spPr>
-          <a:prstGeom xmlns:a="http://schemas.openxmlformats.org/drawingml/2006/main" prst="rect">
-            <a:avLst/>
-          </a:prstGeom>
-        </p:spPr>
-        <p:txBody>
-          <a:bodyPr xmlns:a="http://schemas.openxmlformats.org/drawingml/2006/main"/>
-          <a:lstStyle xmlns:a="http://schemas.openxmlformats.org/drawingml/2006/main"/>
-          <a:p xmlns:a="http://schemas.openxmlformats.org/drawingml/2006/main"/>
-        </p:txBody>
-      </p:sp>
-      <p:sp>
-        <p:nvSpPr>
-          <p:cNvPr id="7" name="Slide Number Placeholder"/>
-          <p:cNvSpPr/>
-          <p:nvPr>
-            <p:ph type="sldNum" sz="quarter" idx="5"/>
-          </p:nvPr>
-        </p:nvSpPr>
-        <p:spPr>
-          <a:prstGeom xmlns:a="http://schemas.openxmlformats.org/drawingml/2006/main" prst="rect">
-            <a:avLst/>
-          </a:prstGeom>
-        </p:spPr>
-        <p:txBody>
-          <a:bodyPr xmlns:a="http://schemas.openxmlformats.org/drawingml/2006/main"/>
-          <a:lstStyle xmlns:a="http://schemas.openxmlformats.org/drawingml/2006/main"/>
-          <a:p xmlns:a="http://schemas.openxmlformats.org/drawingml/2006/main"/>
-        </p:txBody>
-      </p:sp>
-    </p:spTree>
-  </p:cSld>
-  <p:clrMap bg1="lt1" tx1="dk1" bg2="lt2" tx2="dk2" accent1="accent1" accent2="accent2" accent3="accent3" accent4="accent4" accent5="accent5" accent6="accent6" hlink="hlink" folHlink="folHlink"/>
-  <p:notesStyle>
-    <a:lvl1pPr xmlns:a="http://schemas.openxmlformats.org/drawingml/2006/main" marL="0" algn="l" defTabSz="914400" rtl="0" eaLnBrk="1" latinLnBrk="0" hangingPunct="1">
-      <a:defRPr sz="1200" kern="1200"/>
-    </a:lvl1pPr>
-  </p:notesStyle>
-</p:notesMaster>
-</file>
-
-<file path=ppt/notesMasters/theme/theme3.xml><?xml version="1.0" encoding="utf-8"?>
-<a:theme xmlns:a="http://schemas.openxmlformats.org/drawingml/2006/main" name="ChatGPT">
-  <a:themeElements>
-    <a:clrScheme name="ChatGPT">
-      <a:dk1>
-        <a:srgbClr val="000000"/>
-      </a:dk1>
-      <a:lt1>
-        <a:srgbClr val="FFFFFF"/>
-      </a:lt1>
-      <a:dk2>
-        <a:srgbClr val="0E2841"/>
-      </a:dk2>
-      <a:lt2>
-        <a:srgbClr val="E8E8E8"/>
-      </a:lt2>
-      <a:accent1>
-        <a:srgbClr val="156082"/>
-      </a:accent1>
-      <a:accent2>
-        <a:srgbClr val="E97132"/>
-      </a:accent2>
-      <a:accent3>
-        <a:srgbClr val="196B24"/>
-      </a:accent3>
-      <a:accent4>
-        <a:srgbClr val="0F9ED5"/>
-      </a:accent4>
-      <a:accent5>
-        <a:srgbClr val="A02B93"/>
-      </a:accent5>
-      <a:accent6>
-        <a:srgbClr val="4EA72E"/>
-      </a:accent6>
-      <a:hlink>
-        <a:srgbClr val="467886"/>
-      </a:hlink>
-      <a:folHlink>
-        <a:srgbClr val="96607D"/>
-      </a:folHlink>
-    </a:clrScheme>
-    <a:fontScheme name="Office">
-      <a:majorFont>
-        <a:latin typeface="Calibri Light"/>
-        <a:ea typeface="Calibri Light"/>
-        <a:cs typeface="Calibri Light"/>
-      </a:majorFont>
-      <a:minorFont>
-        <a:latin typeface="Calibri"/>
-        <a:ea typeface="Calibri"/>
-        <a:cs typeface="Calibri"/>
-      </a:minorFont>
-    </a:fontScheme>
-    <a:fmtScheme name="ChatGPT">
-      <a:fillStyleLst>
-        <a:solidFill>
-          <a:schemeClr val="phClr"/>
-        </a:solidFill>
-        <a:gradFill>
-          <a:gsLst>
-            <a:gs pos="0">
-              <a:schemeClr val="phClr">
-                <a:tint val="67000"/>
-                <a:lumMod val="110000"/>
-                <a:satMod val="105000"/>
-              </a:schemeClr>
-            </a:gs>
-            <a:gs pos="50000">
-              <a:schemeClr val="phClr">
-                <a:tint val="73000"/>
-                <a:lumMod val="105000"/>
-                <a:satMod val="103000"/>
-              </a:schemeClr>
-            </a:gs>
-            <a:gs pos="100000">
-              <a:schemeClr val="phClr">
-                <a:tint val="81000"/>
-                <a:lumMod val="105000"/>
-                <a:satMod val="109000"/>
-              </a:schemeClr>
-            </a:gs>
-          </a:gsLst>
-          <a:lin ang="5400000" scaled="0"/>
-        </a:gradFill>
-        <a:gradFill>
-          <a:gsLst>
-            <a:gs pos="0">
-              <a:schemeClr val="phClr">
-                <a:tint val="94000"/>
-                <a:lumMod val="102000"/>
-                <a:satMod val="103000"/>
-              </a:schemeClr>
-            </a:gs>
-            <a:gs pos="50000">
-              <a:schemeClr val="phClr">
-                <a:shade val="100000"/>
-                <a:lumMod val="100000"/>
-                <a:satMod val="110000"/>
-              </a:schemeClr>
-            </a:gs>
-            <a:gs pos="100000">
-              <a:schemeClr val="phClr">
-                <a:shade val="78000"/>
-                <a:lumMod val="99000"/>
-                <a:satMod val="120000"/>
-              </a:schemeClr>
-            </a:gs>
-          </a:gsLst>
-          <a:lin ang="5400000" scaled="0"/>
-        </a:gradFill>
-      </a:fillStyleLst>
-      <a:lnStyleLst>
-        <a:ln w="12700">
-          <a:solidFill>
-            <a:schemeClr val="phClr"/>
-          </a:solidFill>
-          <a:prstDash val="solid"/>
-        </a:ln>
-        <a:ln w="19050">
-          <a:solidFill>
-            <a:schemeClr val="phClr"/>
-          </a:solidFill>
-          <a:prstDash val="solid"/>
-        </a:ln>
-        <a:ln w="25400">
-          <a:solidFill>
-            <a:schemeClr val="phClr"/>
-          </a:solidFill>
-          <a:prstDash val="solid"/>
-        </a:ln>
-      </a:lnStyleLst>
-      <a:effectStyleLst>
-        <a:effectStyle>
-          <a:effectLst/>
-        </a:effectStyle>
-        <a:effectStyle>
-          <a:effectLst/>
-        </a:effectStyle>
-        <a:effectStyle>
-          <a:effectLst>
-            <a:outerShdw blurRad="57150" dist="19050" dir="5400000">
-              <a:srgbClr val="000000">
-                <a:alpha val="16000"/>
-              </a:srgbClr>
-            </a:outerShdw>
-          </a:effectLst>
-        </a:effectStyle>
-        <a:effectStyle>
-          <a:effectLst>
-            <a:outerShdw blurRad="19050" dist="9525" dir="5400000">
-              <a:srgbClr val="000000">
-                <a:alpha val="6000"/>
-              </a:srgbClr>
-            </a:outerShdw>
-          </a:effectLst>
-        </a:effectStyle>
-        <a:effectStyle>
-          <a:effectLst>
-            <a:outerShdw blurRad="28575" dist="9525" dir="5400000">
-              <a:srgbClr val="000000">
-                <a:alpha val="8000"/>
-              </a:srgbClr>
-            </a:outerShdw>
-          </a:effectLst>
-        </a:effectStyle>
-        <a:effectStyle>
-          <a:effectLst>
-            <a:outerShdw blurRad="57150" dist="19050" dir="5400000">
-              <a:srgbClr val="000000">
-                <a:alpha val="10000"/>
-              </a:srgbClr>
-            </a:outerShdw>
-          </a:effectLst>
-        </a:effectStyle>
-        <a:effectStyle>
-          <a:effectLst>
-            <a:outerShdw blurRad="114300" dist="38100" dir="5400000">
-              <a:srgbClr val="000000">
-                <a:alpha val="12000"/>
-              </a:srgbClr>
-            </a:outerShdw>
-          </a:effectLst>
-        </a:effectStyle>
-        <a:effectStyle>
-          <a:effectLst>
-            <a:outerShdw blurRad="171450" dist="57150" dir="5400000">
-              <a:srgbClr val="000000">
-                <a:alpha val="16000"/>
-              </a:srgbClr>
-            </a:outerShdw>
-          </a:effectLst>
-        </a:effectStyle>
-        <a:effectStyle>
-          <a:effectLst>
-            <a:outerShdw blurRad="266700" dist="95250" dir="5400000">
-              <a:srgbClr val="000000">
-                <a:alpha val="24000"/>
-              </a:srgbClr>
-            </a:outerShdw>
-          </a:effectLst>
-        </a:effectStyle>
-      </a:effectStyleLst>
-      <a:bgFillStyleLst>
-        <a:solidFill>
-          <a:schemeClr val="phClr"/>
-        </a:solidFill>
-        <a:solidFill>
-          <a:schemeClr val="phClr">
-            <a:tint val="95000"/>
-            <a:satMod val="170000"/>
-          </a:schemeClr>
-        </a:solidFill>
-        <a:gradFill>
-          <a:gsLst>
-            <a:gs pos="0">
-              <a:schemeClr val="phClr">
-                <a:tint val="93000"/>
-                <a:shade val="98000"/>
-                <a:lumMod val="102000"/>
-                <a:satMod val="150000"/>
-              </a:schemeClr>
-            </a:gs>
-            <a:gs pos="50000">
-              <a:schemeClr val="phClr">
-                <a:tint val="98000"/>
-                <a:shade val="90000"/>
-                <a:lumMod val="103000"/>
-                <a:satMod val="130000"/>
-              </a:schemeClr>
-            </a:gs>
-            <a:gs pos="100000">
-              <a:schemeClr val="phClr">
-                <a:shade val="63000"/>
-                <a:satMod val="120000"/>
-              </a:schemeClr>
-            </a:gs>
-          </a:gsLst>
-          <a:lin ang="5400000" scaled="0"/>
-        </a:gradFill>
-      </a:bgFillStyleLst>
-    </a:fmtScheme>
-  </a:themeElements>
-</a:theme>
-</file>
-
-<file path=ppt/notesSlides/notesSlide1.xml><?xml version="1.0" encoding="utf-8"?>
-<p:notes xmlns:p="http://schemas.openxmlformats.org/presentationml/2006/main">
-  <p:cSld>
-    <p:spTree>
-      <p:nvGrpSpPr>
-        <p:cNvPr id="1" name=""/>
-        <p:cNvGrpSpPr/>
-        <p:nvPr/>
-      </p:nvGrpSpPr>
-      <p:grpSpPr>
-        <a:xfrm xmlns:a="http://schemas.openxmlformats.org/drawingml/2006/main"/>
-      </p:grpSpPr>
-      <p:sp>
-        <p:nvSpPr>
-          <p:cNvPr id="2" name="Slide Image Placeholder 1"/>
-          <p:cNvSpPr>
-            <a:spLocks xmlns:a="http://schemas.openxmlformats.org/drawingml/2006/main" noGrp="1"/>
-          </p:cNvSpPr>
-          <p:nvPr>
-            <p:ph type="sldImg" idx="0"/>
-          </p:nvPr>
-        </p:nvSpPr>
-        <p:spPr/>
-      </p:sp>
-      <p:sp>
-        <p:nvSpPr>
-          <p:cNvPr id="3" name="Notes Placeholder 2"/>
-          <p:cNvSpPr>
-            <a:spLocks xmlns:a="http://schemas.openxmlformats.org/drawingml/2006/main" noGrp="1"/>
-          </p:cNvSpPr>
-          <p:nvPr>
-            <p:ph type="body" idx="1"/>
-          </p:nvPr>
-        </p:nvSpPr>
-        <p:spPr/>
-        <p:txBody>
-          <a:bodyPr xmlns:a="http://schemas.openxmlformats.org/drawingml/2006/main"/>
-          <a:lstStyle xmlns:a="http://schemas.openxmlformats.org/drawingml/2006/main"/>
-          <a:p xmlns:a="http://schemas.openxmlformats.org/drawingml/2006/main">
-            <a:r>
-              <a:t>เปิดด้วยคำถามว่าผู้เรียนเคยให้ Agent สร้างงานเสร็จแล้วไม่รู้หรือไม่ว่าคนใช้ได้ประโยชน์จริงหรือเปล่า วันนี้เราจะสร้างเกมและใช้ข้อมูลตัดสินใจรอบถัดไป ใช้เวลาบรรยายประมาณ 20–30 นาที และหยุดทำ Lab ตาม README ระหว่างทาง</a:t>
-            </a:r>
-          </a:p>
-          <a:p xmlns:a="http://schemas.openxmlformats.org/drawingml/2006/main">
-            <a:r>
-              <a:t/>
-            </a:r>
-          </a:p>
-          <a:p xmlns:a="http://schemas.openxmlformats.org/drawingml/2006/main">
-            <a:r>
-              <a:t>Source: ADLC in Action, reusable .agents/skills/gfit-adlc-* and handson/game-profile.md. Concepts: adlc.io; Anthropic AI-Native SDLC Playbook; Port implementation commentary. Intent targets are example choices. Simulated data is not user research.</a:t>
-            </a:r>
-          </a:p>
-        </p:txBody>
-      </p:sp>
-      <p:sp>
-        <p:nvSpPr>
-          <p:cNvPr id="4" name="Slide Number Placeholder 3"/>
-          <p:cNvSpPr>
-            <a:spLocks xmlns:a="http://schemas.openxmlformats.org/drawingml/2006/main" noGrp="1"/>
-          </p:cNvSpPr>
-          <p:nvPr>
-            <p:ph type="sldNum" idx="5"/>
-          </p:nvPr>
-        </p:nvSpPr>
-        <p:spPr/>
-        <p:txBody>
-          <a:bodyPr xmlns:a="http://schemas.openxmlformats.org/drawingml/2006/main"/>
-          <a:lstStyle xmlns:a="http://schemas.openxmlformats.org/drawingml/2006/main"/>
-          <a:p xmlns:a="http://schemas.openxmlformats.org/drawingml/2006/main"/>
-        </p:txBody>
-      </p:sp>
-    </p:spTree>
-  </p:cSld>
-  <p:clrMapOvr>
-    <a:masterClrMapping xmlns:a="http://schemas.openxmlformats.org/drawingml/2006/main"/>
-  </p:clrMapOvr>
-</p:notes>
-</file>
-
-<file path=ppt/notesSlides/notesSlide10.xml><?xml version="1.0" encoding="utf-8"?>
-<p:notes xmlns:p="http://schemas.openxmlformats.org/presentationml/2006/main">
-  <p:cSld>
-    <p:spTree>
-      <p:nvGrpSpPr>
-        <p:cNvPr id="1" name=""/>
-        <p:cNvGrpSpPr/>
-        <p:nvPr/>
-      </p:nvGrpSpPr>
-      <p:grpSpPr>
-        <a:xfrm xmlns:a="http://schemas.openxmlformats.org/drawingml/2006/main"/>
-      </p:grpSpPr>
-      <p:sp>
-        <p:nvSpPr>
-          <p:cNvPr id="2" name="Slide Image Placeholder 1"/>
-          <p:cNvSpPr>
-            <a:spLocks xmlns:a="http://schemas.openxmlformats.org/drawingml/2006/main" noGrp="1"/>
-          </p:cNvSpPr>
-          <p:nvPr>
-            <p:ph type="sldImg" idx="0"/>
-          </p:nvPr>
-        </p:nvSpPr>
-        <p:spPr/>
-      </p:sp>
-      <p:sp>
-        <p:nvSpPr>
-          <p:cNvPr id="3" name="Notes Placeholder 2"/>
-          <p:cNvSpPr>
-            <a:spLocks xmlns:a="http://schemas.openxmlformats.org/drawingml/2006/main" noGrp="1"/>
-          </p:cNvSpPr>
-          <p:nvPr>
-            <p:ph type="body" idx="1"/>
-          </p:nvPr>
-        </p:nvSpPr>
-        <p:spPr/>
-        <p:txBody>
-          <a:bodyPr xmlns:a="http://schemas.openxmlformats.org/drawingml/2006/main"/>
-          <a:lstStyle xmlns:a="http://schemas.openxmlformats.org/drawingml/2006/main"/>
-          <a:p xmlns:a="http://schemas.openxmlformats.org/drawingml/2006/main">
-            <a:r>
-              <a:t>Step 2 และ 3 เรียก gfit-adlc-generate กับ gfit-adlc-validate พร้อมกัน Validate วาง acceptance ก่อน ตรวจ spec/plan และส่ง gap กลับ Generate จากนั้นวนแบบเดียวกันกับ test และ code ตัวอย่างในสไลด์เป็นกรณีตรวจ ไม่ใช่ test log จริง</a:t>
-            </a:r>
-          </a:p>
-          <a:p xmlns:a="http://schemas.openxmlformats.org/drawingml/2006/main">
-            <a:r>
-              <a:t/>
-            </a:r>
-          </a:p>
-          <a:p xmlns:a="http://schemas.openxmlformats.org/drawingml/2006/main">
-            <a:r>
-              <a:t>Source: ADLC in Action, reusable .agents/skills/gfit-adlc-* and handson/game-profile.md. Concepts: adlc.io; Anthropic AI-Native SDLC Playbook; Port implementation commentary. Intent targets are example choices. Simulated data is not user research.</a:t>
-            </a:r>
-          </a:p>
-        </p:txBody>
-      </p:sp>
-      <p:sp>
-        <p:nvSpPr>
-          <p:cNvPr id="4" name="Slide Number Placeholder 3"/>
-          <p:cNvSpPr>
-            <a:spLocks xmlns:a="http://schemas.openxmlformats.org/drawingml/2006/main" noGrp="1"/>
-          </p:cNvSpPr>
-          <p:nvPr>
-            <p:ph type="sldNum" idx="5"/>
-          </p:nvPr>
-        </p:nvSpPr>
-        <p:spPr/>
-        <p:txBody>
-          <a:bodyPr xmlns:a="http://schemas.openxmlformats.org/drawingml/2006/main"/>
-          <a:lstStyle xmlns:a="http://schemas.openxmlformats.org/drawingml/2006/main"/>
-          <a:p xmlns:a="http://schemas.openxmlformats.org/drawingml/2006/main"/>
-        </p:txBody>
-      </p:sp>
-    </p:spTree>
-  </p:cSld>
-  <p:clrMapOvr>
-    <a:masterClrMapping xmlns:a="http://schemas.openxmlformats.org/drawingml/2006/main"/>
-  </p:clrMapOvr>
-</p:notes>
-</file>
-
-<file path=ppt/notesSlides/notesSlide11.xml><?xml version="1.0" encoding="utf-8"?>
-<p:notes xmlns:p="http://schemas.openxmlformats.org/presentationml/2006/main">
-  <p:cSld>
-    <p:spTree>
-      <p:nvGrpSpPr>
-        <p:cNvPr id="1" name=""/>
-        <p:cNvGrpSpPr/>
-        <p:nvPr/>
-      </p:nvGrpSpPr>
-      <p:grpSpPr>
-        <a:xfrm xmlns:a="http://schemas.openxmlformats.org/drawingml/2006/main"/>
-      </p:grpSpPr>
-      <p:sp>
-        <p:nvSpPr>
-          <p:cNvPr id="2" name="Slide Image Placeholder 1"/>
-          <p:cNvSpPr>
-            <a:spLocks xmlns:a="http://schemas.openxmlformats.org/drawingml/2006/main" noGrp="1"/>
-          </p:cNvSpPr>
-          <p:nvPr>
-            <p:ph type="sldImg" idx="0"/>
-          </p:nvPr>
-        </p:nvSpPr>
-        <p:spPr/>
-      </p:sp>
-      <p:sp>
-        <p:nvSpPr>
-          <p:cNvPr id="3" name="Notes Placeholder 2"/>
-          <p:cNvSpPr>
-            <a:spLocks xmlns:a="http://schemas.openxmlformats.org/drawingml/2006/main" noGrp="1"/>
-          </p:cNvSpPr>
-          <p:nvPr>
-            <p:ph type="body" idx="1"/>
-          </p:nvPr>
-        </p:nvSpPr>
-        <p:spPr/>
-        <p:txBody>
-          <a:bodyPr xmlns:a="http://schemas.openxmlformats.org/drawingml/2006/main"/>
-          <a:lstStyle xmlns:a="http://schemas.openxmlformats.org/drawingml/2006/main"/>
-          <a:p xmlns:a="http://schemas.openxmlformats.org/drawingml/2006/main">
-            <a:r>
-              <a:t>ก่อน Deploy ให้ผู้เรียนลอง invalid input, win/loss, refresh แล้วเลือก Approve, Revise หรือ Stop หลัง Observe ใช้ signal เลือก Resolved, Iterate หรือ Stop และบันทึก resolution.md Agent เตรียมหลักฐานแต่ไม่ตัดสินแทน</a:t>
-            </a:r>
-          </a:p>
-          <a:p xmlns:a="http://schemas.openxmlformats.org/drawingml/2006/main">
-            <a:r>
-              <a:t/>
-            </a:r>
-          </a:p>
-          <a:p xmlns:a="http://schemas.openxmlformats.org/drawingml/2006/main">
-            <a:r>
-              <a:t>Source: ADLC in Action, reusable .agents/skills/gfit-adlc-* and handson/game-profile.md. Concepts: adlc.io; Anthropic AI-Native SDLC Playbook; Port implementation commentary. Intent targets are example choices. Simulated data is not user research.</a:t>
-            </a:r>
-          </a:p>
-        </p:txBody>
-      </p:sp>
-      <p:sp>
-        <p:nvSpPr>
-          <p:cNvPr id="4" name="Slide Number Placeholder 3"/>
-          <p:cNvSpPr>
-            <a:spLocks xmlns:a="http://schemas.openxmlformats.org/drawingml/2006/main" noGrp="1"/>
-          </p:cNvSpPr>
-          <p:nvPr>
-            <p:ph type="sldNum" idx="5"/>
-          </p:nvPr>
-        </p:nvSpPr>
-        <p:spPr/>
-        <p:txBody>
-          <a:bodyPr xmlns:a="http://schemas.openxmlformats.org/drawingml/2006/main"/>
-          <a:lstStyle xmlns:a="http://schemas.openxmlformats.org/drawingml/2006/main"/>
-          <a:p xmlns:a="http://schemas.openxmlformats.org/drawingml/2006/main"/>
-        </p:txBody>
-      </p:sp>
-    </p:spTree>
-  </p:cSld>
-  <p:clrMapOvr>
-    <a:masterClrMapping xmlns:a="http://schemas.openxmlformats.org/drawingml/2006/main"/>
-  </p:clrMapOvr>
-</p:notes>
-</file>
-
-<file path=ppt/notesSlides/notesSlide12.xml><?xml version="1.0" encoding="utf-8"?>
-<p:notes xmlns:p="http://schemas.openxmlformats.org/presentationml/2006/main">
-  <p:cSld>
-    <p:spTree>
-      <p:nvGrpSpPr>
-        <p:cNvPr id="1" name=""/>
-        <p:cNvGrpSpPr/>
-        <p:nvPr/>
-      </p:nvGrpSpPr>
-      <p:grpSpPr>
-        <a:xfrm xmlns:a="http://schemas.openxmlformats.org/drawingml/2006/main"/>
-      </p:grpSpPr>
-      <p:sp>
-        <p:nvSpPr>
-          <p:cNvPr id="2" name="Slide Image Placeholder 1"/>
-          <p:cNvSpPr>
-            <a:spLocks xmlns:a="http://schemas.openxmlformats.org/drawingml/2006/main" noGrp="1"/>
-          </p:cNvSpPr>
-          <p:nvPr>
-            <p:ph type="sldImg" idx="0"/>
-          </p:nvPr>
-        </p:nvSpPr>
-        <p:spPr/>
-      </p:sp>
-      <p:sp>
-        <p:nvSpPr>
-          <p:cNvPr id="3" name="Notes Placeholder 2"/>
-          <p:cNvSpPr>
-            <a:spLocks xmlns:a="http://schemas.openxmlformats.org/drawingml/2006/main" noGrp="1"/>
-          </p:cNvSpPr>
-          <p:nvPr>
-            <p:ph type="body" idx="1"/>
-          </p:nvPr>
-        </p:nvSpPr>
-        <p:spPr/>
-        <p:txBody>
-          <a:bodyPr xmlns:a="http://schemas.openxmlformats.org/drawingml/2006/main"/>
-          <a:lstStyle xmlns:a="http://schemas.openxmlformats.org/drawingml/2006/main"/>
-          <a:p xmlns:a="http://schemas.openxmlformats.org/drawingml/2006/main">
-            <a:r>
-              <a:t>Deploy ใน lab ใช้ uv run uvicorn app.main:app --host 127.0.0.1 --port 8000 เวอร์ชันที่ตรวจอาจรัน smoke test ด้วย source=test ก่อน จากนั้นตั้ง source=real พร้อม fresh sessions เพื่อสังเกตไม่ชี้นำ การ restart state อาจหายจึงต้องเริ่ม session ใหม่ อย่าอ้างว่า localhost เป็น production</a:t>
-            </a:r>
-          </a:p>
-          <a:p xmlns:a="http://schemas.openxmlformats.org/drawingml/2006/main">
-            <a:r>
-              <a:t/>
-            </a:r>
-          </a:p>
-          <a:p xmlns:a="http://schemas.openxmlformats.org/drawingml/2006/main">
-            <a:r>
-              <a:t>Source: ADLC in Action, reusable .agents/skills/gfit-adlc-* and handson/game-profile.md. Concepts: adlc.io; Anthropic AI-Native SDLC Playbook; Port implementation commentary. Intent targets are example choices. Simulated data is not user research.</a:t>
-            </a:r>
-          </a:p>
-        </p:txBody>
-      </p:sp>
-      <p:sp>
-        <p:nvSpPr>
-          <p:cNvPr id="4" name="Slide Number Placeholder 3"/>
-          <p:cNvSpPr>
-            <a:spLocks xmlns:a="http://schemas.openxmlformats.org/drawingml/2006/main" noGrp="1"/>
-          </p:cNvSpPr>
-          <p:nvPr>
-            <p:ph type="sldNum" idx="5"/>
-          </p:nvPr>
-        </p:nvSpPr>
-        <p:spPr/>
-        <p:txBody>
-          <a:bodyPr xmlns:a="http://schemas.openxmlformats.org/drawingml/2006/main"/>
-          <a:lstStyle xmlns:a="http://schemas.openxmlformats.org/drawingml/2006/main"/>
-          <a:p xmlns:a="http://schemas.openxmlformats.org/drawingml/2006/main"/>
-        </p:txBody>
-      </p:sp>
-    </p:spTree>
-  </p:cSld>
-  <p:clrMapOvr>
-    <a:masterClrMapping xmlns:a="http://schemas.openxmlformats.org/drawingml/2006/main"/>
-  </p:clrMapOvr>
-</p:notes>
-</file>
-
-<file path=ppt/notesSlides/notesSlide13.xml><?xml version="1.0" encoding="utf-8"?>
-<p:notes xmlns:p="http://schemas.openxmlformats.org/presentationml/2006/main">
-  <p:cSld>
-    <p:spTree>
-      <p:nvGrpSpPr>
-        <p:cNvPr id="1" name=""/>
-        <p:cNvGrpSpPr/>
-        <p:nvPr/>
-      </p:nvGrpSpPr>
-      <p:grpSpPr>
-        <a:xfrm xmlns:a="http://schemas.openxmlformats.org/drawingml/2006/main"/>
-      </p:grpSpPr>
-      <p:sp>
-        <p:nvSpPr>
-          <p:cNvPr id="2" name="Slide Image Placeholder 1"/>
-          <p:cNvSpPr>
-            <a:spLocks xmlns:a="http://schemas.openxmlformats.org/drawingml/2006/main" noGrp="1"/>
-          </p:cNvSpPr>
-          <p:nvPr>
-            <p:ph type="sldImg" idx="0"/>
-          </p:nvPr>
-        </p:nvSpPr>
-        <p:spPr/>
-      </p:sp>
-      <p:sp>
-        <p:nvSpPr>
-          <p:cNvPr id="3" name="Notes Placeholder 2"/>
-          <p:cNvSpPr>
-            <a:spLocks xmlns:a="http://schemas.openxmlformats.org/drawingml/2006/main" noGrp="1"/>
-          </p:cNvSpPr>
-          <p:nvPr>
-            <p:ph type="body" idx="1"/>
-          </p:nvPr>
-        </p:nvSpPr>
-        <p:spPr/>
-        <p:txBody>
-          <a:bodyPr xmlns:a="http://schemas.openxmlformats.org/drawingml/2006/main"/>
-          <a:lstStyle xmlns:a="http://schemas.openxmlformats.org/drawingml/2006/main"/>
-          <a:p xmlns:a="http://schemas.openxmlformats.org/drawingml/2006/main">
-            <a:r>
-              <a:t>หยุดถามห้องก่อนเปิดสไลด์ถัดไปว่าทำไม duration อย่างเดียวอาจไม่พอ คนอาจเล่นนานเพราะสับสนหรือเกมช้า การเล่นรอบสองเป็น proxy ที่เราจะทดลอง ไม่ใช่ตัวแทน enjoyment ที่สมบูรณ์</a:t>
-            </a:r>
-          </a:p>
-          <a:p xmlns:a="http://schemas.openxmlformats.org/drawingml/2006/main">
-            <a:r>
-              <a:t/>
-            </a:r>
-          </a:p>
-          <a:p xmlns:a="http://schemas.openxmlformats.org/drawingml/2006/main">
-            <a:r>
-              <a:t>Source: ADLC in Action, reusable .agents/skills/gfit-adlc-* and handson/game-profile.md. Concepts: adlc.io; Anthropic AI-Native SDLC Playbook; Port implementation commentary. Intent targets are example choices. Simulated data is not user research.</a:t>
-            </a:r>
-          </a:p>
-        </p:txBody>
-      </p:sp>
-      <p:sp>
-        <p:nvSpPr>
-          <p:cNvPr id="4" name="Slide Number Placeholder 3"/>
-          <p:cNvSpPr>
-            <a:spLocks xmlns:a="http://schemas.openxmlformats.org/drawingml/2006/main" noGrp="1"/>
-          </p:cNvSpPr>
-          <p:nvPr>
-            <p:ph type="sldNum" idx="5"/>
-          </p:nvPr>
-        </p:nvSpPr>
-        <p:spPr/>
-        <p:txBody>
-          <a:bodyPr xmlns:a="http://schemas.openxmlformats.org/drawingml/2006/main"/>
-          <a:lstStyle xmlns:a="http://schemas.openxmlformats.org/drawingml/2006/main"/>
-          <a:p xmlns:a="http://schemas.openxmlformats.org/drawingml/2006/main"/>
-        </p:txBody>
-      </p:sp>
-    </p:spTree>
-  </p:cSld>
-  <p:clrMapOvr>
-    <a:masterClrMapping xmlns:a="http://schemas.openxmlformats.org/drawingml/2006/main"/>
-  </p:clrMapOvr>
-</p:notes>
-</file>
-
-<file path=ppt/notesSlides/notesSlide14.xml><?xml version="1.0" encoding="utf-8"?>
-<p:notes xmlns:p="http://schemas.openxmlformats.org/presentationml/2006/main">
-  <p:cSld>
-    <p:spTree>
-      <p:nvGrpSpPr>
-        <p:cNvPr id="1" name=""/>
-        <p:cNvGrpSpPr/>
-        <p:nvPr/>
-      </p:nvGrpSpPr>
-      <p:grpSpPr>
-        <a:xfrm xmlns:a="http://schemas.openxmlformats.org/drawingml/2006/main"/>
-      </p:grpSpPr>
-      <p:sp>
-        <p:nvSpPr>
-          <p:cNvPr id="2" name="Slide Image Placeholder 1"/>
-          <p:cNvSpPr>
-            <a:spLocks xmlns:a="http://schemas.openxmlformats.org/drawingml/2006/main" noGrp="1"/>
-          </p:cNvSpPr>
-          <p:nvPr>
-            <p:ph type="sldImg" idx="0"/>
-          </p:nvPr>
-        </p:nvSpPr>
-        <p:spPr/>
-      </p:sp>
-      <p:sp>
-        <p:nvSpPr>
-          <p:cNvPr id="3" name="Notes Placeholder 2"/>
-          <p:cNvSpPr>
-            <a:spLocks xmlns:a="http://schemas.openxmlformats.org/drawingml/2006/main" noGrp="1"/>
-          </p:cNvSpPr>
-          <p:nvPr>
-            <p:ph type="body" idx="1"/>
-          </p:nvPr>
-        </p:nvSpPr>
-        <p:spPr/>
-        <p:txBody>
-          <a:bodyPr xmlns:a="http://schemas.openxmlformats.org/drawingml/2006/main"/>
-          <a:lstStyle xmlns:a="http://schemas.openxmlformats.org/drawingml/2006/main"/>
-          <a:p xmlns:a="http://schemas.openxmlformats.org/drawingml/2006/main">
-            <a:r>
-              <a:t>เปิด README Step 7 เส้นทางหลักใช้ replay button เท่านั้น แผนต้องคง session_id สร้าง round_id ใหม่และ reset attempts หลัง win/loss ระหว่างเล่นไม่มีปุ่ม replay เป้าหมายเป็น +15 percentage points ไม่ใช่ relative 15%; completion guardrail -5 points</a:t>
-            </a:r>
-          </a:p>
-          <a:p xmlns:a="http://schemas.openxmlformats.org/drawingml/2006/main">
-            <a:r>
-              <a:t/>
-            </a:r>
-          </a:p>
-          <a:p xmlns:a="http://schemas.openxmlformats.org/drawingml/2006/main">
-            <a:r>
-              <a:t>Source: ADLC in Action, reusable .agents/skills/gfit-adlc-* and handson/game-profile.md. Concepts: adlc.io; Anthropic AI-Native SDLC Playbook; Port implementation commentary. Intent targets are example choices. Simulated data is not user research.</a:t>
-            </a:r>
-          </a:p>
-        </p:txBody>
-      </p:sp>
-      <p:sp>
-        <p:nvSpPr>
-          <p:cNvPr id="4" name="Slide Number Placeholder 3"/>
-          <p:cNvSpPr>
-            <a:spLocks xmlns:a="http://schemas.openxmlformats.org/drawingml/2006/main" noGrp="1"/>
-          </p:cNvSpPr>
-          <p:nvPr>
-            <p:ph type="sldNum" idx="5"/>
-          </p:nvPr>
-        </p:nvSpPr>
-        <p:spPr/>
-        <p:txBody>
-          <a:bodyPr xmlns:a="http://schemas.openxmlformats.org/drawingml/2006/main"/>
-          <a:lstStyle xmlns:a="http://schemas.openxmlformats.org/drawingml/2006/main"/>
-          <a:p xmlns:a="http://schemas.openxmlformats.org/drawingml/2006/main"/>
-        </p:txBody>
-      </p:sp>
-    </p:spTree>
-  </p:cSld>
-  <p:clrMapOvr>
-    <a:masterClrMapping xmlns:a="http://schemas.openxmlformats.org/drawingml/2006/main"/>
-  </p:clrMapOvr>
-</p:notes>
-</file>
-
-<file path=ppt/notesSlides/notesSlide15.xml><?xml version="1.0" encoding="utf-8"?>
-<p:notes xmlns:p="http://schemas.openxmlformats.org/presentationml/2006/main">
-  <p:cSld>
-    <p:spTree>
-      <p:nvGrpSpPr>
-        <p:cNvPr id="1" name=""/>
-        <p:cNvGrpSpPr/>
-        <p:nvPr/>
-      </p:nvGrpSpPr>
-      <p:grpSpPr>
-        <a:xfrm xmlns:a="http://schemas.openxmlformats.org/drawingml/2006/main"/>
-      </p:grpSpPr>
-      <p:sp>
-        <p:nvSpPr>
-          <p:cNvPr id="2" name="Slide Image Placeholder 1"/>
-          <p:cNvSpPr>
-            <a:spLocks xmlns:a="http://schemas.openxmlformats.org/drawingml/2006/main" noGrp="1"/>
-          </p:cNvSpPr>
-          <p:nvPr>
-            <p:ph type="sldImg" idx="0"/>
-          </p:nvPr>
-        </p:nvSpPr>
-        <p:spPr/>
-      </p:sp>
-      <p:sp>
-        <p:nvSpPr>
-          <p:cNvPr id="3" name="Notes Placeholder 2"/>
-          <p:cNvSpPr>
-            <a:spLocks xmlns:a="http://schemas.openxmlformats.org/drawingml/2006/main" noGrp="1"/>
-          </p:cNvSpPr>
-          <p:nvPr>
-            <p:ph type="body" idx="1"/>
-          </p:nvPr>
-        </p:nvSpPr>
-        <p:spPr/>
-        <p:txBody>
-          <a:bodyPr xmlns:a="http://schemas.openxmlformats.org/drawingml/2006/main"/>
-          <a:lstStyle xmlns:a="http://schemas.openxmlformats.org/drawingml/2006/main"/>
-          <a:p xmlns:a="http://schemas.openxmlformats.org/drawingml/2006/main">
-            <a:r>
-              <a:t>Source: handson/assets/simulated-sessions.csv. This chart uses synthetic data only. v1 starts=100 completed=90 replay=18; v2 starts=100 completed=80 replay=40. Completion=completed/started. Replay=replay/completed after full five-minute follow-up. Replay relative change=(50-20)/20=150%. Completion changes -10 points. These data do not show actual game results.</a:t>
-            </a:r>
-          </a:p>
-          <a:p xmlns:a="http://schemas.openxmlformats.org/drawingml/2006/main">
-            <a:r>
-              <a:t/>
-            </a:r>
-          </a:p>
-          <a:p xmlns:a="http://schemas.openxmlformats.org/drawingml/2006/main">
-            <a:r>
-              <a:t>Source: ADLC in Action, reusable .agents/skills/gfit-adlc-* and handson/game-profile.md. Concepts: adlc.io; Anthropic AI-Native SDLC Playbook; Port implementation commentary. Intent targets are example choices. Simulated data is not user research.</a:t>
-            </a:r>
-          </a:p>
-        </p:txBody>
-      </p:sp>
-      <p:sp>
-        <p:nvSpPr>
-          <p:cNvPr id="4" name="Slide Number Placeholder 3"/>
-          <p:cNvSpPr>
-            <a:spLocks xmlns:a="http://schemas.openxmlformats.org/drawingml/2006/main" noGrp="1"/>
-          </p:cNvSpPr>
-          <p:nvPr>
-            <p:ph type="sldNum" idx="5"/>
-          </p:nvPr>
-        </p:nvSpPr>
-        <p:spPr/>
-        <p:txBody>
-          <a:bodyPr xmlns:a="http://schemas.openxmlformats.org/drawingml/2006/main"/>
-          <a:lstStyle xmlns:a="http://schemas.openxmlformats.org/drawingml/2006/main"/>
-          <a:p xmlns:a="http://schemas.openxmlformats.org/drawingml/2006/main"/>
-        </p:txBody>
-      </p:sp>
-    </p:spTree>
-  </p:cSld>
-  <p:clrMapOvr>
-    <a:masterClrMapping xmlns:a="http://schemas.openxmlformats.org/drawingml/2006/main"/>
-  </p:clrMapOvr>
-</p:notes>
-</file>
-
-<file path=ppt/notesSlides/notesSlide16.xml><?xml version="1.0" encoding="utf-8"?>
-<p:notes xmlns:p="http://schemas.openxmlformats.org/presentationml/2006/main">
-  <p:cSld>
-    <p:spTree>
-      <p:nvGrpSpPr>
-        <p:cNvPr id="1" name=""/>
-        <p:cNvGrpSpPr/>
-        <p:nvPr/>
-      </p:nvGrpSpPr>
-      <p:grpSpPr>
-        <a:xfrm xmlns:a="http://schemas.openxmlformats.org/drawingml/2006/main"/>
-      </p:grpSpPr>
-      <p:sp>
-        <p:nvSpPr>
-          <p:cNvPr id="2" name="Slide Image Placeholder 1"/>
-          <p:cNvSpPr>
-            <a:spLocks xmlns:a="http://schemas.openxmlformats.org/drawingml/2006/main" noGrp="1"/>
-          </p:cNvSpPr>
-          <p:nvPr>
-            <p:ph type="sldImg" idx="0"/>
-          </p:nvPr>
-        </p:nvSpPr>
-        <p:spPr/>
-      </p:sp>
-      <p:sp>
-        <p:nvSpPr>
-          <p:cNvPr id="3" name="Notes Placeholder 2"/>
-          <p:cNvSpPr>
-            <a:spLocks xmlns:a="http://schemas.openxmlformats.org/drawingml/2006/main" noGrp="1"/>
-          </p:cNvSpPr>
-          <p:nvPr>
-            <p:ph type="body" idx="1"/>
-          </p:nvPr>
-        </p:nvSpPr>
-        <p:spPr/>
-        <p:txBody>
-          <a:bodyPr xmlns:a="http://schemas.openxmlformats.org/drawingml/2006/main"/>
-          <a:lstStyle xmlns:a="http://schemas.openxmlformats.org/drawingml/2006/main"/>
-          <a:p xmlns:a="http://schemas.openxmlformats.org/drawingml/2006/main">
-            <a:r>
-              <a:t>ให้ผู้เรียนตัดสินใจก่อนเฉลย เป้าหมาย replay +15 points ผ่าน เพราะได้ +30 แต่ completion ตก -10 เกินกรอบ -5 แม้ blocking_error ในข้อมูลจำลองเป็น 0 ก็สรุป intent สำเร็จทั้งหมดไม่ได้ การตัดสินใจอาจเก็บข้อมูลเพิ่มหรือปรับ design; ไม่สามารถอ้างสาเหตุจากข้อมูล aggregate นี้</a:t>
-            </a:r>
-          </a:p>
-          <a:p xmlns:a="http://schemas.openxmlformats.org/drawingml/2006/main">
-            <a:r>
-              <a:t/>
-            </a:r>
-          </a:p>
-          <a:p xmlns:a="http://schemas.openxmlformats.org/drawingml/2006/main">
-            <a:r>
-              <a:t>Source: ADLC in Action, reusable .agents/skills/gfit-adlc-* and handson/game-profile.md. Concepts: adlc.io; Anthropic AI-Native SDLC Playbook; Port implementation commentary. Intent targets are example choices. Simulated data is not user research.</a:t>
-            </a:r>
-          </a:p>
-        </p:txBody>
-      </p:sp>
-      <p:sp>
-        <p:nvSpPr>
-          <p:cNvPr id="4" name="Slide Number Placeholder 3"/>
-          <p:cNvSpPr>
-            <a:spLocks xmlns:a="http://schemas.openxmlformats.org/drawingml/2006/main" noGrp="1"/>
-          </p:cNvSpPr>
-          <p:nvPr>
-            <p:ph type="sldNum" idx="5"/>
-          </p:nvPr>
-        </p:nvSpPr>
-        <p:spPr/>
-        <p:txBody>
-          <a:bodyPr xmlns:a="http://schemas.openxmlformats.org/drawingml/2006/main"/>
-          <a:lstStyle xmlns:a="http://schemas.openxmlformats.org/drawingml/2006/main"/>
-          <a:p xmlns:a="http://schemas.openxmlformats.org/drawingml/2006/main"/>
-        </p:txBody>
-      </p:sp>
-    </p:spTree>
-  </p:cSld>
-  <p:clrMapOvr>
-    <a:masterClrMapping xmlns:a="http://schemas.openxmlformats.org/drawingml/2006/main"/>
-  </p:clrMapOvr>
-</p:notes>
-</file>
-
-<file path=ppt/notesSlides/notesSlide17.xml><?xml version="1.0" encoding="utf-8"?>
-<p:notes xmlns:p="http://schemas.openxmlformats.org/presentationml/2006/main">
-  <p:cSld>
-    <p:spTree>
-      <p:nvGrpSpPr>
-        <p:cNvPr id="1" name=""/>
-        <p:cNvGrpSpPr/>
-        <p:nvPr/>
-      </p:nvGrpSpPr>
-      <p:grpSpPr>
-        <a:xfrm xmlns:a="http://schemas.openxmlformats.org/drawingml/2006/main"/>
-      </p:grpSpPr>
-      <p:sp>
-        <p:nvSpPr>
-          <p:cNvPr id="2" name="Slide Image Placeholder 1"/>
-          <p:cNvSpPr>
-            <a:spLocks xmlns:a="http://schemas.openxmlformats.org/drawingml/2006/main" noGrp="1"/>
-          </p:cNvSpPr>
-          <p:nvPr>
-            <p:ph type="sldImg" idx="0"/>
-          </p:nvPr>
-        </p:nvSpPr>
-        <p:spPr/>
-      </p:sp>
-      <p:sp>
-        <p:nvSpPr>
-          <p:cNvPr id="3" name="Notes Placeholder 2"/>
-          <p:cNvSpPr>
-            <a:spLocks xmlns:a="http://schemas.openxmlformats.org/drawingml/2006/main" noGrp="1"/>
-          </p:cNvSpPr>
-          <p:nvPr>
-            <p:ph type="body" idx="1"/>
-          </p:nvPr>
-        </p:nvSpPr>
-        <p:spPr/>
-        <p:txBody>
-          <a:bodyPr xmlns:a="http://schemas.openxmlformats.org/drawingml/2006/main"/>
-          <a:lstStyle xmlns:a="http://schemas.openxmlformats.org/drawingml/2006/main"/>
-          <a:p xmlns:a="http://schemas.openxmlformats.org/drawingml/2006/main">
-            <a:r>
-              <a:t>ใช้สไลด์นี้เป็นแผนที่ระหว่าง workshop เวลา 2–3 ชั่วโมงเป็นประมาณการรวมลงมือ ไม่รวมติดตั้ง หากผลจริงยังไม่พอที่ Step6 สามารถไปเรียน Intent2 ได้โดยบอกว่ามันไม่ได้ยืนยัน success อย่าสร้าง artifacts ของทั้งสอง intents ล่วงหน้า</a:t>
-            </a:r>
-          </a:p>
-          <a:p xmlns:a="http://schemas.openxmlformats.org/drawingml/2006/main">
-            <a:r>
-              <a:t/>
-            </a:r>
-          </a:p>
-          <a:p xmlns:a="http://schemas.openxmlformats.org/drawingml/2006/main">
-            <a:r>
-              <a:t>Source: ADLC in Action, reusable .agents/skills/gfit-adlc-* and handson/game-profile.md. Concepts: adlc.io; Anthropic AI-Native SDLC Playbook; Port implementation commentary. Intent targets are example choices. Simulated data is not user research.</a:t>
-            </a:r>
-          </a:p>
-        </p:txBody>
-      </p:sp>
-      <p:sp>
-        <p:nvSpPr>
-          <p:cNvPr id="4" name="Slide Number Placeholder 3"/>
-          <p:cNvSpPr>
-            <a:spLocks xmlns:a="http://schemas.openxmlformats.org/drawingml/2006/main" noGrp="1"/>
-          </p:cNvSpPr>
-          <p:nvPr>
-            <p:ph type="sldNum" idx="5"/>
-          </p:nvPr>
-        </p:nvSpPr>
-        <p:spPr/>
-        <p:txBody>
-          <a:bodyPr xmlns:a="http://schemas.openxmlformats.org/drawingml/2006/main"/>
-          <a:lstStyle xmlns:a="http://schemas.openxmlformats.org/drawingml/2006/main"/>
-          <a:p xmlns:a="http://schemas.openxmlformats.org/drawingml/2006/main"/>
-        </p:txBody>
-      </p:sp>
-    </p:spTree>
-  </p:cSld>
-  <p:clrMapOvr>
-    <a:masterClrMapping xmlns:a="http://schemas.openxmlformats.org/drawingml/2006/main"/>
-  </p:clrMapOvr>
-</p:notes>
-</file>
-
-<file path=ppt/notesSlides/notesSlide18.xml><?xml version="1.0" encoding="utf-8"?>
-<p:notes xmlns:p="http://schemas.openxmlformats.org/presentationml/2006/main">
-  <p:cSld>
-    <p:spTree>
-      <p:nvGrpSpPr>
-        <p:cNvPr id="1" name=""/>
-        <p:cNvGrpSpPr/>
-        <p:nvPr/>
-      </p:nvGrpSpPr>
-      <p:grpSpPr>
-        <a:xfrm xmlns:a="http://schemas.openxmlformats.org/drawingml/2006/main"/>
-      </p:grpSpPr>
-      <p:sp>
-        <p:nvSpPr>
-          <p:cNvPr id="2" name="Slide Image Placeholder 1"/>
-          <p:cNvSpPr>
-            <a:spLocks xmlns:a="http://schemas.openxmlformats.org/drawingml/2006/main" noGrp="1"/>
-          </p:cNvSpPr>
-          <p:nvPr>
-            <p:ph type="sldImg" idx="0"/>
-          </p:nvPr>
-        </p:nvSpPr>
-        <p:spPr/>
-      </p:sp>
-      <p:sp>
-        <p:nvSpPr>
-          <p:cNvPr id="3" name="Notes Placeholder 2"/>
-          <p:cNvSpPr>
-            <a:spLocks xmlns:a="http://schemas.openxmlformats.org/drawingml/2006/main" noGrp="1"/>
-          </p:cNvSpPr>
-          <p:nvPr>
-            <p:ph type="body" idx="1"/>
-          </p:nvPr>
-        </p:nvSpPr>
-        <p:spPr/>
-        <p:txBody>
-          <a:bodyPr xmlns:a="http://schemas.openxmlformats.org/drawingml/2006/main"/>
-          <a:lstStyle xmlns:a="http://schemas.openxmlformats.org/drawingml/2006/main"/>
-          <a:p xmlns:a="http://schemas.openxmlformats.org/drawingml/2006/main">
-            <a:r>
-              <a:t>ให้ผู้เรียนเปิด handson/README.md ใน repo และคัดลอก prompt เต็มจาก Step 0 ชุดปัจจุบันไม่มี remote URL ต้องใช้ clone URL จริงของผู้จัดเมื่อเผยแพร่ ไม่ควรสร้าง URL บนสไลด์ ตอนจบเก็บ feedback ใน artifacts/pilot-notes.md ว่าใช้ Agent/model ใด Step ไหนติด และต้องแก้ prompt อย่างไร Resources: https://www.adlc.io/ (Asaf Saar, ADLC v1.0); https://claude.com/blog/the-ai-native-sdlc-playbook; https://www.port.io/blog/anthropic-ai-native-sdlc-playbook; local handson/README.md</a:t>
-            </a:r>
-          </a:p>
-          <a:p xmlns:a="http://schemas.openxmlformats.org/drawingml/2006/main">
-            <a:r>
-              <a:t/>
-            </a:r>
-          </a:p>
-          <a:p xmlns:a="http://schemas.openxmlformats.org/drawingml/2006/main">
-            <a:r>
-              <a:t>Source: ADLC in Action, reusable .agents/skills/gfit-adlc-* and handson/game-profile.md. Concepts: adlc.io; Anthropic AI-Native SDLC Playbook; Port implementation commentary. Intent targets are example choices. Simulated data is not user research.</a:t>
-            </a:r>
-          </a:p>
-        </p:txBody>
-      </p:sp>
-      <p:sp>
-        <p:nvSpPr>
-          <p:cNvPr id="4" name="Slide Number Placeholder 3"/>
-          <p:cNvSpPr>
-            <a:spLocks xmlns:a="http://schemas.openxmlformats.org/drawingml/2006/main" noGrp="1"/>
-          </p:cNvSpPr>
-          <p:nvPr>
-            <p:ph type="sldNum" idx="5"/>
-          </p:nvPr>
-        </p:nvSpPr>
-        <p:spPr/>
-        <p:txBody>
-          <a:bodyPr xmlns:a="http://schemas.openxmlformats.org/drawingml/2006/main"/>
-          <a:lstStyle xmlns:a="http://schemas.openxmlformats.org/drawingml/2006/main"/>
-          <a:p xmlns:a="http://schemas.openxmlformats.org/drawingml/2006/main"/>
-        </p:txBody>
-      </p:sp>
-    </p:spTree>
-  </p:cSld>
-  <p:clrMapOvr>
-    <a:masterClrMapping xmlns:a="http://schemas.openxmlformats.org/drawingml/2006/main"/>
-  </p:clrMapOvr>
-</p:notes>
-</file>
-
-<file path=ppt/notesSlides/notesSlide2.xml><?xml version="1.0" encoding="utf-8"?>
-<p:notes xmlns:p="http://schemas.openxmlformats.org/presentationml/2006/main">
-  <p:cSld>
-    <p:spTree>
-      <p:nvGrpSpPr>
-        <p:cNvPr id="1" name=""/>
-        <p:cNvGrpSpPr/>
-        <p:nvPr/>
-      </p:nvGrpSpPr>
-      <p:grpSpPr>
-        <a:xfrm xmlns:a="http://schemas.openxmlformats.org/drawingml/2006/main"/>
-      </p:grpSpPr>
-      <p:sp>
-        <p:nvSpPr>
-          <p:cNvPr id="2" name="Slide Image Placeholder 1"/>
-          <p:cNvSpPr>
-            <a:spLocks xmlns:a="http://schemas.openxmlformats.org/drawingml/2006/main" noGrp="1"/>
-          </p:cNvSpPr>
-          <p:nvPr>
-            <p:ph type="sldImg" idx="0"/>
-          </p:nvPr>
-        </p:nvSpPr>
-        <p:spPr/>
-      </p:sp>
-      <p:sp>
-        <p:nvSpPr>
-          <p:cNvPr id="3" name="Notes Placeholder 2"/>
-          <p:cNvSpPr>
-            <a:spLocks xmlns:a="http://schemas.openxmlformats.org/drawingml/2006/main" noGrp="1"/>
-          </p:cNvSpPr>
-          <p:nvPr>
-            <p:ph type="body" idx="1"/>
-          </p:nvPr>
-        </p:nvSpPr>
-        <p:spPr/>
-        <p:txBody>
-          <a:bodyPr xmlns:a="http://schemas.openxmlformats.org/drawingml/2006/main"/>
-          <a:lstStyle xmlns:a="http://schemas.openxmlformats.org/drawingml/2006/main"/>
-          <a:p xmlns:a="http://schemas.openxmlformats.org/drawingml/2006/main">
-            <a:r>
-              <a:t>อธิบายผลลัพธ์ที่จะได้ ไม่จำเป็นให้โค้ดหน้าตาเหมือนกัน ทุกคนได้เกมที่ผ่านกติกาเดียวกัน ชุดนี้เป็น pilot ที่ผู้ใช้จะเริ่มทดลองจริงเป็นคนแรก</a:t>
-            </a:r>
-          </a:p>
-          <a:p xmlns:a="http://schemas.openxmlformats.org/drawingml/2006/main">
-            <a:r>
-              <a:t/>
-            </a:r>
-          </a:p>
-          <a:p xmlns:a="http://schemas.openxmlformats.org/drawingml/2006/main">
-            <a:r>
-              <a:t>Source: ADLC in Action, reusable .agents/skills/gfit-adlc-* and handson/game-profile.md. Concepts: adlc.io; Anthropic AI-Native SDLC Playbook; Port implementation commentary. Intent targets are example choices. Simulated data is not user research.</a:t>
-            </a:r>
-          </a:p>
-        </p:txBody>
-      </p:sp>
-      <p:sp>
-        <p:nvSpPr>
-          <p:cNvPr id="4" name="Slide Number Placeholder 3"/>
-          <p:cNvSpPr>
-            <a:spLocks xmlns:a="http://schemas.openxmlformats.org/drawingml/2006/main" noGrp="1"/>
-          </p:cNvSpPr>
-          <p:nvPr>
-            <p:ph type="sldNum" idx="5"/>
-          </p:nvPr>
-        </p:nvSpPr>
-        <p:spPr/>
-        <p:txBody>
-          <a:bodyPr xmlns:a="http://schemas.openxmlformats.org/drawingml/2006/main"/>
-          <a:lstStyle xmlns:a="http://schemas.openxmlformats.org/drawingml/2006/main"/>
-          <a:p xmlns:a="http://schemas.openxmlformats.org/drawingml/2006/main"/>
-        </p:txBody>
-      </p:sp>
-    </p:spTree>
-  </p:cSld>
-  <p:clrMapOvr>
-    <a:masterClrMapping xmlns:a="http://schemas.openxmlformats.org/drawingml/2006/main"/>
-  </p:clrMapOvr>
-</p:notes>
-</file>
-
-<file path=ppt/notesSlides/notesSlide3.xml><?xml version="1.0" encoding="utf-8"?>
-<p:notes xmlns:p="http://schemas.openxmlformats.org/presentationml/2006/main">
-  <p:cSld>
-    <p:spTree>
-      <p:nvGrpSpPr>
-        <p:cNvPr id="1" name=""/>
-        <p:cNvGrpSpPr/>
-        <p:nvPr/>
-      </p:nvGrpSpPr>
-      <p:grpSpPr>
-        <a:xfrm xmlns:a="http://schemas.openxmlformats.org/drawingml/2006/main"/>
-      </p:grpSpPr>
-      <p:sp>
-        <p:nvSpPr>
-          <p:cNvPr id="2" name="Slide Image Placeholder 1"/>
-          <p:cNvSpPr>
-            <a:spLocks xmlns:a="http://schemas.openxmlformats.org/drawingml/2006/main" noGrp="1"/>
-          </p:cNvSpPr>
-          <p:nvPr>
-            <p:ph type="sldImg" idx="0"/>
-          </p:nvPr>
-        </p:nvSpPr>
-        <p:spPr/>
-      </p:sp>
-      <p:sp>
-        <p:nvSpPr>
-          <p:cNvPr id="3" name="Notes Placeholder 2"/>
-          <p:cNvSpPr>
-            <a:spLocks xmlns:a="http://schemas.openxmlformats.org/drawingml/2006/main" noGrp="1"/>
-          </p:cNvSpPr>
-          <p:nvPr>
-            <p:ph type="body" idx="1"/>
-          </p:nvPr>
-        </p:nvSpPr>
-        <p:spPr/>
-        <p:txBody>
-          <a:bodyPr xmlns:a="http://schemas.openxmlformats.org/drawingml/2006/main"/>
-          <a:lstStyle xmlns:a="http://schemas.openxmlformats.org/drawingml/2006/main"/>
-          <a:p xmlns:a="http://schemas.openxmlformats.org/drawingml/2006/main">
-            <a:r>
-              <a:t>แนวคิดอ้างอิง ADLC v1.0 ของ Asaf Saar: https://www.adlc.io/ ในระบบจริง phases ซ้อนทับและทำงานต่อเนื่อง Workshop แบ่งเป็น Step เพื่อให้เรียนทัน ไม่ได้หมายความว่า ADLC บังคับให้รอจบทุก phase ก่อนเริ่มอีก phase เอกสารนี้ใช้คำ Intent ตามข้อตกลงของ Workshop</a:t>
-            </a:r>
-          </a:p>
-          <a:p xmlns:a="http://schemas.openxmlformats.org/drawingml/2006/main">
-            <a:r>
-              <a:t/>
-            </a:r>
-          </a:p>
-          <a:p xmlns:a="http://schemas.openxmlformats.org/drawingml/2006/main">
-            <a:r>
-              <a:t>Source: ADLC in Action, reusable .agents/skills/gfit-adlc-* and handson/game-profile.md. Concepts: adlc.io; Anthropic AI-Native SDLC Playbook; Port implementation commentary. Intent targets are example choices. Simulated data is not user research.</a:t>
-            </a:r>
-          </a:p>
-        </p:txBody>
-      </p:sp>
-      <p:sp>
-        <p:nvSpPr>
-          <p:cNvPr id="4" name="Slide Number Placeholder 3"/>
-          <p:cNvSpPr>
-            <a:spLocks xmlns:a="http://schemas.openxmlformats.org/drawingml/2006/main" noGrp="1"/>
-          </p:cNvSpPr>
-          <p:nvPr>
-            <p:ph type="sldNum" idx="5"/>
-          </p:nvPr>
-        </p:nvSpPr>
-        <p:spPr/>
-        <p:txBody>
-          <a:bodyPr xmlns:a="http://schemas.openxmlformats.org/drawingml/2006/main"/>
-          <a:lstStyle xmlns:a="http://schemas.openxmlformats.org/drawingml/2006/main"/>
-          <a:p xmlns:a="http://schemas.openxmlformats.org/drawingml/2006/main"/>
-        </p:txBody>
-      </p:sp>
-    </p:spTree>
-  </p:cSld>
-  <p:clrMapOvr>
-    <a:masterClrMapping xmlns:a="http://schemas.openxmlformats.org/drawingml/2006/main"/>
-  </p:clrMapOvr>
-</p:notes>
-</file>
-
-<file path=ppt/notesSlides/notesSlide4.xml><?xml version="1.0" encoding="utf-8"?>
-<p:notes xmlns:p="http://schemas.openxmlformats.org/presentationml/2006/main">
-  <p:cSld>
-    <p:spTree>
-      <p:nvGrpSpPr>
-        <p:cNvPr id="1" name=""/>
-        <p:cNvGrpSpPr/>
-        <p:nvPr/>
-      </p:nvGrpSpPr>
-      <p:grpSpPr>
-        <a:xfrm xmlns:a="http://schemas.openxmlformats.org/drawingml/2006/main"/>
-      </p:grpSpPr>
-      <p:sp>
-        <p:nvSpPr>
-          <p:cNvPr id="2" name="Slide Image Placeholder 1"/>
-          <p:cNvSpPr>
-            <a:spLocks xmlns:a="http://schemas.openxmlformats.org/drawingml/2006/main" noGrp="1"/>
-          </p:cNvSpPr>
-          <p:nvPr>
-            <p:ph type="sldImg" idx="0"/>
-          </p:nvPr>
-        </p:nvSpPr>
-        <p:spPr/>
-      </p:sp>
-      <p:sp>
-        <p:nvSpPr>
-          <p:cNvPr id="3" name="Notes Placeholder 2"/>
-          <p:cNvSpPr>
-            <a:spLocks xmlns:a="http://schemas.openxmlformats.org/drawingml/2006/main" noGrp="1"/>
-          </p:cNvSpPr>
-          <p:nvPr>
-            <p:ph type="body" idx="1"/>
-          </p:nvPr>
-        </p:nvSpPr>
-        <p:spPr/>
-        <p:txBody>
-          <a:bodyPr xmlns:a="http://schemas.openxmlformats.org/drawingml/2006/main"/>
-          <a:lstStyle xmlns:a="http://schemas.openxmlformats.org/drawingml/2006/main"/>
-          <a:p xmlns:a="http://schemas.openxmlformats.org/drawingml/2006/main">
-            <a:r>
-              <a:t>ถามผู้เรียนว่าการตัดสินใจใดควรอยู่กับตนเอง อธิบายว่า Agent เตรียมหลักฐานและข้อเสนอได้ แต่ห้ามแต่งคำอนุมัติของมนุษย์ Sources: https://www.adlc.io/ และ AGENTS.md ของ Lab</a:t>
-            </a:r>
-          </a:p>
-          <a:p xmlns:a="http://schemas.openxmlformats.org/drawingml/2006/main">
-            <a:r>
-              <a:t/>
-            </a:r>
-          </a:p>
-          <a:p xmlns:a="http://schemas.openxmlformats.org/drawingml/2006/main">
-            <a:r>
-              <a:t>Source: ADLC in Action, reusable .agents/skills/gfit-adlc-* and handson/game-profile.md. Concepts: adlc.io; Anthropic AI-Native SDLC Playbook; Port implementation commentary. Intent targets are example choices. Simulated data is not user research.</a:t>
-            </a:r>
-          </a:p>
-        </p:txBody>
-      </p:sp>
-      <p:sp>
-        <p:nvSpPr>
-          <p:cNvPr id="4" name="Slide Number Placeholder 3"/>
-          <p:cNvSpPr>
-            <a:spLocks xmlns:a="http://schemas.openxmlformats.org/drawingml/2006/main" noGrp="1"/>
-          </p:cNvSpPr>
-          <p:nvPr>
-            <p:ph type="sldNum" idx="5"/>
-          </p:nvPr>
-        </p:nvSpPr>
-        <p:spPr/>
-        <p:txBody>
-          <a:bodyPr xmlns:a="http://schemas.openxmlformats.org/drawingml/2006/main"/>
-          <a:lstStyle xmlns:a="http://schemas.openxmlformats.org/drawingml/2006/main"/>
-          <a:p xmlns:a="http://schemas.openxmlformats.org/drawingml/2006/main"/>
-        </p:txBody>
-      </p:sp>
-    </p:spTree>
-  </p:cSld>
-  <p:clrMapOvr>
-    <a:masterClrMapping xmlns:a="http://schemas.openxmlformats.org/drawingml/2006/main"/>
-  </p:clrMapOvr>
-</p:notes>
-</file>
-
-<file path=ppt/notesSlides/notesSlide5.xml><?xml version="1.0" encoding="utf-8"?>
-<p:notes xmlns:p="http://schemas.openxmlformats.org/presentationml/2006/main">
-  <p:cSld>
-    <p:spTree>
-      <p:nvGrpSpPr>
-        <p:cNvPr id="1" name=""/>
-        <p:cNvGrpSpPr/>
-        <p:nvPr/>
-      </p:nvGrpSpPr>
-      <p:grpSpPr>
-        <a:xfrm xmlns:a="http://schemas.openxmlformats.org/drawingml/2006/main"/>
-      </p:grpSpPr>
-      <p:sp>
-        <p:nvSpPr>
-          <p:cNvPr id="2" name="Slide Image Placeholder 1"/>
-          <p:cNvSpPr>
-            <a:spLocks xmlns:a="http://schemas.openxmlformats.org/drawingml/2006/main" noGrp="1"/>
-          </p:cNvSpPr>
-          <p:nvPr>
-            <p:ph type="sldImg" idx="0"/>
-          </p:nvPr>
-        </p:nvSpPr>
-        <p:spPr/>
-      </p:sp>
-      <p:sp>
-        <p:nvSpPr>
-          <p:cNvPr id="3" name="Notes Placeholder 2"/>
-          <p:cNvSpPr>
-            <a:spLocks xmlns:a="http://schemas.openxmlformats.org/drawingml/2006/main" noGrp="1"/>
-          </p:cNvSpPr>
-          <p:nvPr>
-            <p:ph type="body" idx="1"/>
-          </p:nvPr>
-        </p:nvSpPr>
-        <p:spPr/>
-        <p:txBody>
-          <a:bodyPr xmlns:a="http://schemas.openxmlformats.org/drawingml/2006/main"/>
-          <a:lstStyle xmlns:a="http://schemas.openxmlformats.org/drawingml/2006/main"/>
-          <a:p xmlns:a="http://schemas.openxmlformats.org/drawingml/2006/main">
-            <a:r>
-              <a:t>เปิดโฟลเดอร์จริงให้ดูได้ ขณะเริ่มยังไม่มี app/ หรือ artifacts/ การเรียก skill ทำผ่านการอ่านไฟล์ตรงเป็น fallback หาก Agent ไม่ discover .agents/skills/ อัตโนมัติ ไม่ต้องติดตั้ง global Source formats: https://agents.md/ and https://agentskills.io/specification</a:t>
-            </a:r>
-          </a:p>
-          <a:p xmlns:a="http://schemas.openxmlformats.org/drawingml/2006/main">
-            <a:r>
-              <a:t/>
-            </a:r>
-          </a:p>
-          <a:p xmlns:a="http://schemas.openxmlformats.org/drawingml/2006/main">
-            <a:r>
-              <a:t>Source: ADLC in Action, reusable .agents/skills/gfit-adlc-* and handson/game-profile.md. Concepts: adlc.io; Anthropic AI-Native SDLC Playbook; Port implementation commentary. Intent targets are example choices. Simulated data is not user research.</a:t>
-            </a:r>
-          </a:p>
-        </p:txBody>
-      </p:sp>
-      <p:sp>
-        <p:nvSpPr>
-          <p:cNvPr id="4" name="Slide Number Placeholder 3"/>
-          <p:cNvSpPr>
-            <a:spLocks xmlns:a="http://schemas.openxmlformats.org/drawingml/2006/main" noGrp="1"/>
-          </p:cNvSpPr>
-          <p:nvPr>
-            <p:ph type="sldNum" idx="5"/>
-          </p:nvPr>
-        </p:nvSpPr>
-        <p:spPr/>
-        <p:txBody>
-          <a:bodyPr xmlns:a="http://schemas.openxmlformats.org/drawingml/2006/main"/>
-          <a:lstStyle xmlns:a="http://schemas.openxmlformats.org/drawingml/2006/main"/>
-          <a:p xmlns:a="http://schemas.openxmlformats.org/drawingml/2006/main"/>
-        </p:txBody>
-      </p:sp>
-    </p:spTree>
-  </p:cSld>
-  <p:clrMapOvr>
-    <a:masterClrMapping xmlns:a="http://schemas.openxmlformats.org/drawingml/2006/main"/>
-  </p:clrMapOvr>
-</p:notes>
-</file>
-
-<file path=ppt/notesSlides/notesSlide6.xml><?xml version="1.0" encoding="utf-8"?>
-<p:notes xmlns:p="http://schemas.openxmlformats.org/presentationml/2006/main">
-  <p:cSld>
-    <p:spTree>
-      <p:nvGrpSpPr>
-        <p:cNvPr id="1" name=""/>
-        <p:cNvGrpSpPr/>
-        <p:nvPr/>
-      </p:nvGrpSpPr>
-      <p:grpSpPr>
-        <a:xfrm xmlns:a="http://schemas.openxmlformats.org/drawingml/2006/main"/>
-      </p:grpSpPr>
-      <p:sp>
-        <p:nvSpPr>
-          <p:cNvPr id="2" name="Slide Image Placeholder 1"/>
-          <p:cNvSpPr>
-            <a:spLocks xmlns:a="http://schemas.openxmlformats.org/drawingml/2006/main" noGrp="1"/>
-          </p:cNvSpPr>
-          <p:nvPr>
-            <p:ph type="sldImg" idx="0"/>
-          </p:nvPr>
-        </p:nvSpPr>
-        <p:spPr/>
-      </p:sp>
-      <p:sp>
-        <p:nvSpPr>
-          <p:cNvPr id="3" name="Notes Placeholder 2"/>
-          <p:cNvSpPr>
-            <a:spLocks xmlns:a="http://schemas.openxmlformats.org/drawingml/2006/main" noGrp="1"/>
-          </p:cNvSpPr>
-          <p:nvPr>
-            <p:ph type="body" idx="1"/>
-          </p:nvPr>
-        </p:nvSpPr>
-        <p:spPr/>
-        <p:txBody>
-          <a:bodyPr xmlns:a="http://schemas.openxmlformats.org/drawingml/2006/main"/>
-          <a:lstStyle xmlns:a="http://schemas.openxmlformats.org/drawingml/2006/main"/>
-          <a:p xmlns:a="http://schemas.openxmlformats.org/drawingml/2006/main">
-            <a:r>
-              <a:t>ทุก Skill มี SKILL.md ตาม Agent Skills และขึ้นต้นด้วย gfit-adlc- ส่วน stack, commands, paths และ metrics ของเกมอยู่ใน handson/game-profile.md Sources: .agents/skills/gfit-adlc-intent/references/sources.md; https://agentskills.io/specification</a:t>
-            </a:r>
-          </a:p>
-          <a:p xmlns:a="http://schemas.openxmlformats.org/drawingml/2006/main">
-            <a:r>
-              <a:t/>
-            </a:r>
-          </a:p>
-          <a:p xmlns:a="http://schemas.openxmlformats.org/drawingml/2006/main">
-            <a:r>
-              <a:t>Source: ADLC in Action, reusable .agents/skills/gfit-adlc-* and handson/game-profile.md. Concepts: adlc.io; Anthropic AI-Native SDLC Playbook; Port implementation commentary. Intent targets are example choices. Simulated data is not user research.</a:t>
-            </a:r>
-          </a:p>
-        </p:txBody>
-      </p:sp>
-      <p:sp>
-        <p:nvSpPr>
-          <p:cNvPr id="4" name="Slide Number Placeholder 3"/>
-          <p:cNvSpPr>
-            <a:spLocks xmlns:a="http://schemas.openxmlformats.org/drawingml/2006/main" noGrp="1"/>
-          </p:cNvSpPr>
-          <p:nvPr>
-            <p:ph type="sldNum" idx="5"/>
-          </p:nvPr>
-        </p:nvSpPr>
-        <p:spPr/>
-        <p:txBody>
-          <a:bodyPr xmlns:a="http://schemas.openxmlformats.org/drawingml/2006/main"/>
-          <a:lstStyle xmlns:a="http://schemas.openxmlformats.org/drawingml/2006/main"/>
-          <a:p xmlns:a="http://schemas.openxmlformats.org/drawingml/2006/main"/>
-        </p:txBody>
-      </p:sp>
-    </p:spTree>
-  </p:cSld>
-  <p:clrMapOvr>
-    <a:masterClrMapping xmlns:a="http://schemas.openxmlformats.org/drawingml/2006/main"/>
-  </p:clrMapOvr>
-</p:notes>
-</file>
-
-<file path=ppt/notesSlides/notesSlide7.xml><?xml version="1.0" encoding="utf-8"?>
-<p:notes xmlns:p="http://schemas.openxmlformats.org/presentationml/2006/main">
-  <p:cSld>
-    <p:spTree>
-      <p:nvGrpSpPr>
-        <p:cNvPr id="1" name=""/>
-        <p:cNvGrpSpPr/>
-        <p:nvPr/>
-      </p:nvGrpSpPr>
-      <p:grpSpPr>
-        <a:xfrm xmlns:a="http://schemas.openxmlformats.org/drawingml/2006/main"/>
-      </p:grpSpPr>
-      <p:sp>
-        <p:nvSpPr>
-          <p:cNvPr id="2" name="Slide Image Placeholder 1"/>
-          <p:cNvSpPr>
-            <a:spLocks xmlns:a="http://schemas.openxmlformats.org/drawingml/2006/main" noGrp="1"/>
-          </p:cNvSpPr>
-          <p:nvPr>
-            <p:ph type="sldImg" idx="0"/>
-          </p:nvPr>
-        </p:nvSpPr>
-        <p:spPr/>
-      </p:sp>
-      <p:sp>
-        <p:nvSpPr>
-          <p:cNvPr id="3" name="Notes Placeholder 2"/>
-          <p:cNvSpPr>
-            <a:spLocks xmlns:a="http://schemas.openxmlformats.org/drawingml/2006/main" noGrp="1"/>
-          </p:cNvSpPr>
-          <p:nvPr>
-            <p:ph type="body" idx="1"/>
-          </p:nvPr>
-        </p:nvSpPr>
-        <p:spPr/>
-        <p:txBody>
-          <a:bodyPr xmlns:a="http://schemas.openxmlformats.org/drawingml/2006/main"/>
-          <a:lstStyle xmlns:a="http://schemas.openxmlformats.org/drawingml/2006/main"/>
-          <a:p xmlns:a="http://schemas.openxmlformats.org/drawingml/2006/main">
-            <a:r>
-              <a:t>อธิบายกติกาพื้นฐานก่อนเริ่ม Spec: เลข 1–100, 7 attempts, ต่ำไป/สูงไป, ชนะถ้าถูกครั้งที่ 7, input ไม่ถูกต้องไม่เสีย attempt ไม่มี replay button ในหน้าจบ v1 แต่กลับ home เริ่มรอบใหม่ได้ เป็น baseline ที่มี friction</a:t>
-            </a:r>
-          </a:p>
-          <a:p xmlns:a="http://schemas.openxmlformats.org/drawingml/2006/main">
-            <a:r>
-              <a:t/>
-            </a:r>
-          </a:p>
-          <a:p xmlns:a="http://schemas.openxmlformats.org/drawingml/2006/main">
-            <a:r>
-              <a:t>Source: ADLC in Action, reusable .agents/skills/gfit-adlc-* and handson/game-profile.md. Concepts: adlc.io; Anthropic AI-Native SDLC Playbook; Port implementation commentary. Intent targets are example choices. Simulated data is not user research.</a:t>
-            </a:r>
-          </a:p>
-        </p:txBody>
-      </p:sp>
-      <p:sp>
-        <p:nvSpPr>
-          <p:cNvPr id="4" name="Slide Number Placeholder 3"/>
-          <p:cNvSpPr>
-            <a:spLocks xmlns:a="http://schemas.openxmlformats.org/drawingml/2006/main" noGrp="1"/>
-          </p:cNvSpPr>
-          <p:nvPr>
-            <p:ph type="sldNum" idx="5"/>
-          </p:nvPr>
-        </p:nvSpPr>
-        <p:spPr/>
-        <p:txBody>
-          <a:bodyPr xmlns:a="http://schemas.openxmlformats.org/drawingml/2006/main"/>
-          <a:lstStyle xmlns:a="http://schemas.openxmlformats.org/drawingml/2006/main"/>
-          <a:p xmlns:a="http://schemas.openxmlformats.org/drawingml/2006/main"/>
-        </p:txBody>
-      </p:sp>
-    </p:spTree>
-  </p:cSld>
-  <p:clrMapOvr>
-    <a:masterClrMapping xmlns:a="http://schemas.openxmlformats.org/drawingml/2006/main"/>
-  </p:clrMapOvr>
-</p:notes>
-</file>
-
-<file path=ppt/notesSlides/notesSlide8.xml><?xml version="1.0" encoding="utf-8"?>
-<p:notes xmlns:p="http://schemas.openxmlformats.org/presentationml/2006/main">
-  <p:cSld>
-    <p:spTree>
-      <p:nvGrpSpPr>
-        <p:cNvPr id="1" name=""/>
-        <p:cNvGrpSpPr/>
-        <p:nvPr/>
-      </p:nvGrpSpPr>
-      <p:grpSpPr>
-        <a:xfrm xmlns:a="http://schemas.openxmlformats.org/drawingml/2006/main"/>
-      </p:grpSpPr>
-      <p:sp>
-        <p:nvSpPr>
-          <p:cNvPr id="2" name="Slide Image Placeholder 1"/>
-          <p:cNvSpPr>
-            <a:spLocks xmlns:a="http://schemas.openxmlformats.org/drawingml/2006/main" noGrp="1"/>
-          </p:cNvSpPr>
-          <p:nvPr>
-            <p:ph type="sldImg" idx="0"/>
-          </p:nvPr>
-        </p:nvSpPr>
-        <p:spPr/>
-      </p:sp>
-      <p:sp>
-        <p:nvSpPr>
-          <p:cNvPr id="3" name="Notes Placeholder 2"/>
-          <p:cNvSpPr>
-            <a:spLocks xmlns:a="http://schemas.openxmlformats.org/drawingml/2006/main" noGrp="1"/>
-          </p:cNvSpPr>
-          <p:nvPr>
-            <p:ph type="body" idx="1"/>
-          </p:nvPr>
-        </p:nvSpPr>
-        <p:spPr/>
-        <p:txBody>
-          <a:bodyPr xmlns:a="http://schemas.openxmlformats.org/drawingml/2006/main"/>
-          <a:lstStyle xmlns:a="http://schemas.openxmlformats.org/drawingml/2006/main"/>
-          <a:p xmlns:a="http://schemas.openxmlformats.org/drawingml/2006/main">
-            <a:r>
-              <a:t>เป้าหมายที่เลือกเพื่อ pilot คืออย่างน้อย 4 จาก 5 session จบรอบแรกภายใน 5 นาที ไม่ใช่ผลที่เกิดขึ้นแล้ว และไม่ใช่ statistical threshold การทดลองคนเดียว 5 sessions ต้องระบุว่า self-test; ไม่เท่ากับผู้เล่นใหม่ 5 คน</a:t>
-            </a:r>
-          </a:p>
-          <a:p xmlns:a="http://schemas.openxmlformats.org/drawingml/2006/main">
-            <a:r>
-              <a:t/>
-            </a:r>
-          </a:p>
-          <a:p xmlns:a="http://schemas.openxmlformats.org/drawingml/2006/main">
-            <a:r>
-              <a:t>Source: ADLC in Action, reusable .agents/skills/gfit-adlc-* and handson/game-profile.md. Concepts: adlc.io; Anthropic AI-Native SDLC Playbook; Port implementation commentary. Intent targets are example choices. Simulated data is not user research.</a:t>
-            </a:r>
-          </a:p>
-        </p:txBody>
-      </p:sp>
-      <p:sp>
-        <p:nvSpPr>
-          <p:cNvPr id="4" name="Slide Number Placeholder 3"/>
-          <p:cNvSpPr>
-            <a:spLocks xmlns:a="http://schemas.openxmlformats.org/drawingml/2006/main" noGrp="1"/>
-          </p:cNvSpPr>
-          <p:nvPr>
-            <p:ph type="sldNum" idx="5"/>
-          </p:nvPr>
-        </p:nvSpPr>
-        <p:spPr/>
-        <p:txBody>
-          <a:bodyPr xmlns:a="http://schemas.openxmlformats.org/drawingml/2006/main"/>
-          <a:lstStyle xmlns:a="http://schemas.openxmlformats.org/drawingml/2006/main"/>
-          <a:p xmlns:a="http://schemas.openxmlformats.org/drawingml/2006/main"/>
-        </p:txBody>
-      </p:sp>
-    </p:spTree>
-  </p:cSld>
-  <p:clrMapOvr>
-    <a:masterClrMapping xmlns:a="http://schemas.openxmlformats.org/drawingml/2006/main"/>
-  </p:clrMapOvr>
-</p:notes>
-</file>
-
-<file path=ppt/notesSlides/notesSlide9.xml><?xml version="1.0" encoding="utf-8"?>
-<p:notes xmlns:p="http://schemas.openxmlformats.org/presentationml/2006/main">
-  <p:cSld>
-    <p:spTree>
-      <p:nvGrpSpPr>
-        <p:cNvPr id="1" name=""/>
-        <p:cNvGrpSpPr/>
-        <p:nvPr/>
-      </p:nvGrpSpPr>
-      <p:grpSpPr>
-        <a:xfrm xmlns:a="http://schemas.openxmlformats.org/drawingml/2006/main"/>
-      </p:grpSpPr>
-      <p:sp>
-        <p:nvSpPr>
-          <p:cNvPr id="2" name="Slide Image Placeholder 1"/>
-          <p:cNvSpPr>
-            <a:spLocks xmlns:a="http://schemas.openxmlformats.org/drawingml/2006/main" noGrp="1"/>
-          </p:cNvSpPr>
-          <p:nvPr>
-            <p:ph type="sldImg" idx="0"/>
-          </p:nvPr>
-        </p:nvSpPr>
-        <p:spPr/>
-      </p:sp>
-      <p:sp>
-        <p:nvSpPr>
-          <p:cNvPr id="3" name="Notes Placeholder 2"/>
-          <p:cNvSpPr>
-            <a:spLocks xmlns:a="http://schemas.openxmlformats.org/drawingml/2006/main" noGrp="1"/>
-          </p:cNvSpPr>
-          <p:nvPr>
-            <p:ph type="body" idx="1"/>
-          </p:nvPr>
-        </p:nvSpPr>
-        <p:spPr/>
-        <p:txBody>
-          <a:bodyPr xmlns:a="http://schemas.openxmlformats.org/drawingml/2006/main"/>
-          <a:lstStyle xmlns:a="http://schemas.openxmlformats.org/drawingml/2006/main"/>
-          <a:p xmlns:a="http://schemas.openxmlformats.org/drawingml/2006/main">
-            <a:r>
-              <a:t>พาผู้เรียนเปิด artifacts/intent-001/ แต่เมื่อก่อนทำ Lab ยังไม่มีไฟล์เหล่านี้ อธิบายว่าตารางนี้แสดงผลที่คาดว่าจะเกิด ไม่ใช่หลักฐานว่าทำครบแล้ว ให้หยุดอ่านเอกสารก่อนกด Step ถัดไป</a:t>
-            </a:r>
-          </a:p>
-          <a:p xmlns:a="http://schemas.openxmlformats.org/drawingml/2006/main">
-            <a:r>
-              <a:t/>
-            </a:r>
-          </a:p>
-          <a:p xmlns:a="http://schemas.openxmlformats.org/drawingml/2006/main">
-            <a:r>
-              <a:t>Source: ADLC in Action, reusable .agents/skills/gfit-adlc-* and handson/game-profile.md. Concepts: adlc.io; Anthropic AI-Native SDLC Playbook; Port implementation commentary. Intent targets are example choices. Simulated data is not user research.</a:t>
-            </a:r>
-          </a:p>
-        </p:txBody>
-      </p:sp>
-      <p:sp>
-        <p:nvSpPr>
-          <p:cNvPr id="4" name="Slide Number Placeholder 3"/>
-          <p:cNvSpPr>
-            <a:spLocks xmlns:a="http://schemas.openxmlformats.org/drawingml/2006/main" noGrp="1"/>
-          </p:cNvSpPr>
-          <p:nvPr>
-            <p:ph type="sldNum" idx="5"/>
-          </p:nvPr>
-        </p:nvSpPr>
-        <p:spPr/>
-        <p:txBody>
-          <a:bodyPr xmlns:a="http://schemas.openxmlformats.org/drawingml/2006/main"/>
-          <a:lstStyle xmlns:a="http://schemas.openxmlformats.org/drawingml/2006/main"/>
-          <a:p xmlns:a="http://schemas.openxmlformats.org/drawingml/2006/main"/>
-        </p:txBody>
-      </p:sp>
-    </p:spTree>
-  </p:cSld>
-  <p:clrMapOvr>
-    <a:masterClrMapping xmlns:a="http://schemas.openxmlformats.org/drawingml/2006/main"/>
-  </p:clrMapOvr>
-</p:notes>
 </file>
 
 <file path=ppt/slideLayouts/slideLayout1.xml><?xml version="1.0" encoding="utf-8"?>
@@ -1897,7 +67,7 @@
   </p:cSld>
   <p:clrMap bg1="lt1" tx1="dk1" bg2="lt2" tx2="dk2" accent1="accent1" accent2="accent2" accent3="accent3" accent4="accent4" accent5="accent5" accent6="accent6" hlink="hlink" folHlink="folHlink"/>
   <p:sldLayoutIdLst>
-    <p:sldLayoutId xmlns:r="http://schemas.openxmlformats.org/officeDocument/2006/relationships" id="2147483649" r:id="Rdf88e64af9554c79"/>
+    <p:sldLayoutId xmlns:r="http://schemas.openxmlformats.org/officeDocument/2006/relationships" id="2147483649" r:id="Rb594e73169224057"/>
   </p:sldLayoutIdLst>
   <p:txStyles>
     <p:titleStyle>
@@ -2424,422 +594,6 @@
 </a:theme>
 </file>
 
-<file path=ppt/slides/charts/chart1.xml><?xml version="1.0" encoding="utf-8"?>
-<c:chartSpace xmlns:c="http://schemas.openxmlformats.org/drawingml/2006/chart" xmlns:r="http://schemas.openxmlformats.org/officeDocument/2006/relationships">
-  <c:lang val="en-US"/>
-  <c:chart>
-    <c:plotArea>
-      <c:barChart>
-        <c:barDir val="col"/>
-        <c:grouping val="clustered"/>
-        <c:varyColors val="0"/>
-        <c:ser>
-          <c:idx val="0"/>
-          <c:order val="0"/>
-          <c:tx>
-            <c:v>v1</c:v>
-          </c:tx>
-          <c:spPr>
-            <a:solidFill xmlns:a="http://schemas.openxmlformats.org/drawingml/2006/main">
-              <a:srgbClr val="527779"/>
-            </a:solidFill>
-          </c:spPr>
-          <c:dLbls>
-            <c:dLbl>
-              <c:idx val="0"/>
-              <c:tx>
-                <c:rich>
-                  <a:bodyPr xmlns:a="http://schemas.openxmlformats.org/drawingml/2006/main"/>
-                  <a:lstStyle xmlns:a="http://schemas.openxmlformats.org/drawingml/2006/main"/>
-                  <a:p xmlns:a="http://schemas.openxmlformats.org/drawingml/2006/main">
-                    <a:r>
-                      <a:rPr sz="1800" b="1">
-                        <a:solidFill>
-                          <a:srgbClr val="173234"/>
-                        </a:solidFill>
-                        <a:latin typeface="Thonburi"/>
-                        <a:ea typeface="Thonburi"/>
-                        <a:cs typeface="Thonburi"/>
-                      </a:rPr>
-                      <a:t>20%</a:t>
-                    </a:r>
-                  </a:p>
-                </c:rich>
-              </c:tx>
-              <c:txPr>
-                <a:bodyPr xmlns:a="http://schemas.openxmlformats.org/drawingml/2006/main" anchorCtr="1"/>
-                <a:lstStyle xmlns:a="http://schemas.openxmlformats.org/drawingml/2006/main"/>
-                <a:p xmlns:a="http://schemas.openxmlformats.org/drawingml/2006/main">
-                  <a:pPr>
-                    <a:defRPr sz="1800" b="1">
-                      <a:solidFill>
-                        <a:srgbClr val="173234"/>
-                      </a:solidFill>
-                      <a:latin typeface="Thonburi"/>
-                      <a:ea typeface="Thonburi"/>
-                      <a:cs typeface="Thonburi"/>
-                    </a:defRPr>
-                  </a:pPr>
-                </a:p>
-              </c:txPr>
-              <c:showLegendKey val="0"/>
-              <c:showVal val="0"/>
-              <c:showCatName val="0"/>
-              <c:showSerName val="0"/>
-              <c:showPercent val="0"/>
-              <c:showBubbleSize val="0"/>
-            </c:dLbl>
-            <c:dLbl>
-              <c:idx val="1"/>
-              <c:tx>
-                <c:rich>
-                  <a:bodyPr xmlns:a="http://schemas.openxmlformats.org/drawingml/2006/main"/>
-                  <a:lstStyle xmlns:a="http://schemas.openxmlformats.org/drawingml/2006/main"/>
-                  <a:p xmlns:a="http://schemas.openxmlformats.org/drawingml/2006/main">
-                    <a:r>
-                      <a:rPr sz="1800" b="1">
-                        <a:solidFill>
-                          <a:srgbClr val="173234"/>
-                        </a:solidFill>
-                        <a:latin typeface="Thonburi"/>
-                        <a:ea typeface="Thonburi"/>
-                        <a:cs typeface="Thonburi"/>
-                      </a:rPr>
-                      <a:t>90%</a:t>
-                    </a:r>
-                  </a:p>
-                </c:rich>
-              </c:tx>
-              <c:txPr>
-                <a:bodyPr xmlns:a="http://schemas.openxmlformats.org/drawingml/2006/main" anchorCtr="1"/>
-                <a:lstStyle xmlns:a="http://schemas.openxmlformats.org/drawingml/2006/main"/>
-                <a:p xmlns:a="http://schemas.openxmlformats.org/drawingml/2006/main">
-                  <a:pPr>
-                    <a:defRPr sz="1800" b="1">
-                      <a:solidFill>
-                        <a:srgbClr val="173234"/>
-                      </a:solidFill>
-                      <a:latin typeface="Thonburi"/>
-                      <a:ea typeface="Thonburi"/>
-                      <a:cs typeface="Thonburi"/>
-                    </a:defRPr>
-                  </a:pPr>
-                </a:p>
-              </c:txPr>
-              <c:showLegendKey val="0"/>
-              <c:showVal val="0"/>
-              <c:showCatName val="0"/>
-              <c:showSerName val="0"/>
-              <c:showPercent val="0"/>
-              <c:showBubbleSize val="0"/>
-            </c:dLbl>
-          </c:dLbls>
-          <c:cat>
-            <c:strRef>
-              <c:f>'Chart Data'!$A$2:$A$3</c:f>
-              <c:strCache>
-                <c:ptCount val="2"/>
-                <c:pt idx="0">
-                  <c:v>Replay rate</c:v>
-                </c:pt>
-                <c:pt idx="1">
-                  <c:v>Completion rate</c:v>
-                </c:pt>
-              </c:strCache>
-            </c:strRef>
-          </c:cat>
-          <c:val>
-            <c:numRef>
-              <c:f>'Chart Data'!$B$2:$B$3</c:f>
-              <c:numCache>
-                <c:formatCode>0%</c:formatCode>
-                <c:ptCount val="2"/>
-                <c:pt idx="0">
-                  <c:v>0.2</c:v>
-                </c:pt>
-                <c:pt idx="1">
-                  <c:v>0.9</c:v>
-                </c:pt>
-              </c:numCache>
-            </c:numRef>
-          </c:val>
-        </c:ser>
-        <c:ser>
-          <c:idx val="1"/>
-          <c:order val="1"/>
-          <c:tx>
-            <c:v>v2</c:v>
-          </c:tx>
-          <c:spPr>
-            <a:solidFill xmlns:a="http://schemas.openxmlformats.org/drawingml/2006/main">
-              <a:srgbClr val="86A63E"/>
-            </a:solidFill>
-          </c:spPr>
-          <c:dLbls>
-            <c:dLbl>
-              <c:idx val="0"/>
-              <c:tx>
-                <c:rich>
-                  <a:bodyPr xmlns:a="http://schemas.openxmlformats.org/drawingml/2006/main"/>
-                  <a:lstStyle xmlns:a="http://schemas.openxmlformats.org/drawingml/2006/main"/>
-                  <a:p xmlns:a="http://schemas.openxmlformats.org/drawingml/2006/main">
-                    <a:r>
-                      <a:rPr sz="1800" b="1">
-                        <a:solidFill>
-                          <a:srgbClr val="173234"/>
-                        </a:solidFill>
-                        <a:latin typeface="Thonburi"/>
-                        <a:ea typeface="Thonburi"/>
-                        <a:cs typeface="Thonburi"/>
-                      </a:rPr>
-                      <a:t>50%</a:t>
-                    </a:r>
-                  </a:p>
-                </c:rich>
-              </c:tx>
-              <c:txPr>
-                <a:bodyPr xmlns:a="http://schemas.openxmlformats.org/drawingml/2006/main" anchorCtr="1"/>
-                <a:lstStyle xmlns:a="http://schemas.openxmlformats.org/drawingml/2006/main"/>
-                <a:p xmlns:a="http://schemas.openxmlformats.org/drawingml/2006/main">
-                  <a:pPr>
-                    <a:defRPr sz="1800" b="1">
-                      <a:solidFill>
-                        <a:srgbClr val="173234"/>
-                      </a:solidFill>
-                      <a:latin typeface="Thonburi"/>
-                      <a:ea typeface="Thonburi"/>
-                      <a:cs typeface="Thonburi"/>
-                    </a:defRPr>
-                  </a:pPr>
-                </a:p>
-              </c:txPr>
-              <c:showLegendKey val="0"/>
-              <c:showVal val="0"/>
-              <c:showCatName val="0"/>
-              <c:showSerName val="0"/>
-              <c:showPercent val="0"/>
-              <c:showBubbleSize val="0"/>
-            </c:dLbl>
-            <c:dLbl>
-              <c:idx val="1"/>
-              <c:tx>
-                <c:rich>
-                  <a:bodyPr xmlns:a="http://schemas.openxmlformats.org/drawingml/2006/main"/>
-                  <a:lstStyle xmlns:a="http://schemas.openxmlformats.org/drawingml/2006/main"/>
-                  <a:p xmlns:a="http://schemas.openxmlformats.org/drawingml/2006/main">
-                    <a:r>
-                      <a:rPr sz="1800" b="1">
-                        <a:solidFill>
-                          <a:srgbClr val="173234"/>
-                        </a:solidFill>
-                        <a:latin typeface="Thonburi"/>
-                        <a:ea typeface="Thonburi"/>
-                        <a:cs typeface="Thonburi"/>
-                      </a:rPr>
-                      <a:t>80%</a:t>
-                    </a:r>
-                  </a:p>
-                </c:rich>
-              </c:tx>
-              <c:txPr>
-                <a:bodyPr xmlns:a="http://schemas.openxmlformats.org/drawingml/2006/main" anchorCtr="1"/>
-                <a:lstStyle xmlns:a="http://schemas.openxmlformats.org/drawingml/2006/main"/>
-                <a:p xmlns:a="http://schemas.openxmlformats.org/drawingml/2006/main">
-                  <a:pPr>
-                    <a:defRPr sz="1800" b="1">
-                      <a:solidFill>
-                        <a:srgbClr val="173234"/>
-                      </a:solidFill>
-                      <a:latin typeface="Thonburi"/>
-                      <a:ea typeface="Thonburi"/>
-                      <a:cs typeface="Thonburi"/>
-                    </a:defRPr>
-                  </a:pPr>
-                </a:p>
-              </c:txPr>
-              <c:showLegendKey val="0"/>
-              <c:showVal val="0"/>
-              <c:showCatName val="0"/>
-              <c:showSerName val="0"/>
-              <c:showPercent val="0"/>
-              <c:showBubbleSize val="0"/>
-            </c:dLbl>
-          </c:dLbls>
-          <c:cat>
-            <c:strRef>
-              <c:f>'Chart Data'!$C$2:$C$3</c:f>
-              <c:strCache>
-                <c:ptCount val="2"/>
-                <c:pt idx="0">
-                  <c:v>Replay rate</c:v>
-                </c:pt>
-                <c:pt idx="1">
-                  <c:v>Completion rate</c:v>
-                </c:pt>
-              </c:strCache>
-            </c:strRef>
-          </c:cat>
-          <c:val>
-            <c:numRef>
-              <c:f>'Chart Data'!$D$2:$D$3</c:f>
-              <c:numCache>
-                <c:formatCode>0%</c:formatCode>
-                <c:ptCount val="2"/>
-                <c:pt idx="0">
-                  <c:v>0.5</c:v>
-                </c:pt>
-                <c:pt idx="1">
-                  <c:v>0.8</c:v>
-                </c:pt>
-              </c:numCache>
-            </c:numRef>
-          </c:val>
-        </c:ser>
-        <c:dLbls>
-          <c:txPr>
-            <a:bodyPr xmlns:a="http://schemas.openxmlformats.org/drawingml/2006/main" anchorCtr="1"/>
-            <a:lstStyle xmlns:a="http://schemas.openxmlformats.org/drawingml/2006/main"/>
-            <a:p xmlns:a="http://schemas.openxmlformats.org/drawingml/2006/main">
-              <a:pPr>
-                <a:defRPr sz="1800" b="1">
-                  <a:solidFill>
-                    <a:srgbClr val="173234"/>
-                  </a:solidFill>
-                  <a:latin typeface="Thonburi"/>
-                  <a:ea typeface="Thonburi"/>
-                  <a:cs typeface="Thonburi"/>
-                </a:defRPr>
-              </a:pPr>
-            </a:p>
-          </c:txPr>
-          <c:dLblPos val="outEnd"/>
-          <c:showLegendKey val="0"/>
-          <c:showVal val="1"/>
-          <c:showCatName val="0"/>
-          <c:showSerName val="0"/>
-          <c:showPercent val="0"/>
-          <c:showBubbleSize val="0"/>
-          <c:showLeaderLines val="0"/>
-        </c:dLbls>
-        <c:gapWidth val="100"/>
-        <c:axId val="48650112"/>
-        <c:axId val="48672768"/>
-      </c:barChart>
-      <c:catAx>
-        <c:axId val="48650112"/>
-        <c:scaling>
-          <c:orientation val="minMax"/>
-        </c:scaling>
-        <c:delete val="0"/>
-        <c:axPos val="b"/>
-        <c:numFmt formatCode="General"/>
-        <c:majorTickMark val="none"/>
-        <c:minorTickMark val="none"/>
-        <c:spPr>
-          <a:ln xmlns:a="http://schemas.openxmlformats.org/drawingml/2006/main" w="9525">
-            <a:solidFill>
-              <a:srgbClr val="D4D4D4"/>
-            </a:solidFill>
-            <a:prstDash val="solid"/>
-          </a:ln>
-        </c:spPr>
-        <c:txPr>
-          <a:bodyPr xmlns:a="http://schemas.openxmlformats.org/drawingml/2006/main" anchorCtr="1"/>
-          <a:lstStyle xmlns:a="http://schemas.openxmlformats.org/drawingml/2006/main"/>
-          <a:p xmlns:a="http://schemas.openxmlformats.org/drawingml/2006/main">
-            <a:pPr>
-              <a:defRPr sz="1725">
-                <a:solidFill>
-                  <a:srgbClr val="173234"/>
-                </a:solidFill>
-                <a:latin typeface="Thonburi"/>
-                <a:ea typeface="Thonburi"/>
-                <a:cs typeface="Thonburi"/>
-              </a:defRPr>
-            </a:pPr>
-          </a:p>
-        </c:txPr>
-        <c:crossAx val="48672768"/>
-      </c:catAx>
-      <c:valAx>
-        <c:axId val="48672768"/>
-        <c:scaling>
-          <c:orientation val="minMax"/>
-          <c:max val="1"/>
-          <c:min val="0"/>
-        </c:scaling>
-        <c:delete val="0"/>
-        <c:axPos val="l"/>
-        <c:numFmt formatCode="0%"/>
-        <c:majorTickMark val="none"/>
-        <c:minorTickMark val="none"/>
-        <c:spPr>
-          <a:ln xmlns:a="http://schemas.openxmlformats.org/drawingml/2006/main" w="9525">
-            <a:solidFill>
-              <a:srgbClr val="D4D4D4"/>
-            </a:solidFill>
-            <a:prstDash val="solid"/>
-          </a:ln>
-        </c:spPr>
-        <c:txPr>
-          <a:bodyPr xmlns:a="http://schemas.openxmlformats.org/drawingml/2006/main" anchorCtr="1"/>
-          <a:lstStyle xmlns:a="http://schemas.openxmlformats.org/drawingml/2006/main"/>
-          <a:p xmlns:a="http://schemas.openxmlformats.org/drawingml/2006/main">
-            <a:pPr>
-              <a:defRPr sz="1500">
-                <a:solidFill>
-                  <a:srgbClr val="173234"/>
-                </a:solidFill>
-                <a:latin typeface="Thonburi"/>
-                <a:ea typeface="Thonburi"/>
-                <a:cs typeface="Thonburi"/>
-              </a:defRPr>
-            </a:pPr>
-          </a:p>
-        </c:txPr>
-        <c:crossAx val="48650112"/>
-        <c:crossBetween val="between"/>
-        <c:majorUnit val="0.2"/>
-      </c:valAx>
-      <c:spPr>
-        <a:solidFill xmlns:a="http://schemas.openxmlformats.org/drawingml/2006/main">
-          <a:srgbClr val="F5F2E9"/>
-        </a:solidFill>
-      </c:spPr>
-    </c:plotArea>
-    <c:legend>
-      <c:legendPos val="b"/>
-      <c:overlay val="0"/>
-      <c:txPr>
-        <a:bodyPr xmlns:a="http://schemas.openxmlformats.org/drawingml/2006/main" anchorCtr="1"/>
-        <a:lstStyle xmlns:a="http://schemas.openxmlformats.org/drawingml/2006/main"/>
-        <a:p xmlns:a="http://schemas.openxmlformats.org/drawingml/2006/main">
-          <a:pPr>
-            <a:defRPr sz="1725">
-              <a:solidFill>
-                <a:srgbClr val="173234"/>
-              </a:solidFill>
-              <a:latin typeface="Thonburi"/>
-              <a:ea typeface="Thonburi"/>
-              <a:cs typeface="Thonburi"/>
-            </a:defRPr>
-          </a:pPr>
-        </a:p>
-      </c:txPr>
-    </c:legend>
-    <c:plotVisOnly val="1"/>
-  </c:chart>
-  <c:spPr>
-    <a:solidFill xmlns:a="http://schemas.openxmlformats.org/drawingml/2006/main">
-      <a:srgbClr val="F5F2E9"/>
-    </a:solidFill>
-  </c:spPr>
-  <c:externalData r:id="rIdChartSnapshot1">
-    <c:autoUpdate val="0"/>
-  </c:externalData>
-</c:chartSpace>
-</file>
-
 <file path=ppt/slides/slide1.xml><?xml version="1.0" encoding="utf-8"?>
 <p:sld xmlns:p="http://schemas.openxmlformats.org/presentationml/2006/main">
   <p:cSld>
@@ -2893,6 +647,7 @@
           <a:lstStyle xmlns:a="http://schemas.openxmlformats.org/drawingml/2006/main"/>
           <a:p xmlns:a="http://schemas.openxmlformats.org/drawingml/2006/main">
             <a:pPr>
+              <a:buNone/>
               <a:defRPr sz="1350" b="0">
                 <a:solidFill>
                   <a:srgbClr val="B2C7C7"/>
@@ -2950,6 +705,7 @@
           <a:lstStyle xmlns:a="http://schemas.openxmlformats.org/drawingml/2006/main"/>
           <a:p xmlns:a="http://schemas.openxmlformats.org/drawingml/2006/main">
             <a:pPr>
+              <a:buNone/>
               <a:defRPr sz="8700" b="1">
                 <a:solidFill>
                   <a:srgbClr val="F5F2E9"/>
@@ -3007,6 +763,7 @@
           <a:lstStyle xmlns:a="http://schemas.openxmlformats.org/drawingml/2006/main"/>
           <a:p xmlns:a="http://schemas.openxmlformats.org/drawingml/2006/main">
             <a:pPr>
+              <a:buNone/>
               <a:defRPr sz="6450" b="1">
                 <a:solidFill>
                   <a:srgbClr val="D5F271"/>
@@ -3064,6 +821,7 @@
           <a:lstStyle xmlns:a="http://schemas.openxmlformats.org/drawingml/2006/main"/>
           <a:p xmlns:a="http://schemas.openxmlformats.org/drawingml/2006/main">
             <a:pPr>
+              <a:buNone/>
               <a:defRPr sz="2625" b="0">
                 <a:solidFill>
                   <a:srgbClr val="F5F2E9"/>
@@ -3082,7 +840,7 @@
                 <a:ea typeface="Thonburi"/>
                 <a:cs typeface="Thonburi"/>
               </a:rPr>
-              <a:t>สร้างเกม ทดลองใช้ แล้วพัฒนาจากหลักฐาน</a:t>
+              <a:t>Build a game, test it, and improve it with evidence</a:t>
             </a:r>
           </a:p>
         </p:txBody>
@@ -3121,6 +879,7 @@
           <a:lstStyle xmlns:a="http://schemas.openxmlformats.org/drawingml/2006/main"/>
           <a:p xmlns:a="http://schemas.openxmlformats.org/drawingml/2006/main">
             <a:pPr>
+              <a:buNone/>
               <a:defRPr sz="1800" b="0">
                 <a:solidFill>
                   <a:srgbClr val="B2C7C7"/>
@@ -3207,6 +966,7 @@
           <a:lstStyle xmlns:a="http://schemas.openxmlformats.org/drawingml/2006/main"/>
           <a:p xmlns:a="http://schemas.openxmlformats.org/drawingml/2006/main">
             <a:pPr>
+              <a:buNone/>
               <a:defRPr sz="1350" b="0">
                 <a:solidFill>
                   <a:srgbClr val="B2C7C7"/>
@@ -3264,6 +1024,7 @@
           <a:lstStyle xmlns:a="http://schemas.openxmlformats.org/drawingml/2006/main"/>
           <a:p xmlns:a="http://schemas.openxmlformats.org/drawingml/2006/main">
             <a:pPr>
+              <a:buNone/>
               <a:defRPr sz="3450" b="1">
                 <a:solidFill>
                   <a:srgbClr val="F5F2E9"/>
@@ -3282,7 +1043,7 @@
                 <a:ea typeface="Thonburi"/>
                 <a:cs typeface="Thonburi"/>
               </a:rPr>
-              <a:t>Generate ↔ Validate ตั้งแต่เอกสารถึงโค้ด</a:t>
+              <a:t>Generate ↔ Validate from documents to code</a:t>
             </a:r>
           </a:p>
         </p:txBody>
@@ -3321,6 +1082,7 @@
           <a:lstStyle xmlns:a="http://schemas.openxmlformats.org/drawingml/2006/main"/>
           <a:p xmlns:a="http://schemas.openxmlformats.org/drawingml/2006/main">
             <a:pPr>
+              <a:buNone/>
               <a:defRPr sz="1875" b="0">
                 <a:solidFill>
                   <a:srgbClr val="B2C7C7"/>
@@ -3339,7 +1101,7 @@
                 <a:ea typeface="Thonburi"/>
                 <a:cs typeface="Thonburi"/>
               </a:rPr>
-              <a:t>กรณีตรวจ</a:t>
+              <a:t>Check case</a:t>
             </a:r>
           </a:p>
         </p:txBody>
@@ -3378,6 +1140,7 @@
           <a:lstStyle xmlns:a="http://schemas.openxmlformats.org/drawingml/2006/main"/>
           <a:p xmlns:a="http://schemas.openxmlformats.org/drawingml/2006/main">
             <a:pPr>
+              <a:buNone/>
               <a:defRPr sz="3600" b="1">
                 <a:solidFill>
                   <a:srgbClr val="F5F2E9"/>
@@ -3396,7 +1159,7 @@
                 <a:ea typeface="Thonburi"/>
                 <a:cs typeface="Thonburi"/>
               </a:rPr>
-              <a:t>กรอกค่าผิด ไม่เสียโอกาสทาย</a:t>
+              <a:t>Invalid input does not use a guess</a:t>
             </a:r>
           </a:p>
         </p:txBody>
@@ -3435,6 +1198,7 @@
           <a:lstStyle xmlns:a="http://schemas.openxmlformats.org/drawingml/2006/main"/>
           <a:p xmlns:a="http://schemas.openxmlformats.org/drawingml/2006/main">
             <a:pPr>
+              <a:buNone/>
               <a:defRPr sz="3000" b="1">
                 <a:solidFill>
                   <a:srgbClr val="D5F271"/>
@@ -3453,7 +1217,7 @@
                 <a:ea typeface="Thonburi"/>
                 <a:cs typeface="Thonburi"/>
               </a:rPr>
-              <a:t>คาดหวัง 7 ครั้ง</a:t>
+              <a:t>Expected: 7 left</a:t>
             </a:r>
           </a:p>
         </p:txBody>
@@ -3492,6 +1256,7 @@
           <a:lstStyle xmlns:a="http://schemas.openxmlformats.org/drawingml/2006/main"/>
           <a:p xmlns:a="http://schemas.openxmlformats.org/drawingml/2006/main">
             <a:pPr>
+              <a:buNone/>
               <a:defRPr sz="3000" b="1">
                 <a:solidFill>
                   <a:srgbClr val="FFAC80"/>
@@ -3510,7 +1275,7 @@
                 <a:ea typeface="Thonburi"/>
                 <a:cs typeface="Thonburi"/>
               </a:rPr>
-              <a:t>หากเหลือ 6 ครั้ง</a:t>
+              <a:t>If only 6 remain</a:t>
             </a:r>
           </a:p>
         </p:txBody>
@@ -3549,6 +1314,7 @@
           <a:lstStyle xmlns:a="http://schemas.openxmlformats.org/drawingml/2006/main"/>
           <a:p xmlns:a="http://schemas.openxmlformats.org/drawingml/2006/main">
             <a:pPr>
+              <a:buNone/>
               <a:defRPr sz="2175" b="0">
                 <a:solidFill>
                   <a:srgbClr val="F5F2E9"/>
@@ -3567,7 +1333,7 @@
                 <a:ea typeface="Thonburi"/>
                 <a:cs typeface="Thonburi"/>
               </a:rPr>
-              <a:t>test ต้องพิสูจน์พฤติกรรมนี้</a:t>
+              <a:t>The test must prove this behavior</a:t>
             </a:r>
           </a:p>
         </p:txBody>
@@ -3606,6 +1372,7 @@
           <a:lstStyle xmlns:a="http://schemas.openxmlformats.org/drawingml/2006/main"/>
           <a:p xmlns:a="http://schemas.openxmlformats.org/drawingml/2006/main">
             <a:pPr>
+              <a:buNone/>
               <a:defRPr sz="2175" b="0">
                 <a:solidFill>
                   <a:srgbClr val="F5F2E9"/>
@@ -3624,7 +1391,7 @@
                 <a:ea typeface="Thonburi"/>
                 <a:cs typeface="Thonburi"/>
               </a:rPr>
-              <a:t>หาสาเหตุ แก้ แล้วตรวจซ้ำ</a:t>
+              <a:t>Find the cause, fix it, and check again</a:t>
             </a:r>
           </a:p>
         </p:txBody>
@@ -3663,6 +1430,7 @@
           <a:lstStyle xmlns:a="http://schemas.openxmlformats.org/drawingml/2006/main"/>
           <a:p xmlns:a="http://schemas.openxmlformats.org/drawingml/2006/main">
             <a:pPr>
+              <a:buNone/>
               <a:defRPr sz="1575" b="0">
                 <a:solidFill>
                   <a:srgbClr val="B2C7C7"/>
@@ -3681,7 +1449,7 @@
                 <a:ea typeface="Thonburi"/>
                 <a:cs typeface="Thonburi"/>
               </a:rPr>
-              <a:t>หลักฐานจริง: คำสั่ง ผลลัพธ์ และ acceptance ID ที่เกี่ยวข้อง</a:t>
+              <a:t>Real evidence: command, result, and related acceptance ID</a:t>
             </a:r>
           </a:p>
         </p:txBody>
@@ -3749,6 +1517,7 @@
           <a:lstStyle xmlns:a="http://schemas.openxmlformats.org/drawingml/2006/main"/>
           <a:p xmlns:a="http://schemas.openxmlformats.org/drawingml/2006/main">
             <a:pPr>
+              <a:buNone/>
               <a:defRPr sz="1350" b="0">
                 <a:solidFill>
                   <a:srgbClr val="B2C7C7"/>
@@ -3806,6 +1575,7 @@
           <a:lstStyle xmlns:a="http://schemas.openxmlformats.org/drawingml/2006/main"/>
           <a:p xmlns:a="http://schemas.openxmlformats.org/drawingml/2006/main">
             <a:pPr>
+              <a:buNone/>
               <a:defRPr sz="3450" b="1">
                 <a:solidFill>
                   <a:srgbClr val="F5F2E9"/>
@@ -3824,7 +1594,7 @@
                 <a:ea typeface="Thonburi"/>
                 <a:cs typeface="Thonburi"/>
               </a:rPr>
-              <a:t>Govern: จุดตัดสินใจของคุณ</a:t>
+              <a:t>Govern decisions</a:t>
             </a:r>
           </a:p>
         </p:txBody>
@@ -3863,6 +1633,7 @@
           <a:lstStyle xmlns:a="http://schemas.openxmlformats.org/drawingml/2006/main"/>
           <a:p xmlns:a="http://schemas.openxmlformats.org/drawingml/2006/main">
             <a:pPr>
+              <a:buNone/>
               <a:defRPr sz="3300" b="1">
                 <a:solidFill>
                   <a:srgbClr val="D5F271"/>
@@ -3920,6 +1691,7 @@
           <a:lstStyle xmlns:a="http://schemas.openxmlformats.org/drawingml/2006/main"/>
           <a:p xmlns:a="http://schemas.openxmlformats.org/drawingml/2006/main">
             <a:pPr>
+              <a:buNone/>
               <a:defRPr sz="2325" b="0">
                 <a:solidFill>
                   <a:srgbClr val="F5F2E9"/>
@@ -3938,7 +1710,7 @@
                 <a:ea typeface="Thonburi"/>
                 <a:cs typeface="Thonburi"/>
               </a:rPr>
-              <a:t>หลักฐานครบ พร้อมทดลองในขอบเขตนี้</a:t>
+              <a:t>The evidence is complete for this test</a:t>
             </a:r>
           </a:p>
         </p:txBody>
@@ -3977,6 +1749,7 @@
           <a:lstStyle xmlns:a="http://schemas.openxmlformats.org/drawingml/2006/main"/>
           <a:p xmlns:a="http://schemas.openxmlformats.org/drawingml/2006/main">
             <a:pPr>
+              <a:buNone/>
               <a:defRPr sz="3300" b="1">
                 <a:solidFill>
                   <a:srgbClr val="FFAC80"/>
@@ -4034,6 +1807,7 @@
           <a:lstStyle xmlns:a="http://schemas.openxmlformats.org/drawingml/2006/main"/>
           <a:p xmlns:a="http://schemas.openxmlformats.org/drawingml/2006/main">
             <a:pPr>
+              <a:buNone/>
               <a:defRPr sz="2325" b="0">
                 <a:solidFill>
                   <a:srgbClr val="F5F2E9"/>
@@ -4052,7 +1826,7 @@
                 <a:ea typeface="Thonburi"/>
                 <a:cs typeface="Thonburi"/>
               </a:rPr>
-              <a:t>ยังมีสิ่งที่ต้องแก้หรือตรวจเพิ่ม</a:t>
+              <a:t>More work or checks are needed</a:t>
             </a:r>
           </a:p>
         </p:txBody>
@@ -4091,6 +1865,7 @@
           <a:lstStyle xmlns:a="http://schemas.openxmlformats.org/drawingml/2006/main"/>
           <a:p xmlns:a="http://schemas.openxmlformats.org/drawingml/2006/main">
             <a:pPr>
+              <a:buNone/>
               <a:defRPr sz="3300" b="1">
                 <a:solidFill>
                   <a:srgbClr val="F5F2E9"/>
@@ -4148,6 +1923,7 @@
           <a:lstStyle xmlns:a="http://schemas.openxmlformats.org/drawingml/2006/main"/>
           <a:p xmlns:a="http://schemas.openxmlformats.org/drawingml/2006/main">
             <a:pPr>
+              <a:buNone/>
               <a:defRPr sz="2325" b="0">
                 <a:solidFill>
                   <a:srgbClr val="F5F2E9"/>
@@ -4166,7 +1942,7 @@
                 <a:ea typeface="Thonburi"/>
                 <a:cs typeface="Thonburi"/>
               </a:rPr>
-              <a:t>หยุดแนวทางนี้พร้อมบันทึกเหตุผล</a:t>
+              <a:t>End this path and record the reason</a:t>
             </a:r>
           </a:p>
         </p:txBody>
@@ -4205,6 +1981,7 @@
           <a:lstStyle xmlns:a="http://schemas.openxmlformats.org/drawingml/2006/main"/>
           <a:p xmlns:a="http://schemas.openxmlformats.org/drawingml/2006/main">
             <a:pPr>
+              <a:buNone/>
               <a:defRPr sz="1575" b="0">
                 <a:solidFill>
                   <a:srgbClr val="B2C7C7"/>
@@ -4223,7 +2000,7 @@
                 <a:ea typeface="Thonburi"/>
                 <a:cs typeface="Thonburi"/>
               </a:rPr>
-              <a:t>Agent เสนอได้ คนเป็นผู้ตัดสินใจ และบันทึกเหตุผลไว้</a:t>
+              <a:t>The Agent may advise. A human decides and records the reason.</a:t>
             </a:r>
           </a:p>
         </p:txBody>
@@ -4291,6 +2068,7 @@
           <a:lstStyle xmlns:a="http://schemas.openxmlformats.org/drawingml/2006/main"/>
           <a:p xmlns:a="http://schemas.openxmlformats.org/drawingml/2006/main">
             <a:pPr>
+              <a:buNone/>
               <a:defRPr sz="1350" b="0">
                 <a:solidFill>
                   <a:srgbClr val="B2C7C7"/>
@@ -4348,6 +2126,7 @@
           <a:lstStyle xmlns:a="http://schemas.openxmlformats.org/drawingml/2006/main"/>
           <a:p xmlns:a="http://schemas.openxmlformats.org/drawingml/2006/main">
             <a:pPr>
+              <a:buNone/>
               <a:defRPr sz="3450" b="1">
                 <a:solidFill>
                   <a:srgbClr val="F5F2E9"/>
@@ -4366,7 +2145,7 @@
                 <a:ea typeface="Thonburi"/>
                 <a:cs typeface="Thonburi"/>
               </a:rPr>
-              <a:t>Deploy และ Observe บนเครื่อง</a:t>
+              <a:t>Deploy and Observe locally</a:t>
             </a:r>
           </a:p>
         </p:txBody>
@@ -4405,6 +2184,7 @@
           <a:lstStyle xmlns:a="http://schemas.openxmlformats.org/drawingml/2006/main"/>
           <a:p xmlns:a="http://schemas.openxmlformats.org/drawingml/2006/main">
             <a:pPr>
+              <a:buNone/>
               <a:defRPr sz="5100" b="1">
                 <a:solidFill>
                   <a:srgbClr val="D5F271"/>
@@ -4462,6 +2242,7 @@
           <a:lstStyle xmlns:a="http://schemas.openxmlformats.org/drawingml/2006/main"/>
           <a:p xmlns:a="http://schemas.openxmlformats.org/drawingml/2006/main">
             <a:pPr>
+              <a:buNone/>
               <a:defRPr sz="2775" b="0">
                 <a:solidFill>
                   <a:srgbClr val="F5F2E9"/>
@@ -4480,7 +2261,7 @@
                 <a:ea typeface="Thonburi"/>
                 <a:cs typeface="Thonburi"/>
               </a:rPr>
-              <a:t>เปิดเวอร์ชันที่อนุมัติ แล้วทดลองเล่น</a:t>
+              <a:t>Open the approved revision and test the game</a:t>
             </a:r>
           </a:p>
         </p:txBody>
@@ -4519,6 +2300,7 @@
           <a:lstStyle xmlns:a="http://schemas.openxmlformats.org/drawingml/2006/main"/>
           <a:p xmlns:a="http://schemas.openxmlformats.org/drawingml/2006/main">
             <a:pPr>
+              <a:buNone/>
               <a:defRPr sz="2250" b="0">
                 <a:solidFill>
                   <a:srgbClr val="B2C7C7"/>
@@ -4542,6 +2324,7 @@
           </a:p>
           <a:p xmlns:a="http://schemas.openxmlformats.org/drawingml/2006/main">
             <a:pPr>
+              <a:buNone/>
               <a:defRPr sz="2250" b="0">
                 <a:solidFill>
                   <a:srgbClr val="B2C7C7"/>
@@ -4565,6 +2348,7 @@
           </a:p>
           <a:p xmlns:a="http://schemas.openxmlformats.org/drawingml/2006/main">
             <a:pPr>
+              <a:buNone/>
               <a:defRPr sz="2250" b="0">
                 <a:solidFill>
                   <a:srgbClr val="B2C7C7"/>
@@ -4622,6 +2406,7 @@
           <a:lstStyle xmlns:a="http://schemas.openxmlformats.org/drawingml/2006/main"/>
           <a:p xmlns:a="http://schemas.openxmlformats.org/drawingml/2006/main">
             <a:pPr>
+              <a:buNone/>
               <a:defRPr sz="2025" b="0">
                 <a:solidFill>
                   <a:srgbClr val="FFAC80"/>
@@ -4645,6 +2430,7 @@
           </a:p>
           <a:p xmlns:a="http://schemas.openxmlformats.org/drawingml/2006/main">
             <a:pPr>
+              <a:buNone/>
               <a:defRPr sz="2025" b="0">
                 <a:solidFill>
                   <a:srgbClr val="FFAC80"/>
@@ -4663,11 +2449,12 @@
                 <a:ea typeface="Thonburi"/>
                 <a:cs typeface="Thonburi"/>
               </a:rPr>
-              <a:t>แยกจาก</a:t>
-            </a:r>
-          </a:p>
-          <a:p xmlns:a="http://schemas.openxmlformats.org/drawingml/2006/main">
-            <a:pPr>
+              <a:t>separate from</a:t>
+            </a:r>
+          </a:p>
+          <a:p xmlns:a="http://schemas.openxmlformats.org/drawingml/2006/main">
+            <a:pPr>
+              <a:buNone/>
               <a:defRPr sz="2025" b="0">
                 <a:solidFill>
                   <a:srgbClr val="FFAC80"/>
@@ -4725,6 +2512,7 @@
           <a:lstStyle xmlns:a="http://schemas.openxmlformats.org/drawingml/2006/main"/>
           <a:p xmlns:a="http://schemas.openxmlformats.org/drawingml/2006/main">
             <a:pPr>
+              <a:buNone/>
               <a:defRPr sz="1575" b="0">
                 <a:solidFill>
                   <a:srgbClr val="B2C7C7"/>
@@ -4743,7 +2531,7 @@
                 <a:ea typeface="Thonburi"/>
                 <a:cs typeface="Thonburi"/>
               </a:rPr>
-              <a:t>เก็บเหตุการณ์ local และไม่ชี้นำให้ผู้เล่นกดเล่นซ้ำระหว่างวัดพฤติกรรม</a:t>
+              <a:t>Keep events local. Do not ask players to replay while you measure behavior.</a:t>
             </a:r>
           </a:p>
         </p:txBody>
@@ -4811,6 +2599,7 @@
           <a:lstStyle xmlns:a="http://schemas.openxmlformats.org/drawingml/2006/main"/>
           <a:p xmlns:a="http://schemas.openxmlformats.org/drawingml/2006/main">
             <a:pPr>
+              <a:buNone/>
               <a:defRPr sz="1350" b="0">
                 <a:solidFill>
                   <a:srgbClr val="173234"/>
@@ -4868,6 +2657,7 @@
           <a:lstStyle xmlns:a="http://schemas.openxmlformats.org/drawingml/2006/main"/>
           <a:p xmlns:a="http://schemas.openxmlformats.org/drawingml/2006/main">
             <a:pPr>
+              <a:buNone/>
               <a:defRPr sz="2325" b="1">
                 <a:solidFill>
                   <a:srgbClr val="173234"/>
@@ -4925,6 +2715,7 @@
           <a:lstStyle xmlns:a="http://schemas.openxmlformats.org/drawingml/2006/main"/>
           <a:p xmlns:a="http://schemas.openxmlformats.org/drawingml/2006/main">
             <a:pPr>
+              <a:buNone/>
               <a:defRPr sz="4650" b="1">
                 <a:solidFill>
                   <a:srgbClr val="173234"/>
@@ -4943,11 +2734,12 @@
                 <a:ea typeface="Thonburi"/>
                 <a:cs typeface="Thonburi"/>
               </a:rPr>
-              <a:t>“ทำอย่างไรให้</a:t>
-            </a:r>
-          </a:p>
-          <a:p xmlns:a="http://schemas.openxmlformats.org/drawingml/2006/main">
-            <a:pPr>
+              <a:t>“How can we help players</a:t>
+            </a:r>
+          </a:p>
+          <a:p xmlns:a="http://schemas.openxmlformats.org/drawingml/2006/main">
+            <a:pPr>
+              <a:buNone/>
               <a:defRPr sz="4650" b="1">
                 <a:solidFill>
                   <a:srgbClr val="173234"/>
@@ -4966,7 +2758,7 @@
                 <a:ea typeface="Thonburi"/>
                 <a:cs typeface="Thonburi"/>
               </a:rPr>
-              <a:t>คนเล่นนานขึ้น?”</a:t>
+              <a:t>play for longer?”</a:t>
             </a:r>
           </a:p>
         </p:txBody>
@@ -5005,6 +2797,7 @@
           <a:lstStyle xmlns:a="http://schemas.openxmlformats.org/drawingml/2006/main"/>
           <a:p xmlns:a="http://schemas.openxmlformats.org/drawingml/2006/main">
             <a:pPr>
+              <a:buNone/>
               <a:defRPr sz="2325" b="0">
                 <a:solidFill>
                   <a:srgbClr val="173234"/>
@@ -5023,7 +2816,7 @@
                 <a:ea typeface="Thonburi"/>
                 <a:cs typeface="Thonburi"/>
               </a:rPr>
-              <a:t>คำถามที่เราจะวัด: ผู้เล่นอยากเริ่มรอบที่สองหรือไม่</a:t>
+              <a:t>What we can measure: Does the player choose a second round?</a:t>
             </a:r>
           </a:p>
         </p:txBody>
@@ -5091,6 +2884,7 @@
           <a:lstStyle xmlns:a="http://schemas.openxmlformats.org/drawingml/2006/main"/>
           <a:p xmlns:a="http://schemas.openxmlformats.org/drawingml/2006/main">
             <a:pPr>
+              <a:buNone/>
               <a:defRPr sz="1350" b="0">
                 <a:solidFill>
                   <a:srgbClr val="B2C7C7"/>
@@ -5148,6 +2942,7 @@
           <a:lstStyle xmlns:a="http://schemas.openxmlformats.org/drawingml/2006/main"/>
           <a:p xmlns:a="http://schemas.openxmlformats.org/drawingml/2006/main">
             <a:pPr>
+              <a:buNone/>
               <a:defRPr sz="3450" b="1">
                 <a:solidFill>
                   <a:srgbClr val="F5F2E9"/>
@@ -5166,7 +2961,7 @@
                 <a:ea typeface="Thonburi"/>
                 <a:cs typeface="Thonburi"/>
               </a:rPr>
-              <a:t>Intent 2: ปุ่มเล่นอีกครั้ง</a:t>
+              <a:t>Intent 2: Play again button</a:t>
             </a:r>
           </a:p>
         </p:txBody>
@@ -5205,6 +3000,7 @@
           <a:lstStyle xmlns:a="http://schemas.openxmlformats.org/drawingml/2006/main"/>
           <a:p xmlns:a="http://schemas.openxmlformats.org/drawingml/2006/main">
             <a:pPr>
+              <a:buNone/>
               <a:defRPr sz="7800" b="1">
                 <a:solidFill>
                   <a:srgbClr val="D5F271"/>
@@ -5262,6 +3058,7 @@
           <a:lstStyle xmlns:a="http://schemas.openxmlformats.org/drawingml/2006/main"/>
           <a:p xmlns:a="http://schemas.openxmlformats.org/drawingml/2006/main">
             <a:pPr>
+              <a:buNone/>
               <a:defRPr sz="2175" b="0">
                 <a:solidFill>
                   <a:srgbClr val="D5F271"/>
@@ -5319,6 +3116,7 @@
           <a:lstStyle xmlns:a="http://schemas.openxmlformats.org/drawingml/2006/main"/>
           <a:p xmlns:a="http://schemas.openxmlformats.org/drawingml/2006/main">
             <a:pPr>
+              <a:buNone/>
               <a:defRPr sz="2400" b="0">
                 <a:solidFill>
                   <a:srgbClr val="F5F2E9"/>
@@ -5337,7 +3135,7 @@
                 <a:ea typeface="Thonburi"/>
                 <a:cs typeface="Thonburi"/>
               </a:rPr>
-              <a:t>เป้าหมายเพิ่ม replay rate</a:t>
+              <a:t>Target rise in replay rate</a:t>
             </a:r>
           </a:p>
         </p:txBody>
@@ -5376,6 +3174,7 @@
           <a:lstStyle xmlns:a="http://schemas.openxmlformats.org/drawingml/2006/main"/>
           <a:p xmlns:a="http://schemas.openxmlformats.org/drawingml/2006/main">
             <a:pPr>
+              <a:buNone/>
               <a:defRPr sz="7800" b="1">
                 <a:solidFill>
                   <a:srgbClr val="FFAC80"/>
@@ -5433,6 +3232,7 @@
           <a:lstStyle xmlns:a="http://schemas.openxmlformats.org/drawingml/2006/main"/>
           <a:p xmlns:a="http://schemas.openxmlformats.org/drawingml/2006/main">
             <a:pPr>
+              <a:buNone/>
               <a:defRPr sz="2175" b="0">
                 <a:solidFill>
                   <a:srgbClr val="FFAC80"/>
@@ -5490,6 +3290,7 @@
           <a:lstStyle xmlns:a="http://schemas.openxmlformats.org/drawingml/2006/main"/>
           <a:p xmlns:a="http://schemas.openxmlformats.org/drawingml/2006/main">
             <a:pPr>
+              <a:buNone/>
               <a:defRPr sz="2250" b="0">
                 <a:solidFill>
                   <a:srgbClr val="F5F2E9"/>
@@ -5508,7 +3309,7 @@
                 <a:ea typeface="Thonburi"/>
                 <a:cs typeface="Thonburi"/>
               </a:rPr>
-              <a:t>completion ลดได้ไม่เกิน</a:t>
+              <a:t>Largest allowed completion drop</a:t>
             </a:r>
           </a:p>
         </p:txBody>
@@ -5547,6 +3348,7 @@
           <a:lstStyle xmlns:a="http://schemas.openxmlformats.org/drawingml/2006/main"/>
           <a:p xmlns:a="http://schemas.openxmlformats.org/drawingml/2006/main">
             <a:pPr>
+              <a:buNone/>
               <a:defRPr sz="1575" b="0">
                 <a:solidFill>
                   <a:srgbClr val="B2C7C7"/>
@@ -5565,7 +3367,7 @@
                 <a:ea typeface="Thonburi"/>
                 <a:cs typeface="Thonburi"/>
               </a:rPr>
-              <a:t>เปลี่ยนเฉพาะ replay กติกาเกมและเกณฑ์ตรวจส่วนเดิมยังคงอยู่</a:t>
+              <a:t>Change only replay. Keep the game rules and earlier checks.</a:t>
             </a:r>
           </a:p>
         </p:txBody>
@@ -5633,6 +3435,7 @@
           <a:lstStyle xmlns:a="http://schemas.openxmlformats.org/drawingml/2006/main"/>
           <a:p xmlns:a="http://schemas.openxmlformats.org/drawingml/2006/main">
             <a:pPr>
+              <a:buNone/>
               <a:defRPr sz="1350" b="0">
                 <a:solidFill>
                   <a:srgbClr val="173234"/>
@@ -5690,6 +3493,7 @@
           <a:lstStyle xmlns:a="http://schemas.openxmlformats.org/drawingml/2006/main"/>
           <a:p xmlns:a="http://schemas.openxmlformats.org/drawingml/2006/main">
             <a:pPr>
+              <a:buNone/>
               <a:defRPr sz="3450" b="1">
                 <a:solidFill>
                   <a:srgbClr val="173234"/>
@@ -5708,27 +3512,11 @@
                 <a:ea typeface="Thonburi"/>
                 <a:cs typeface="Thonburi"/>
               </a:rPr>
-              <a:t>ผลทดลองจำลองของ v1 และ v2</a:t>
-            </a:r>
-          </a:p>
-        </p:txBody>
-      </p:sp>
-      <p:graphicFrame>
-        <p:nvGraphicFramePr>
-          <p:cNvPr id="11" name="Chart"/>
-          <p:cNvGraphicFramePr/>
-          <p:nvPr/>
-        </p:nvGraphicFramePr>
-        <p:xfrm>
-          <a:off xmlns:a="http://schemas.openxmlformats.org/drawingml/2006/main" x="685800" y="1857375"/>
-          <a:ext xmlns:a="http://schemas.openxmlformats.org/drawingml/2006/main" cx="7620000" cy="3667125"/>
-        </p:xfrm>
-        <a:graphic xmlns:a="http://schemas.openxmlformats.org/drawingml/2006/main">
-          <a:graphicData uri="http://schemas.openxmlformats.org/drawingml/2006/chart">
-            <c:chart xmlns:r="http://schemas.openxmlformats.org/officeDocument/2006/relationships" xmlns:c="http://schemas.openxmlformats.org/drawingml/2006/chart" r:id="R7dd83da944cb4ec7"/>
-          </a:graphicData>
-        </a:graphic>
-      </p:graphicFrame>
+              <a:t>Observe real play data</a:t>
+            </a:r>
+          </a:p>
+        </p:txBody>
+      </p:sp>
       <p:sp>
         <p:nvSpPr>
           <p:cNvPr id="4" name="text-tgy3ow-925-228">
@@ -5763,6 +3551,7 @@
           <a:lstStyle xmlns:a="http://schemas.openxmlformats.org/drawingml/2006/main"/>
           <a:p xmlns:a="http://schemas.openxmlformats.org/drawingml/2006/main">
             <a:pPr>
+              <a:buNone/>
               <a:defRPr sz="2100" b="1">
                 <a:solidFill>
                   <a:srgbClr val="173234"/>
@@ -5781,6 +3570,76 @@
                 <a:ea typeface="Thonburi"/>
                 <a:cs typeface="Thonburi"/>
               </a:rPr>
+              <a:t>Measures</a:t>
+            </a:r>
+          </a:p>
+        </p:txBody>
+      </p:sp>
+      <p:sp>
+        <p:nvSpPr>
+          <p:cNvPr id="5" name="text-tgy3ow-925-287">
+            <a:extLst xmlns:a="http://schemas.openxmlformats.org/drawingml/2006/main">
+              <a:ext uri="{FF2B5EF4-FFF2-40B4-BE49-F238E27FC236}">
+                <a16:creationId xmlns:a16="http://schemas.microsoft.com/office/drawing/2014/main" id="{74AECFA6-3255-46CC-8077-A799263D4B6B}"/>
+              </a:ext>
+            </a:extLst>
+          </p:cNvPr>
+          <p:cNvSpPr>
+            <a:spLocks xmlns:a="http://schemas.openxmlformats.org/drawingml/2006/main" noGrp="1"/>
+          </p:cNvSpPr>
+          <p:nvPr/>
+        </p:nvSpPr>
+        <p:spPr>
+          <a:xfrm xmlns:a="http://schemas.openxmlformats.org/drawingml/2006/main">
+            <a:off x="8191500" y="2733675"/>
+            <a:ext cx="3381375" cy="952500"/>
+          </a:xfrm>
+          <a:prstGeom xmlns:a="http://schemas.openxmlformats.org/drawingml/2006/main" prst="rect">
+            <a:avLst/>
+          </a:prstGeom>
+          <a:noFill xmlns:a="http://schemas.openxmlformats.org/drawingml/2006/main"/>
+          <a:ln xmlns:a="http://schemas.openxmlformats.org/drawingml/2006/main" w="0">
+            <a:noFill/>
+          </a:ln>
+        </p:spPr>
+        <p:txBody>
+          <a:bodyPr xmlns:a="http://schemas.openxmlformats.org/drawingml/2006/main">
+            <a:noAutofit/>
+          </a:bodyPr>
+          <a:lstStyle xmlns:a="http://schemas.openxmlformats.org/drawingml/2006/main"/>
+          <a:p xmlns:a="http://schemas.openxmlformats.org/drawingml/2006/main">
+            <a:pPr>
+              <a:buNone/>
+              <a:defRPr sz="3300" b="1">
+                <a:solidFill>
+                  <a:srgbClr val="173234"/>
+                </a:solidFill>
+                <a:latin typeface="Thonburi"/>
+                <a:ea typeface="Thonburi"/>
+                <a:cs typeface="Thonburi"/>
+              </a:defRPr>
+            </a:pPr>
+            <a:r>
+              <a:rPr sz="3300" b="1">
+                <a:solidFill>
+                  <a:srgbClr val="173234"/>
+                </a:solidFill>
+                <a:latin typeface="Thonburi"/>
+                <a:ea typeface="Thonburi"/>
+                <a:cs typeface="Thonburi"/>
+              </a:rPr>
+              <a:t>Completion</a:t>
+            </a:r>
+            <a:br/>
+            <a:r>
+              <a:rPr sz="3300" b="1">
+                <a:solidFill>
+                  <a:srgbClr val="173234"/>
+                </a:solidFill>
+                <a:latin typeface="Thonburi"/>
+                <a:ea typeface="Thonburi"/>
+                <a:cs typeface="Thonburi"/>
+              </a:rPr>
               <a:t>Replay</a:t>
             </a:r>
           </a:p>
@@ -5788,41 +3647,100 @@
       </p:sp>
       <p:sp>
         <p:nvSpPr>
-          <p:cNvPr id="5" name="text-tgy3ow-925-287">
-            <a:extLst xmlns:a="http://schemas.openxmlformats.org/drawingml/2006/main">
-              <a:ext uri="{FF2B5EF4-FFF2-40B4-BE49-F238E27FC236}">
-                <a16:creationId xmlns:a16="http://schemas.microsoft.com/office/drawing/2014/main" id="{74AECFA6-3255-46CC-8077-A799263D4B6B}"/>
-              </a:ext>
-            </a:extLst>
-          </p:cNvPr>
-          <p:cNvSpPr>
-            <a:spLocks xmlns:a="http://schemas.openxmlformats.org/drawingml/2006/main" noGrp="1"/>
-          </p:cNvSpPr>
-          <p:nvPr/>
-        </p:nvSpPr>
-        <p:spPr>
-          <a:xfrm xmlns:a="http://schemas.openxmlformats.org/drawingml/2006/main">
-            <a:off x="8810625" y="2733675"/>
-            <a:ext cx="2762250" cy="666750"/>
-          </a:xfrm>
-          <a:prstGeom xmlns:a="http://schemas.openxmlformats.org/drawingml/2006/main" prst="rect">
-            <a:avLst/>
-          </a:prstGeom>
-          <a:noFill xmlns:a="http://schemas.openxmlformats.org/drawingml/2006/main"/>
-          <a:ln xmlns:a="http://schemas.openxmlformats.org/drawingml/2006/main" w="0">
-            <a:noFill/>
-          </a:ln>
-        </p:spPr>
-        <p:txBody>
-          <a:bodyPr xmlns:a="http://schemas.openxmlformats.org/drawingml/2006/main">
-            <a:noAutofit/>
-          </a:bodyPr>
-          <a:lstStyle xmlns:a="http://schemas.openxmlformats.org/drawingml/2006/main"/>
-          <a:p xmlns:a="http://schemas.openxmlformats.org/drawingml/2006/main">
-            <a:pPr>
+          <p:cNvPr id="6" name="text-tgy3ow-925-406">
+            <a:extLst xmlns:a="http://schemas.openxmlformats.org/drawingml/2006/main">
+              <a:ext uri="{FF2B5EF4-FFF2-40B4-BE49-F238E27FC236}">
+                <a16:creationId xmlns:a16="http://schemas.microsoft.com/office/drawing/2014/main" id="{60871CEE-1985-48D8-9DE9-2CF55B62D4A8}"/>
+              </a:ext>
+            </a:extLst>
+          </p:cNvPr>
+          <p:cNvSpPr>
+            <a:spLocks xmlns:a="http://schemas.openxmlformats.org/drawingml/2006/main" noGrp="1"/>
+          </p:cNvSpPr>
+          <p:nvPr/>
+        </p:nvSpPr>
+        <p:spPr>
+          <a:xfrm xmlns:a="http://schemas.openxmlformats.org/drawingml/2006/main">
+            <a:off x="8191500" y="3867150"/>
+            <a:ext cx="3381375" cy="523875"/>
+          </a:xfrm>
+          <a:prstGeom xmlns:a="http://schemas.openxmlformats.org/drawingml/2006/main" prst="rect">
+            <a:avLst/>
+          </a:prstGeom>
+          <a:noFill xmlns:a="http://schemas.openxmlformats.org/drawingml/2006/main"/>
+          <a:ln xmlns:a="http://schemas.openxmlformats.org/drawingml/2006/main" w="0">
+            <a:noFill/>
+          </a:ln>
+        </p:spPr>
+        <p:txBody>
+          <a:bodyPr xmlns:a="http://schemas.openxmlformats.org/drawingml/2006/main">
+            <a:noAutofit/>
+          </a:bodyPr>
+          <a:lstStyle xmlns:a="http://schemas.openxmlformats.org/drawingml/2006/main"/>
+          <a:p xmlns:a="http://schemas.openxmlformats.org/drawingml/2006/main">
+            <a:pPr>
+              <a:buNone/>
+              <a:defRPr sz="2100" b="1">
+                <a:solidFill>
+                  <a:srgbClr val="173234"/>
+                </a:solidFill>
+                <a:latin typeface="Thonburi"/>
+                <a:ea typeface="Thonburi"/>
+                <a:cs typeface="Thonburi"/>
+              </a:defRPr>
+            </a:pPr>
+            <a:r>
+              <a:rPr sz="2100" b="1">
+                <a:solidFill>
+                  <a:srgbClr val="173234"/>
+                </a:solidFill>
+                <a:latin typeface="Thonburi"/>
+                <a:ea typeface="Thonburi"/>
+                <a:cs typeface="Thonburi"/>
+              </a:rPr>
+              <a:t>If data is weak</a:t>
+            </a:r>
+          </a:p>
+        </p:txBody>
+      </p:sp>
+      <p:sp>
+        <p:nvSpPr>
+          <p:cNvPr id="7" name="text-tgy3ow-925-465">
+            <a:extLst xmlns:a="http://schemas.openxmlformats.org/drawingml/2006/main">
+              <a:ext uri="{FF2B5EF4-FFF2-40B4-BE49-F238E27FC236}">
+                <a16:creationId xmlns:a16="http://schemas.microsoft.com/office/drawing/2014/main" id="{3B6CAE4B-4224-49DD-A16B-F26530C0D70C}"/>
+              </a:ext>
+            </a:extLst>
+          </p:cNvPr>
+          <p:cNvSpPr>
+            <a:spLocks xmlns:a="http://schemas.openxmlformats.org/drawingml/2006/main" noGrp="1"/>
+          </p:cNvSpPr>
+          <p:nvPr/>
+        </p:nvSpPr>
+        <p:spPr>
+          <a:xfrm xmlns:a="http://schemas.openxmlformats.org/drawingml/2006/main">
+            <a:off x="8191500" y="4429125"/>
+            <a:ext cx="3381375" cy="952500"/>
+          </a:xfrm>
+          <a:prstGeom xmlns:a="http://schemas.openxmlformats.org/drawingml/2006/main" prst="rect">
+            <a:avLst/>
+          </a:prstGeom>
+          <a:noFill xmlns:a="http://schemas.openxmlformats.org/drawingml/2006/main"/>
+          <a:ln xmlns:a="http://schemas.openxmlformats.org/drawingml/2006/main" w="0">
+            <a:noFill/>
+          </a:ln>
+        </p:spPr>
+        <p:txBody>
+          <a:bodyPr xmlns:a="http://schemas.openxmlformats.org/drawingml/2006/main">
+            <a:noAutofit/>
+          </a:bodyPr>
+          <a:lstStyle xmlns:a="http://schemas.openxmlformats.org/drawingml/2006/main"/>
+          <a:p xmlns:a="http://schemas.openxmlformats.org/drawingml/2006/main">
+            <a:pPr>
+              <a:buNone/>
               <a:defRPr sz="3300" b="1">
                 <a:solidFill>
-                  <a:srgbClr val="173234"/>
+                  <a:srgbClr val="AE4C28"/>
                 </a:solidFill>
                 <a:latin typeface="Thonburi"/>
                 <a:ea typeface="Thonburi"/>
@@ -5832,127 +3750,14 @@
             <a:r>
               <a:rPr sz="3300" b="1">
                 <a:solidFill>
-                  <a:srgbClr val="173234"/>
-                </a:solidFill>
-                <a:latin typeface="Thonburi"/>
-                <a:ea typeface="Thonburi"/>
-                <a:cs typeface="Thonburi"/>
-              </a:rPr>
-              <a:t>+30 จุด</a:t>
-            </a:r>
-          </a:p>
-        </p:txBody>
-      </p:sp>
-      <p:sp>
-        <p:nvSpPr>
-          <p:cNvPr id="6" name="text-tgy3ow-925-406">
-            <a:extLst xmlns:a="http://schemas.openxmlformats.org/drawingml/2006/main">
-              <a:ext uri="{FF2B5EF4-FFF2-40B4-BE49-F238E27FC236}">
-                <a16:creationId xmlns:a16="http://schemas.microsoft.com/office/drawing/2014/main" id="{60871CEE-1985-48D8-9DE9-2CF55B62D4A8}"/>
-              </a:ext>
-            </a:extLst>
-          </p:cNvPr>
-          <p:cNvSpPr>
-            <a:spLocks xmlns:a="http://schemas.openxmlformats.org/drawingml/2006/main" noGrp="1"/>
-          </p:cNvSpPr>
-          <p:nvPr/>
-        </p:nvSpPr>
-        <p:spPr>
-          <a:xfrm xmlns:a="http://schemas.openxmlformats.org/drawingml/2006/main">
-            <a:off x="8810625" y="3867150"/>
-            <a:ext cx="2762250" cy="523875"/>
-          </a:xfrm>
-          <a:prstGeom xmlns:a="http://schemas.openxmlformats.org/drawingml/2006/main" prst="rect">
-            <a:avLst/>
-          </a:prstGeom>
-          <a:noFill xmlns:a="http://schemas.openxmlformats.org/drawingml/2006/main"/>
-          <a:ln xmlns:a="http://schemas.openxmlformats.org/drawingml/2006/main" w="0">
-            <a:noFill/>
-          </a:ln>
-        </p:spPr>
-        <p:txBody>
-          <a:bodyPr xmlns:a="http://schemas.openxmlformats.org/drawingml/2006/main">
-            <a:noAutofit/>
-          </a:bodyPr>
-          <a:lstStyle xmlns:a="http://schemas.openxmlformats.org/drawingml/2006/main"/>
-          <a:p xmlns:a="http://schemas.openxmlformats.org/drawingml/2006/main">
-            <a:pPr>
-              <a:defRPr sz="2100" b="1">
-                <a:solidFill>
-                  <a:srgbClr val="173234"/>
-                </a:solidFill>
-                <a:latin typeface="Thonburi"/>
-                <a:ea typeface="Thonburi"/>
-                <a:cs typeface="Thonburi"/>
-              </a:defRPr>
-            </a:pPr>
-            <a:r>
-              <a:rPr sz="2100" b="1">
-                <a:solidFill>
-                  <a:srgbClr val="173234"/>
-                </a:solidFill>
-                <a:latin typeface="Thonburi"/>
-                <a:ea typeface="Thonburi"/>
-                <a:cs typeface="Thonburi"/>
-              </a:rPr>
-              <a:t>Completion</a:t>
-            </a:r>
-          </a:p>
-        </p:txBody>
-      </p:sp>
-      <p:sp>
-        <p:nvSpPr>
-          <p:cNvPr id="7" name="text-tgy3ow-925-465">
-            <a:extLst xmlns:a="http://schemas.openxmlformats.org/drawingml/2006/main">
-              <a:ext uri="{FF2B5EF4-FFF2-40B4-BE49-F238E27FC236}">
-                <a16:creationId xmlns:a16="http://schemas.microsoft.com/office/drawing/2014/main" id="{3B6CAE4B-4224-49DD-A16B-F26530C0D70C}"/>
-              </a:ext>
-            </a:extLst>
-          </p:cNvPr>
-          <p:cNvSpPr>
-            <a:spLocks xmlns:a="http://schemas.openxmlformats.org/drawingml/2006/main" noGrp="1"/>
-          </p:cNvSpPr>
-          <p:nvPr/>
-        </p:nvSpPr>
-        <p:spPr>
-          <a:xfrm xmlns:a="http://schemas.openxmlformats.org/drawingml/2006/main">
-            <a:off x="8810625" y="4429125"/>
-            <a:ext cx="2762250" cy="666750"/>
-          </a:xfrm>
-          <a:prstGeom xmlns:a="http://schemas.openxmlformats.org/drawingml/2006/main" prst="rect">
-            <a:avLst/>
-          </a:prstGeom>
-          <a:noFill xmlns:a="http://schemas.openxmlformats.org/drawingml/2006/main"/>
-          <a:ln xmlns:a="http://schemas.openxmlformats.org/drawingml/2006/main" w="0">
-            <a:noFill/>
-          </a:ln>
-        </p:spPr>
-        <p:txBody>
-          <a:bodyPr xmlns:a="http://schemas.openxmlformats.org/drawingml/2006/main">
-            <a:noAutofit/>
-          </a:bodyPr>
-          <a:lstStyle xmlns:a="http://schemas.openxmlformats.org/drawingml/2006/main"/>
-          <a:p xmlns:a="http://schemas.openxmlformats.org/drawingml/2006/main">
-            <a:pPr>
-              <a:defRPr sz="3300" b="1">
-                <a:solidFill>
                   <a:srgbClr val="AE4C28"/>
                 </a:solidFill>
                 <a:latin typeface="Thonburi"/>
                 <a:ea typeface="Thonburi"/>
                 <a:cs typeface="Thonburi"/>
-              </a:defRPr>
-            </a:pPr>
-            <a:r>
-              <a:rPr sz="3300" b="1">
-                <a:solidFill>
-                  <a:srgbClr val="AE4C28"/>
-                </a:solidFill>
-                <a:latin typeface="Thonburi"/>
-                <a:ea typeface="Thonburi"/>
-                <a:cs typeface="Thonburi"/>
-              </a:rPr>
-              <a:t>−10 จุด</a:t>
+              </a:rPr>
+              <a:t>INSUFFICIENT
+EVIDENCE</a:t>
             </a:r>
           </a:p>
         </p:txBody>
@@ -5991,6 +3796,7 @@
           <a:lstStyle xmlns:a="http://schemas.openxmlformats.org/drawingml/2006/main"/>
           <a:p xmlns:a="http://schemas.openxmlformats.org/drawingml/2006/main">
             <a:pPr>
+              <a:buNone/>
               <a:defRPr sz="1575" b="0">
                 <a:solidFill>
                   <a:srgbClr val="173234"/>
@@ -6009,7 +3815,142 @@
                 <a:ea typeface="Thonburi"/>
                 <a:cs typeface="Thonburi"/>
               </a:rPr>
-              <a:t>ข้อมูลจำลอง 200 session สำหรับฝึกคำนวณ ยังไม่ใช่ผลจากผู้เล่นจริง</a:t>
+              <a:t>Do not create data or numbers to fill a gap.</a:t>
+            </a:r>
+          </a:p>
+        </p:txBody>
+      </p:sp>
+      <p:sp>
+        <p:nvSpPr>
+          <p:cNvPr id="10" name="real-telemetry-guide">
+            <a:extLst xmlns:a="http://schemas.openxmlformats.org/drawingml/2006/main">
+              <a:ext uri="{FF2B5EF4-FFF2-40B4-BE49-F238E27FC236}">
+                <a16:creationId xmlns:a16="http://schemas.microsoft.com/office/drawing/2014/main" id="{41B2A389-30AA-4107-BF1B-F7B11E41D474}"/>
+              </a:ext>
+            </a:extLst>
+          </p:cNvPr>
+          <p:cNvSpPr>
+            <a:spLocks xmlns:a="http://schemas.openxmlformats.org/drawingml/2006/main" noGrp="1"/>
+          </p:cNvSpPr>
+          <p:nvPr/>
+        </p:nvSpPr>
+        <p:spPr>
+          <a:xfrm xmlns:a="http://schemas.openxmlformats.org/drawingml/2006/main">
+            <a:off x="723900" y="2095500"/>
+            <a:ext cx="7239000" cy="2857500"/>
+          </a:xfrm>
+          <a:prstGeom xmlns:a="http://schemas.openxmlformats.org/drawingml/2006/main" prst="rect">
+            <a:avLst/>
+          </a:prstGeom>
+          <a:noFill xmlns:a="http://schemas.openxmlformats.org/drawingml/2006/main"/>
+          <a:ln xmlns:a="http://schemas.openxmlformats.org/drawingml/2006/main" w="0">
+            <a:noFill/>
+          </a:ln>
+        </p:spPr>
+        <p:txBody>
+          <a:bodyPr xmlns:a="http://schemas.openxmlformats.org/drawingml/2006/main">
+            <a:normAutofit fontScale="100000"/>
+          </a:bodyPr>
+          <a:lstStyle xmlns:a="http://schemas.openxmlformats.org/drawingml/2006/main"/>
+          <a:p xmlns:a="http://schemas.openxmlformats.org/drawingml/2006/main">
+            <a:pPr>
+              <a:buNone/>
+              <a:defRPr sz="2100">
+                <a:solidFill>
+                  <a:srgbClr val="17312F"/>
+                </a:solidFill>
+                <a:latin typeface="Thonburi"/>
+                <a:ea typeface="Thonburi"/>
+                <a:cs typeface="Thonburi"/>
+              </a:defRPr>
+            </a:pPr>
+            <a:r>
+              <a:rPr sz="2100">
+                <a:solidFill>
+                  <a:srgbClr val="17312F"/>
+                </a:solidFill>
+                <a:latin typeface="Thonburi"/>
+                <a:ea typeface="Thonburi"/>
+                <a:cs typeface="Thonburi"/>
+              </a:rPr>
+              <a:t>Read real events from</a:t>
+            </a:r>
+          </a:p>
+          <a:p xmlns:a="http://schemas.openxmlformats.org/drawingml/2006/main">
+            <a:pPr>
+              <a:buNone/>
+              <a:defRPr sz="2100">
+                <a:solidFill>
+                  <a:srgbClr val="17312F"/>
+                </a:solidFill>
+                <a:latin typeface="Thonburi"/>
+                <a:ea typeface="Thonburi"/>
+                <a:cs typeface="Thonburi"/>
+              </a:defRPr>
+            </a:pPr>
+            <a:r>
+              <a:rPr sz="2100">
+                <a:solidFill>
+                  <a:srgbClr val="17312F"/>
+                </a:solidFill>
+                <a:latin typeface="Thonburi"/>
+                <a:ea typeface="Thonburi"/>
+                <a:cs typeface="Thonburi"/>
+              </a:rPr>
+              <a:t>telemetry/events.jsonl</a:t>
+            </a:r>
+          </a:p>
+          <a:p xmlns:a="http://schemas.openxmlformats.org/drawingml/2006/main">
+            <a:r>
+              <a:t/>
+            </a:r>
+          </a:p>
+          <a:p xmlns:a="http://schemas.openxmlformats.org/drawingml/2006/main">
+            <a:pPr>
+              <a:buNone/>
+              <a:defRPr sz="2100">
+                <a:solidFill>
+                  <a:srgbClr val="17312F"/>
+                </a:solidFill>
+                <a:latin typeface="Thonburi"/>
+                <a:ea typeface="Thonburi"/>
+                <a:cs typeface="Thonburi"/>
+              </a:defRPr>
+            </a:pPr>
+            <a:r>
+              <a:rPr sz="2100">
+                <a:solidFill>
+                  <a:srgbClr val="17312F"/>
+                </a:solidFill>
+                <a:latin typeface="Thonburi"/>
+                <a:ea typeface="Thonburi"/>
+                <a:cs typeface="Thonburi"/>
+              </a:rPr>
+              <a:t>Compare eligible v1 and v2 sessions.</a:t>
+            </a:r>
+          </a:p>
+          <a:p xmlns:a="http://schemas.openxmlformats.org/drawingml/2006/main">
+            <a:pPr>
+              <a:buNone/>
+              <a:defRPr sz="2100">
+                <a:solidFill>
+                  <a:srgbClr val="17312F"/>
+                </a:solidFill>
+                <a:latin typeface="Thonburi"/>
+                <a:ea typeface="Thonburi"/>
+                <a:cs typeface="Thonburi"/>
+              </a:defRPr>
+            </a:pPr>
+            <a:r>
+              <a:rPr sz="2100">
+                <a:solidFill>
+                  <a:srgbClr val="17312F"/>
+                </a:solidFill>
+                <a:latin typeface="Thonburi"/>
+                <a:ea typeface="Thonburi"/>
+                <a:cs typeface="Thonburi"/>
+              </a:rPr>
+              <a:t>Use the full five-minute follow-up window.</a:t>
             </a:r>
           </a:p>
         </p:txBody>
@@ -6077,6 +4018,7 @@
           <a:lstStyle xmlns:a="http://schemas.openxmlformats.org/drawingml/2006/main"/>
           <a:p xmlns:a="http://schemas.openxmlformats.org/drawingml/2006/main">
             <a:pPr>
+              <a:buNone/>
               <a:defRPr sz="1350" b="0">
                 <a:solidFill>
                   <a:srgbClr val="B2C7C7"/>
@@ -6134,6 +4076,7 @@
           <a:lstStyle xmlns:a="http://schemas.openxmlformats.org/drawingml/2006/main"/>
           <a:p xmlns:a="http://schemas.openxmlformats.org/drawingml/2006/main">
             <a:pPr>
+              <a:buNone/>
               <a:defRPr sz="3450" b="1">
                 <a:solidFill>
                   <a:srgbClr val="F5F2E9"/>
@@ -6152,7 +4095,7 @@
                 <a:ea typeface="Thonburi"/>
                 <a:cs typeface="Thonburi"/>
               </a:rPr>
-              <a:t>เป้าหมายผ่าน แต่ guardrail ไม่ผ่าน</a:t>
+              <a:t>Govern with the evidence you have</a:t>
             </a:r>
           </a:p>
         </p:txBody>
@@ -6191,6 +4134,7 @@
           <a:lstStyle xmlns:a="http://schemas.openxmlformats.org/drawingml/2006/main"/>
           <a:p xmlns:a="http://schemas.openxmlformats.org/drawingml/2006/main">
             <a:pPr>
+              <a:buNone/>
               <a:defRPr sz="3675" b="1">
                 <a:solidFill>
                   <a:srgbClr val="D5F271"/>
@@ -6209,7 +4153,7 @@
                 <a:ea typeface="Thonburi"/>
                 <a:cs typeface="Thonburi"/>
               </a:rPr>
-              <a:t>เล่นซ้ำมากขึ้น</a:t>
+              <a:t>Enough evidence</a:t>
             </a:r>
           </a:p>
         </p:txBody>
@@ -6248,6 +4192,7 @@
           <a:lstStyle xmlns:a="http://schemas.openxmlformats.org/drawingml/2006/main"/>
           <a:p xmlns:a="http://schemas.openxmlformats.org/drawingml/2006/main">
             <a:pPr>
+              <a:buNone/>
               <a:defRPr sz="3675" b="1">
                 <a:solidFill>
                   <a:srgbClr val="FFAC80"/>
@@ -6266,7 +4211,7 @@
                 <a:ea typeface="Thonburi"/>
                 <a:cs typeface="Thonburi"/>
               </a:rPr>
-              <a:t>คนเล่นจบรอบแรกลดลง</a:t>
+              <a:t>Weak or missing evidence</a:t>
             </a:r>
           </a:p>
         </p:txBody>
@@ -6305,6 +4250,7 @@
           <a:lstStyle xmlns:a="http://schemas.openxmlformats.org/drawingml/2006/main"/>
           <a:p xmlns:a="http://schemas.openxmlformats.org/drawingml/2006/main">
             <a:pPr>
+              <a:buNone/>
               <a:defRPr sz="2700" b="1">
                 <a:solidFill>
                   <a:srgbClr val="F5F2E9"/>
@@ -6323,7 +4269,7 @@
                 <a:ea typeface="Thonburi"/>
                 <a:cs typeface="Thonburi"/>
               </a:rPr>
-              <a:t>คุณจะให้ไปต่อ ปรับเกม หรือเก็บหลักฐานเพิ่ม?</a:t>
+              <a:t>Will you release, revise, stop, or collect more data?</a:t>
             </a:r>
           </a:p>
         </p:txBody>
@@ -6362,6 +4308,7 @@
           <a:lstStyle xmlns:a="http://schemas.openxmlformats.org/drawingml/2006/main"/>
           <a:p xmlns:a="http://schemas.openxmlformats.org/drawingml/2006/main">
             <a:pPr>
+              <a:buNone/>
               <a:defRPr sz="1575" b="0">
                 <a:solidFill>
                   <a:srgbClr val="B2C7C7"/>
@@ -6380,7 +4327,7 @@
                 <a:ea typeface="Thonburi"/>
                 <a:cs typeface="Thonburi"/>
               </a:rPr>
-              <a:t>ข้อสรุปต้องพิจารณาทุก guardrail พร้อมข้อจำกัดของข้อมูล</a:t>
+              <a:t>Use every guardrail and state the limits of the data.</a:t>
             </a:r>
           </a:p>
         </p:txBody>
@@ -6448,6 +4395,7 @@
           <a:lstStyle xmlns:a="http://schemas.openxmlformats.org/drawingml/2006/main"/>
           <a:p xmlns:a="http://schemas.openxmlformats.org/drawingml/2006/main">
             <a:pPr>
+              <a:buNone/>
               <a:defRPr sz="1350" b="0">
                 <a:solidFill>
                   <a:srgbClr val="B2C7C7"/>
@@ -6505,6 +4453,7 @@
           <a:lstStyle xmlns:a="http://schemas.openxmlformats.org/drawingml/2006/main"/>
           <a:p xmlns:a="http://schemas.openxmlformats.org/drawingml/2006/main">
             <a:pPr>
+              <a:buNone/>
               <a:defRPr sz="3450" b="1">
                 <a:solidFill>
                   <a:srgbClr val="F5F2E9"/>
@@ -6523,7 +4472,7 @@
                 <a:ea typeface="Thonburi"/>
                 <a:cs typeface="Thonburi"/>
               </a:rPr>
-              <a:t>เส้นทางใน handson/README.md</a:t>
+              <a:t>The path in README.md</a:t>
             </a:r>
           </a:p>
         </p:txBody>
@@ -6562,6 +4511,7 @@
           <a:lstStyle xmlns:a="http://schemas.openxmlformats.org/drawingml/2006/main"/>
           <a:p xmlns:a="http://schemas.openxmlformats.org/drawingml/2006/main">
             <a:pPr>
+              <a:buNone/>
               <a:defRPr sz="3675" b="1">
                 <a:solidFill>
                   <a:srgbClr val="D5F271"/>
@@ -6619,6 +4569,7 @@
           <a:lstStyle xmlns:a="http://schemas.openxmlformats.org/drawingml/2006/main"/>
           <a:p xmlns:a="http://schemas.openxmlformats.org/drawingml/2006/main">
             <a:pPr>
+              <a:buNone/>
               <a:defRPr sz="2325" b="0">
                 <a:solidFill>
                   <a:srgbClr val="F5F2E9"/>
@@ -6642,6 +4593,7 @@
           </a:p>
           <a:p xmlns:a="http://schemas.openxmlformats.org/drawingml/2006/main">
             <a:pPr>
+              <a:buNone/>
               <a:defRPr sz="2325" b="0">
                 <a:solidFill>
                   <a:srgbClr val="F5F2E9"/>
@@ -6660,11 +4612,12 @@
                 <a:ea typeface="Thonburi"/>
                 <a:cs typeface="Thonburi"/>
               </a:rPr>
-              <a:t>Generate ↔ Validate สองรอบ</a:t>
-            </a:r>
-          </a:p>
-          <a:p xmlns:a="http://schemas.openxmlformats.org/drawingml/2006/main">
-            <a:pPr>
+              <a:t>Generate ↔ Validate in two loops</a:t>
+            </a:r>
+          </a:p>
+          <a:p xmlns:a="http://schemas.openxmlformats.org/drawingml/2006/main">
+            <a:pPr>
+              <a:buNone/>
               <a:defRPr sz="2325" b="0">
                 <a:solidFill>
                   <a:srgbClr val="F5F2E9"/>
@@ -6683,11 +4636,12 @@
                 <a:ea typeface="Thonburi"/>
                 <a:cs typeface="Thonburi"/>
               </a:rPr>
-              <a:t>Govern แล้ว Deploy v1</a:t>
-            </a:r>
-          </a:p>
-          <a:p xmlns:a="http://schemas.openxmlformats.org/drawingml/2006/main">
-            <a:pPr>
+              <a:t>Govern, then Deploy v1</a:t>
+            </a:r>
+          </a:p>
+          <a:p xmlns:a="http://schemas.openxmlformats.org/drawingml/2006/main">
+            <a:pPr>
+              <a:buNone/>
               <a:defRPr sz="2325" b="0">
                 <a:solidFill>
                   <a:srgbClr val="F5F2E9"/>
@@ -6706,7 +4660,7 @@
                 <a:ea typeface="Thonburi"/>
                 <a:cs typeface="Thonburi"/>
               </a:rPr>
-              <a:t>Observe ↔ Govern ผลลัพธ์</a:t>
+              <a:t>Observe ↔ Govern the result</a:t>
             </a:r>
           </a:p>
         </p:txBody>
@@ -6745,6 +4699,7 @@
           <a:lstStyle xmlns:a="http://schemas.openxmlformats.org/drawingml/2006/main"/>
           <a:p xmlns:a="http://schemas.openxmlformats.org/drawingml/2006/main">
             <a:pPr>
+              <a:buNone/>
               <a:defRPr sz="3675" b="1">
                 <a:solidFill>
                   <a:srgbClr val="FFAC80"/>
@@ -6802,6 +4757,7 @@
           <a:lstStyle xmlns:a="http://schemas.openxmlformats.org/drawingml/2006/main"/>
           <a:p xmlns:a="http://schemas.openxmlformats.org/drawingml/2006/main">
             <a:pPr>
+              <a:buNone/>
               <a:defRPr sz="2325" b="0">
                 <a:solidFill>
                   <a:srgbClr val="F5F2E9"/>
@@ -6825,6 +4781,7 @@
           </a:p>
           <a:p xmlns:a="http://schemas.openxmlformats.org/drawingml/2006/main">
             <a:pPr>
+              <a:buNone/>
               <a:defRPr sz="2325" b="0">
                 <a:solidFill>
                   <a:srgbClr val="F5F2E9"/>
@@ -6848,6 +4805,7 @@
           </a:p>
           <a:p xmlns:a="http://schemas.openxmlformats.org/drawingml/2006/main">
             <a:pPr>
+              <a:buNone/>
               <a:defRPr sz="2325" b="0">
                 <a:solidFill>
                   <a:srgbClr val="F5F2E9"/>
@@ -6866,11 +4824,12 @@
                 <a:ea typeface="Thonburi"/>
                 <a:cs typeface="Thonburi"/>
               </a:rPr>
-              <a:t>Govern 10A แล้ว Deploy 10B</a:t>
-            </a:r>
-          </a:p>
-          <a:p xmlns:a="http://schemas.openxmlformats.org/drawingml/2006/main">
-            <a:pPr>
+              <a:t>Govern 10A, then Deploy 10B</a:t>
+            </a:r>
+          </a:p>
+          <a:p xmlns:a="http://schemas.openxmlformats.org/drawingml/2006/main">
+            <a:pPr>
+              <a:buNone/>
               <a:defRPr sz="2325" b="0">
                 <a:solidFill>
                   <a:srgbClr val="F5F2E9"/>
@@ -6889,7 +4848,7 @@
                 <a:ea typeface="Thonburi"/>
                 <a:cs typeface="Thonburi"/>
               </a:rPr>
-              <a:t>Observe ↔ Govern และ resolution</a:t>
+              <a:t>Observe ↔ Govern and resolution</a:t>
             </a:r>
           </a:p>
         </p:txBody>
@@ -6928,6 +4887,7 @@
           <a:lstStyle xmlns:a="http://schemas.openxmlformats.org/drawingml/2006/main"/>
           <a:p xmlns:a="http://schemas.openxmlformats.org/drawingml/2006/main">
             <a:pPr>
+              <a:buNone/>
               <a:defRPr sz="1575" b="0">
                 <a:solidFill>
                   <a:srgbClr val="B2C7C7"/>
@@ -6946,7 +4906,7 @@
                 <a:ea typeface="Thonburi"/>
                 <a:cs typeface="Thonburi"/>
               </a:rPr>
-              <a:t>เลือกทีละ Step อ่านหลักฐาน แล้วจึงเดินต่อ</a:t>
+              <a:t>Take one Step at a time. Read the evidence before you continue.</a:t>
             </a:r>
           </a:p>
         </p:txBody>
@@ -7014,6 +4974,7 @@
           <a:lstStyle xmlns:a="http://schemas.openxmlformats.org/drawingml/2006/main"/>
           <a:p xmlns:a="http://schemas.openxmlformats.org/drawingml/2006/main">
             <a:pPr>
+              <a:buNone/>
               <a:defRPr sz="1350" b="0">
                 <a:solidFill>
                   <a:srgbClr val="B2C7C7"/>
@@ -7071,6 +5032,7 @@
           <a:lstStyle xmlns:a="http://schemas.openxmlformats.org/drawingml/2006/main"/>
           <a:p xmlns:a="http://schemas.openxmlformats.org/drawingml/2006/main">
             <a:pPr>
+              <a:buNone/>
               <a:defRPr sz="3450" b="1">
                 <a:solidFill>
                   <a:srgbClr val="F5F2E9"/>
@@ -7089,7 +5051,7 @@
                 <a:ea typeface="Thonburi"/>
                 <a:cs typeface="Thonburi"/>
               </a:rPr>
-              <a:t>เริ่มที่ Step 0</a:t>
+              <a:t>Start with Step 0</a:t>
             </a:r>
           </a:p>
         </p:txBody>
@@ -7128,6 +5090,7 @@
           <a:lstStyle xmlns:a="http://schemas.openxmlformats.org/drawingml/2006/main"/>
           <a:p xmlns:a="http://schemas.openxmlformats.org/drawingml/2006/main">
             <a:pPr>
+              <a:buNone/>
               <a:defRPr sz="4350" b="1">
                 <a:solidFill>
                   <a:srgbClr val="D5F271"/>
@@ -7146,7 +5109,7 @@
                 <a:ea typeface="Thonburi"/>
                 <a:cs typeface="Thonburi"/>
               </a:rPr>
-              <a:t>เปิด handson/README.md</a:t>
+              <a:t>Open README.md</a:t>
             </a:r>
           </a:p>
         </p:txBody>
@@ -7185,6 +5148,7 @@
           <a:lstStyle xmlns:a="http://schemas.openxmlformats.org/drawingml/2006/main"/>
           <a:p xmlns:a="http://schemas.openxmlformats.org/drawingml/2006/main">
             <a:pPr>
+              <a:buNone/>
               <a:defRPr sz="2700" b="0">
                 <a:solidFill>
                   <a:srgbClr val="F5F2E9"/>
@@ -7203,11 +5167,12 @@
                 <a:ea typeface="Thonburi"/>
                 <a:cs typeface="Thonburi"/>
               </a:rPr>
-              <a:t>“ทำเฉพาะ Step 0</a:t>
-            </a:r>
-          </a:p>
-          <a:p xmlns:a="http://schemas.openxmlformats.org/drawingml/2006/main">
-            <a:pPr>
+              <a:t>“Do only Step 0</a:t>
+            </a:r>
+          </a:p>
+          <a:p xmlns:a="http://schemas.openxmlformats.org/drawingml/2006/main">
+            <a:pPr>
+              <a:buNone/>
               <a:defRPr sz="2700" b="0">
                 <a:solidFill>
                   <a:srgbClr val="F5F2E9"/>
@@ -7226,11 +5191,12 @@
                 <a:ea typeface="Thonburi"/>
                 <a:cs typeface="Thonburi"/>
               </a:rPr>
-              <a:t>อ่าน AGENTS.md และตรวจ 6 Skills</a:t>
-            </a:r>
-          </a:p>
-          <a:p xmlns:a="http://schemas.openxmlformats.org/drawingml/2006/main">
-            <a:pPr>
+              <a:t>Read AGENTS.md and check six Skills</a:t>
+            </a:r>
+          </a:p>
+          <a:p xmlns:a="http://schemas.openxmlformats.org/drawingml/2006/main">
+            <a:pPr>
+              <a:buNone/>
               <a:defRPr sz="2700" b="0">
                 <a:solidFill>
                   <a:srgbClr val="F5F2E9"/>
@@ -7249,7 +5215,7 @@
                 <a:ea typeface="Thonburi"/>
                 <a:cs typeface="Thonburi"/>
               </a:rPr>
-              <a:t>ยังไม่สร้างเกมหรือทำ Step ถัดไป”</a:t>
+              <a:t>Do not build the game or start the next Step”</a:t>
             </a:r>
           </a:p>
         </p:txBody>
@@ -7288,6 +5254,7 @@
           <a:lstStyle xmlns:a="http://schemas.openxmlformats.org/drawingml/2006/main"/>
           <a:p xmlns:a="http://schemas.openxmlformats.org/drawingml/2006/main">
             <a:pPr>
+              <a:buNone/>
               <a:defRPr sz="1575" b="0">
                 <a:solidFill>
                   <a:srgbClr val="B2C7C7"/>
@@ -7306,7 +5273,7 @@
                 <a:ea typeface="Thonburi"/>
                 <a:cs typeface="Thonburi"/>
               </a:rPr>
-              <a:t>เมื่อจบ: เกมสองเวอร์ชัน หลักฐานการตัดสินใจ resolution และ Intent ถัดไปจากสิ่งที่เรียนรู้</a:t>
+              <a:t>At the end: two game versions, decision evidence, a resolution, and the next Intent</a:t>
             </a:r>
           </a:p>
         </p:txBody>
@@ -7374,6 +5341,7 @@
           <a:lstStyle xmlns:a="http://schemas.openxmlformats.org/drawingml/2006/main"/>
           <a:p xmlns:a="http://schemas.openxmlformats.org/drawingml/2006/main">
             <a:pPr>
+              <a:buNone/>
               <a:defRPr sz="1350" b="0">
                 <a:solidFill>
                   <a:srgbClr val="B2C7C7"/>
@@ -7431,6 +5399,7 @@
           <a:lstStyle xmlns:a="http://schemas.openxmlformats.org/drawingml/2006/main"/>
           <a:p xmlns:a="http://schemas.openxmlformats.org/drawingml/2006/main">
             <a:pPr>
+              <a:buNone/>
               <a:defRPr sz="3450" b="1">
                 <a:solidFill>
                   <a:srgbClr val="F5F2E9"/>
@@ -7449,7 +5418,7 @@
                 <a:ea typeface="Thonburi"/>
                 <a:cs typeface="Thonburi"/>
               </a:rPr>
-              <a:t>เกมหนึ่งเกม กับ Intent สองรอบ</a:t>
+              <a:t>One game, two Intents</a:t>
             </a:r>
           </a:p>
         </p:txBody>
@@ -7488,6 +5457,7 @@
           <a:lstStyle xmlns:a="http://schemas.openxmlformats.org/drawingml/2006/main"/>
           <a:p xmlns:a="http://schemas.openxmlformats.org/drawingml/2006/main">
             <a:pPr>
+              <a:buNone/>
               <a:defRPr sz="7200" b="1">
                 <a:solidFill>
                   <a:srgbClr val="D5F271"/>
@@ -7545,6 +5515,7 @@
           <a:lstStyle xmlns:a="http://schemas.openxmlformats.org/drawingml/2006/main"/>
           <a:p xmlns:a="http://schemas.openxmlformats.org/drawingml/2006/main">
             <a:pPr>
+              <a:buNone/>
               <a:defRPr sz="3450" b="1">
                 <a:solidFill>
                   <a:srgbClr val="F5F2E9"/>
@@ -7563,7 +5534,7 @@
                 <a:ea typeface="Thonburi"/>
                 <a:cs typeface="Thonburi"/>
               </a:rPr>
-              <a:t>เล่นจบหนึ่งรอบ</a:t>
+              <a:t>Finish one round</a:t>
             </a:r>
           </a:p>
         </p:txBody>
@@ -7602,6 +5573,7 @@
           <a:lstStyle xmlns:a="http://schemas.openxmlformats.org/drawingml/2006/main"/>
           <a:p xmlns:a="http://schemas.openxmlformats.org/drawingml/2006/main">
             <a:pPr>
+              <a:buNone/>
               <a:defRPr sz="2175" b="0">
                 <a:solidFill>
                   <a:srgbClr val="B2C7C7"/>
@@ -7620,7 +5592,7 @@
                 <a:ea typeface="Thonburi"/>
                 <a:cs typeface="Thonburi"/>
               </a:rPr>
-              <a:t>เกมทายเลขที่ผู้เล่นเริ่มและเล่นจบได้เอง</a:t>
+              <a:t>A number game a player can start and finish alone</a:t>
             </a:r>
           </a:p>
         </p:txBody>
@@ -7659,6 +5631,7 @@
           <a:lstStyle xmlns:a="http://schemas.openxmlformats.org/drawingml/2006/main"/>
           <a:p xmlns:a="http://schemas.openxmlformats.org/drawingml/2006/main">
             <a:pPr>
+              <a:buNone/>
               <a:defRPr sz="7200" b="1">
                 <a:solidFill>
                   <a:srgbClr val="FFAC80"/>
@@ -7716,6 +5689,7 @@
           <a:lstStyle xmlns:a="http://schemas.openxmlformats.org/drawingml/2006/main"/>
           <a:p xmlns:a="http://schemas.openxmlformats.org/drawingml/2006/main">
             <a:pPr>
+              <a:buNone/>
               <a:defRPr sz="3450" b="1">
                 <a:solidFill>
                   <a:srgbClr val="F5F2E9"/>
@@ -7734,7 +5708,7 @@
                 <a:ea typeface="Thonburi"/>
                 <a:cs typeface="Thonburi"/>
               </a:rPr>
-              <a:t>อยากเล่นรอบที่สอง</a:t>
+              <a:t>Choose a second round</a:t>
             </a:r>
           </a:p>
         </p:txBody>
@@ -7773,6 +5747,7 @@
           <a:lstStyle xmlns:a="http://schemas.openxmlformats.org/drawingml/2006/main"/>
           <a:p xmlns:a="http://schemas.openxmlformats.org/drawingml/2006/main">
             <a:pPr>
+              <a:buNone/>
               <a:defRPr sz="2175" b="0">
                 <a:solidFill>
                   <a:srgbClr val="B2C7C7"/>
@@ -7791,7 +5766,7 @@
                 <a:ea typeface="Thonburi"/>
                 <a:cs typeface="Thonburi"/>
               </a:rPr>
-              <a:t>เพิ่ม replay แล้ววัดพฤติกรรมการเล่นซ้ำ</a:t>
+              <a:t>Add replay and measure second-round starts</a:t>
             </a:r>
           </a:p>
         </p:txBody>
@@ -7859,6 +5834,7 @@
           <a:lstStyle xmlns:a="http://schemas.openxmlformats.org/drawingml/2006/main"/>
           <a:p xmlns:a="http://schemas.openxmlformats.org/drawingml/2006/main">
             <a:pPr>
+              <a:buNone/>
               <a:defRPr sz="1350" b="0">
                 <a:solidFill>
                   <a:srgbClr val="B2C7C7"/>
@@ -7916,6 +5892,7 @@
           <a:lstStyle xmlns:a="http://schemas.openxmlformats.org/drawingml/2006/main"/>
           <a:p xmlns:a="http://schemas.openxmlformats.org/drawingml/2006/main">
             <a:pPr>
+              <a:buNone/>
               <a:defRPr sz="3450" b="1">
                 <a:solidFill>
                   <a:srgbClr val="F5F2E9"/>
@@ -7934,7 +5911,7 @@
                 <a:ea typeface="Thonburi"/>
                 <a:cs typeface="Thonburi"/>
               </a:rPr>
-              <a:t>วงจร ADLC</a:t>
+              <a:t>The ADLC loop</a:t>
             </a:r>
           </a:p>
         </p:txBody>
@@ -7973,6 +5950,7 @@
           <a:lstStyle xmlns:a="http://schemas.openxmlformats.org/drawingml/2006/main"/>
           <a:p xmlns:a="http://schemas.openxmlformats.org/drawingml/2006/main">
             <a:pPr>
+              <a:buNone/>
               <a:defRPr sz="2625" b="1">
                 <a:solidFill>
                   <a:srgbClr val="D5F271"/>
@@ -8030,6 +6008,7 @@
           <a:lstStyle xmlns:a="http://schemas.openxmlformats.org/drawingml/2006/main"/>
           <a:p xmlns:a="http://schemas.openxmlformats.org/drawingml/2006/main">
             <a:pPr>
+              <a:buNone/>
               <a:defRPr sz="2025" b="0">
                 <a:solidFill>
                   <a:srgbClr val="F5F2E9"/>
@@ -8048,7 +6027,7 @@
                 <a:ea typeface="Thonburi"/>
                 <a:cs typeface="Thonburi"/>
               </a:rPr>
-              <a:t>ตั้งคำถามและเกณฑ์วัดผล</a:t>
+              <a:t>Set the question and measures</a:t>
             </a:r>
           </a:p>
         </p:txBody>
@@ -8087,6 +6066,7 @@
           <a:lstStyle xmlns:a="http://schemas.openxmlformats.org/drawingml/2006/main"/>
           <a:p xmlns:a="http://schemas.openxmlformats.org/drawingml/2006/main">
             <a:pPr>
+              <a:buNone/>
               <a:defRPr sz="2625" b="1">
                 <a:solidFill>
                   <a:srgbClr val="D5F271"/>
@@ -8144,6 +6124,7 @@
           <a:lstStyle xmlns:a="http://schemas.openxmlformats.org/drawingml/2006/main"/>
           <a:p xmlns:a="http://schemas.openxmlformats.org/drawingml/2006/main">
             <a:pPr>
+              <a:buNone/>
               <a:defRPr sz="2025" b="0">
                 <a:solidFill>
                   <a:srgbClr val="F5F2E9"/>
@@ -8162,7 +6143,7 @@
                 <a:ea typeface="Thonburi"/>
                 <a:cs typeface="Thonburi"/>
               </a:rPr>
-              <a:t>สร้างงานตามบริบท</a:t>
+              <a:t>Create work for the context</a:t>
             </a:r>
           </a:p>
         </p:txBody>
@@ -8201,6 +6182,7 @@
           <a:lstStyle xmlns:a="http://schemas.openxmlformats.org/drawingml/2006/main"/>
           <a:p xmlns:a="http://schemas.openxmlformats.org/drawingml/2006/main">
             <a:pPr>
+              <a:buNone/>
               <a:defRPr sz="2625" b="1">
                 <a:solidFill>
                   <a:srgbClr val="D5F271"/>
@@ -8258,6 +6240,7 @@
           <a:lstStyle xmlns:a="http://schemas.openxmlformats.org/drawingml/2006/main"/>
           <a:p xmlns:a="http://schemas.openxmlformats.org/drawingml/2006/main">
             <a:pPr>
+              <a:buNone/>
               <a:defRPr sz="2025" b="0">
                 <a:solidFill>
                   <a:srgbClr val="F5F2E9"/>
@@ -8276,7 +6259,7 @@
                 <a:ea typeface="Thonburi"/>
                 <a:cs typeface="Thonburi"/>
               </a:rPr>
-              <a:t>ตรวจหลักฐานระหว่างสร้าง</a:t>
+              <a:t>Check evidence during the work</a:t>
             </a:r>
           </a:p>
         </p:txBody>
@@ -8315,6 +6298,7 @@
           <a:lstStyle xmlns:a="http://schemas.openxmlformats.org/drawingml/2006/main"/>
           <a:p xmlns:a="http://schemas.openxmlformats.org/drawingml/2006/main">
             <a:pPr>
+              <a:buNone/>
               <a:defRPr sz="2625" b="1">
                 <a:solidFill>
                   <a:srgbClr val="D5F271"/>
@@ -8372,6 +6356,7 @@
           <a:lstStyle xmlns:a="http://schemas.openxmlformats.org/drawingml/2006/main"/>
           <a:p xmlns:a="http://schemas.openxmlformats.org/drawingml/2006/main">
             <a:pPr>
+              <a:buNone/>
               <a:defRPr sz="2025" b="0">
                 <a:solidFill>
                   <a:srgbClr val="F5F2E9"/>
@@ -8390,7 +6375,7 @@
                 <a:ea typeface="Thonburi"/>
                 <a:cs typeface="Thonburi"/>
               </a:rPr>
-              <a:t>มนุษย์ตัดสินใจ</a:t>
+              <a:t>A human decides</a:t>
             </a:r>
           </a:p>
         </p:txBody>
@@ -8429,6 +6414,7 @@
           <a:lstStyle xmlns:a="http://schemas.openxmlformats.org/drawingml/2006/main"/>
           <a:p xmlns:a="http://schemas.openxmlformats.org/drawingml/2006/main">
             <a:pPr>
+              <a:buNone/>
               <a:defRPr sz="2625" b="1">
                 <a:solidFill>
                   <a:srgbClr val="D5F271"/>
@@ -8486,6 +6472,7 @@
           <a:lstStyle xmlns:a="http://schemas.openxmlformats.org/drawingml/2006/main"/>
           <a:p xmlns:a="http://schemas.openxmlformats.org/drawingml/2006/main">
             <a:pPr>
+              <a:buNone/>
               <a:defRPr sz="2025" b="0">
                 <a:solidFill>
                   <a:srgbClr val="F5F2E9"/>
@@ -8504,7 +6491,7 @@
                 <a:ea typeface="Thonburi"/>
                 <a:cs typeface="Thonburi"/>
               </a:rPr>
-              <a:t>เปิดเวอร์ชันให้ทดลอง</a:t>
+              <a:t>Open a revision for testing</a:t>
             </a:r>
           </a:p>
         </p:txBody>
@@ -8543,6 +6530,7 @@
           <a:lstStyle xmlns:a="http://schemas.openxmlformats.org/drawingml/2006/main"/>
           <a:p xmlns:a="http://schemas.openxmlformats.org/drawingml/2006/main">
             <a:pPr>
+              <a:buNone/>
               <a:defRPr sz="2625" b="1">
                 <a:solidFill>
                   <a:srgbClr val="D5F271"/>
@@ -8600,6 +6588,7 @@
           <a:lstStyle xmlns:a="http://schemas.openxmlformats.org/drawingml/2006/main"/>
           <a:p xmlns:a="http://schemas.openxmlformats.org/drawingml/2006/main">
             <a:pPr>
+              <a:buNone/>
               <a:defRPr sz="2025" b="0">
                 <a:solidFill>
                   <a:srgbClr val="F5F2E9"/>
@@ -8618,7 +6607,7 @@
                 <a:ea typeface="Thonburi"/>
                 <a:cs typeface="Thonburi"/>
               </a:rPr>
-              <a:t>วัดผลเพื่อปรับ Intent</a:t>
+              <a:t>Measure results for the next Intent</a:t>
             </a:r>
           </a:p>
         </p:txBody>
@@ -8657,6 +6646,7 @@
           <a:lstStyle xmlns:a="http://schemas.openxmlformats.org/drawingml/2006/main"/>
           <a:p xmlns:a="http://schemas.openxmlformats.org/drawingml/2006/main">
             <a:pPr>
+              <a:buNone/>
               <a:defRPr sz="1575" b="0">
                 <a:solidFill>
                   <a:srgbClr val="B2C7C7"/>
@@ -8675,7 +6665,7 @@
                 <a:ea typeface="Thonburi"/>
                 <a:cs typeface="Thonburi"/>
               </a:rPr>
-              <a:t>Generate และ Validate ทำงานควบคู่กัน ส่วน Observe ป้อนคำถามกลับเข้า Intent</a:t>
+              <a:t>Generate and Validate work together. Observe sends new questions to Intent.</a:t>
             </a:r>
           </a:p>
         </p:txBody>
@@ -8743,6 +6733,7 @@
           <a:lstStyle xmlns:a="http://schemas.openxmlformats.org/drawingml/2006/main"/>
           <a:p xmlns:a="http://schemas.openxmlformats.org/drawingml/2006/main">
             <a:pPr>
+              <a:buNone/>
               <a:defRPr sz="1350" b="0">
                 <a:solidFill>
                   <a:srgbClr val="173234"/>
@@ -8800,6 +6791,7 @@
           <a:lstStyle xmlns:a="http://schemas.openxmlformats.org/drawingml/2006/main"/>
           <a:p xmlns:a="http://schemas.openxmlformats.org/drawingml/2006/main">
             <a:pPr>
+              <a:buNone/>
               <a:defRPr sz="3450" b="1">
                 <a:solidFill>
                   <a:srgbClr val="173234"/>
@@ -8818,7 +6810,7 @@
                 <a:ea typeface="Thonburi"/>
                 <a:cs typeface="Thonburi"/>
               </a:rPr>
-              <a:t>บทบาทของคนและ Agent</a:t>
+              <a:t>Human and Agent roles</a:t>
             </a:r>
           </a:p>
         </p:txBody>
@@ -8857,6 +6849,7 @@
           <a:lstStyle xmlns:a="http://schemas.openxmlformats.org/drawingml/2006/main"/>
           <a:p xmlns:a="http://schemas.openxmlformats.org/drawingml/2006/main">
             <a:pPr>
+              <a:buNone/>
               <a:defRPr sz="4500" b="1">
                 <a:solidFill>
                   <a:srgbClr val="173234"/>
@@ -8875,7 +6868,7 @@
                 <a:ea typeface="Thonburi"/>
                 <a:cs typeface="Thonburi"/>
               </a:rPr>
-              <a:t>คน</a:t>
+              <a:t>Human</a:t>
             </a:r>
           </a:p>
         </p:txBody>
@@ -8914,6 +6907,7 @@
           <a:lstStyle xmlns:a="http://schemas.openxmlformats.org/drawingml/2006/main"/>
           <a:p xmlns:a="http://schemas.openxmlformats.org/drawingml/2006/main">
             <a:pPr>
+              <a:buNone/>
               <a:defRPr sz="2400" b="0">
                 <a:solidFill>
                   <a:srgbClr val="173234"/>
@@ -8932,11 +6926,12 @@
                 <a:ea typeface="Thonburi"/>
                 <a:cs typeface="Thonburi"/>
               </a:rPr>
-              <a:t>กำหนด Intent และขอบเขต</a:t>
-            </a:r>
-          </a:p>
-          <a:p xmlns:a="http://schemas.openxmlformats.org/drawingml/2006/main">
-            <a:pPr>
+              <a:t>Set the Intent and scope</a:t>
+            </a:r>
+          </a:p>
+          <a:p xmlns:a="http://schemas.openxmlformats.org/drawingml/2006/main">
+            <a:pPr>
+              <a:buNone/>
               <a:defRPr sz="2400" b="0">
                 <a:solidFill>
                   <a:srgbClr val="173234"/>
@@ -8955,11 +6950,12 @@
                 <a:ea typeface="Thonburi"/>
                 <a:cs typeface="Thonburi"/>
               </a:rPr>
-              <a:t>อ่านหลักฐานและทดลองเล่น</a:t>
-            </a:r>
-          </a:p>
-          <a:p xmlns:a="http://schemas.openxmlformats.org/drawingml/2006/main">
-            <a:pPr>
+              <a:t>Review evidence and test the game</a:t>
+            </a:r>
+          </a:p>
+          <a:p xmlns:a="http://schemas.openxmlformats.org/drawingml/2006/main">
+            <a:pPr>
+              <a:buNone/>
               <a:defRPr sz="2400" b="0">
                 <a:solidFill>
                   <a:srgbClr val="173234"/>
@@ -8978,7 +6974,7 @@
                 <a:ea typeface="Thonburi"/>
                 <a:cs typeface="Thonburi"/>
               </a:rPr>
-              <a:t>ตัดสินใจให้ไปต่อหรือแก้ไข</a:t>
+              <a:t>Decide to continue or revise</a:t>
             </a:r>
           </a:p>
         </p:txBody>
@@ -9017,6 +7013,7 @@
           <a:lstStyle xmlns:a="http://schemas.openxmlformats.org/drawingml/2006/main"/>
           <a:p xmlns:a="http://schemas.openxmlformats.org/drawingml/2006/main">
             <a:pPr>
+              <a:buNone/>
               <a:defRPr sz="4500" b="1">
                 <a:solidFill>
                   <a:srgbClr val="173234"/>
@@ -9074,6 +7071,7 @@
           <a:lstStyle xmlns:a="http://schemas.openxmlformats.org/drawingml/2006/main"/>
           <a:p xmlns:a="http://schemas.openxmlformats.org/drawingml/2006/main">
             <a:pPr>
+              <a:buNone/>
               <a:defRPr sz="2400" b="0">
                 <a:solidFill>
                   <a:srgbClr val="173234"/>
@@ -9092,11 +7090,12 @@
                 <a:ea typeface="Thonburi"/>
                 <a:cs typeface="Thonburi"/>
               </a:rPr>
-              <a:t>สร้าง Spec และ Plan</a:t>
-            </a:r>
-          </a:p>
-          <a:p xmlns:a="http://schemas.openxmlformats.org/drawingml/2006/main">
-            <a:pPr>
+              <a:t>Create the Spec and Plan</a:t>
+            </a:r>
+          </a:p>
+          <a:p xmlns:a="http://schemas.openxmlformats.org/drawingml/2006/main">
+            <a:pPr>
+              <a:buNone/>
               <a:defRPr sz="2400" b="0">
                 <a:solidFill>
                   <a:srgbClr val="173234"/>
@@ -9115,11 +7114,12 @@
                 <a:ea typeface="Thonburi"/>
                 <a:cs typeface="Thonburi"/>
               </a:rPr>
-              <a:t>ลงมือทำพร้อม tests</a:t>
-            </a:r>
-          </a:p>
-          <a:p xmlns:a="http://schemas.openxmlformats.org/drawingml/2006/main">
-            <a:pPr>
+              <a:t>Build the work with tests</a:t>
+            </a:r>
+          </a:p>
+          <a:p xmlns:a="http://schemas.openxmlformats.org/drawingml/2006/main">
+            <a:pPr>
+              <a:buNone/>
               <a:defRPr sz="2400" b="0">
                 <a:solidFill>
                   <a:srgbClr val="173234"/>
@@ -9138,7 +7138,7 @@
                 <a:ea typeface="Thonburi"/>
                 <a:cs typeface="Thonburi"/>
               </a:rPr>
-              <a:t>รายงานผลและข้อจำกัด</a:t>
+              <a:t>Report results and limits</a:t>
             </a:r>
           </a:p>
         </p:txBody>
@@ -9177,6 +7177,7 @@
           <a:lstStyle xmlns:a="http://schemas.openxmlformats.org/drawingml/2006/main"/>
           <a:p xmlns:a="http://schemas.openxmlformats.org/drawingml/2006/main">
             <a:pPr>
+              <a:buNone/>
               <a:defRPr sz="1575" b="0">
                 <a:solidFill>
                   <a:srgbClr val="173234"/>
@@ -9195,7 +7196,7 @@
                 <a:ea typeface="Thonburi"/>
                 <a:cs typeface="Thonburi"/>
               </a:rPr>
-              <a:t>การอนุมัติผูกกับเวอร์ชันที่ตรวจ เมื่อโค้ดเปลี่ยนต้องทบทวนหลักฐาน</a:t>
+              <a:t>Approval applies to the checked revision. Review the evidence again after code changes.</a:t>
             </a:r>
           </a:p>
         </p:txBody>
@@ -9263,6 +7264,7 @@
           <a:lstStyle xmlns:a="http://schemas.openxmlformats.org/drawingml/2006/main"/>
           <a:p xmlns:a="http://schemas.openxmlformats.org/drawingml/2006/main">
             <a:pPr>
+              <a:buNone/>
               <a:defRPr sz="1350" b="0">
                 <a:solidFill>
                   <a:srgbClr val="B2C7C7"/>
@@ -9320,6 +7322,7 @@
           <a:lstStyle xmlns:a="http://schemas.openxmlformats.org/drawingml/2006/main"/>
           <a:p xmlns:a="http://schemas.openxmlformats.org/drawingml/2006/main">
             <a:pPr>
+              <a:buNone/>
               <a:defRPr sz="3450" b="1">
                 <a:solidFill>
                   <a:srgbClr val="F5F2E9"/>
@@ -9338,7 +7341,7 @@
                 <a:ea typeface="Thonburi"/>
                 <a:cs typeface="Thonburi"/>
               </a:rPr>
-              <a:t>จุดเริ่มต้นใน repo</a:t>
+              <a:t>Start in the repository</a:t>
             </a:r>
           </a:p>
         </p:txBody>
@@ -9377,6 +7380,7 @@
           <a:lstStyle xmlns:a="http://schemas.openxmlformats.org/drawingml/2006/main"/>
           <a:p xmlns:a="http://schemas.openxmlformats.org/drawingml/2006/main">
             <a:pPr>
+              <a:buNone/>
               <a:defRPr sz="2925" b="1">
                 <a:solidFill>
                   <a:srgbClr val="D5F271"/>
@@ -9434,6 +7438,7 @@
           <a:lstStyle xmlns:a="http://schemas.openxmlformats.org/drawingml/2006/main"/>
           <a:p xmlns:a="http://schemas.openxmlformats.org/drawingml/2006/main">
             <a:pPr>
+              <a:buNone/>
               <a:defRPr sz="2175" b="0">
                 <a:solidFill>
                   <a:srgbClr val="F5F2E9"/>
@@ -9452,7 +7457,7 @@
                 <a:ea typeface="Thonburi"/>
                 <a:cs typeface="Thonburi"/>
               </a:rPr>
-              <a:t>หน้าเริ่มต้นและภาพรวม Workshop</a:t>
+              <a:t>Workshop start page and Step guide</a:t>
             </a:r>
           </a:p>
         </p:txBody>
@@ -9491,6 +7496,7 @@
           <a:lstStyle xmlns:a="http://schemas.openxmlformats.org/drawingml/2006/main"/>
           <a:p xmlns:a="http://schemas.openxmlformats.org/drawingml/2006/main">
             <a:pPr>
+              <a:buNone/>
               <a:defRPr sz="2925" b="1">
                 <a:solidFill>
                   <a:srgbClr val="D5F271"/>
@@ -9509,7 +7515,7 @@
                 <a:ea typeface="Thonburi"/>
                 <a:cs typeface="Thonburi"/>
               </a:rPr>
-              <a:t>handson/README.md + game-profile.md</a:t>
+              <a:t>game-profile.md</a:t>
             </a:r>
           </a:p>
         </p:txBody>
@@ -9548,6 +7554,7 @@
           <a:lstStyle xmlns:a="http://schemas.openxmlformats.org/drawingml/2006/main"/>
           <a:p xmlns:a="http://schemas.openxmlformats.org/drawingml/2006/main">
             <a:pPr>
+              <a:buNone/>
               <a:defRPr sz="2175" b="0">
                 <a:solidFill>
                   <a:srgbClr val="F5F2E9"/>
@@ -9566,7 +7573,7 @@
                 <a:ea typeface="Thonburi"/>
                 <a:cs typeface="Thonburi"/>
               </a:rPr>
-              <a:t>ลำดับ Step และ Project Binding</a:t>
+              <a:t>Game rules and Project Binding</a:t>
             </a:r>
           </a:p>
         </p:txBody>
@@ -9605,6 +7612,7 @@
           <a:lstStyle xmlns:a="http://schemas.openxmlformats.org/drawingml/2006/main"/>
           <a:p xmlns:a="http://schemas.openxmlformats.org/drawingml/2006/main">
             <a:pPr>
+              <a:buNone/>
               <a:defRPr sz="2925" b="1">
                 <a:solidFill>
                   <a:srgbClr val="D5F271"/>
@@ -9662,6 +7670,7 @@
           <a:lstStyle xmlns:a="http://schemas.openxmlformats.org/drawingml/2006/main"/>
           <a:p xmlns:a="http://schemas.openxmlformats.org/drawingml/2006/main">
             <a:pPr>
+              <a:buNone/>
               <a:defRPr sz="2175" b="0">
                 <a:solidFill>
                   <a:srgbClr val="F5F2E9"/>
@@ -9680,7 +7689,7 @@
                 <a:ea typeface="Thonburi"/>
                 <a:cs typeface="Thonburi"/>
               </a:rPr>
-              <a:t>กติกา Agent และ reusable skills</a:t>
+              <a:t>Agent rules and reusable Skills</a:t>
             </a:r>
           </a:p>
         </p:txBody>
@@ -9719,6 +7728,7 @@
           <a:lstStyle xmlns:a="http://schemas.openxmlformats.org/drawingml/2006/main"/>
           <a:p xmlns:a="http://schemas.openxmlformats.org/drawingml/2006/main">
             <a:pPr>
+              <a:buNone/>
               <a:defRPr sz="1575" b="0">
                 <a:solidFill>
                   <a:srgbClr val="B2C7C7"/>
@@ -9737,7 +7747,7 @@
                 <a:ea typeface="Thonburi"/>
                 <a:cs typeface="Thonburi"/>
               </a:rPr>
-              <a:t>Skill Core แยกจากตัวอย่างเกม ตั้งค่าเฉพาะโปรเจกต์ และเลือก Coding Agent ได้</a:t>
+              <a:t>The Skill Core is separate from the game. The project adds its own settings.</a:t>
             </a:r>
           </a:p>
         </p:txBody>
@@ -9805,6 +7815,7 @@
           <a:lstStyle xmlns:a="http://schemas.openxmlformats.org/drawingml/2006/main"/>
           <a:p xmlns:a="http://schemas.openxmlformats.org/drawingml/2006/main">
             <a:pPr>
+              <a:buNone/>
               <a:defRPr sz="1350" b="0">
                 <a:solidFill>
                   <a:srgbClr val="B2C7C7"/>
@@ -9862,6 +7873,7 @@
           <a:lstStyle xmlns:a="http://schemas.openxmlformats.org/drawingml/2006/main"/>
           <a:p xmlns:a="http://schemas.openxmlformats.org/drawingml/2006/main">
             <a:pPr>
+              <a:buNone/>
               <a:defRPr sz="3450" b="1">
                 <a:solidFill>
                   <a:srgbClr val="F5F2E9"/>
@@ -9880,7 +7892,7 @@
                 <a:ea typeface="Thonburi"/>
                 <a:cs typeface="Thonburi"/>
               </a:rPr>
-              <a:t>6 Reusable Skills ตรงกับ 6 ADLC modes</a:t>
+              <a:t>Six ADLC Skills</a:t>
             </a:r>
           </a:p>
         </p:txBody>
@@ -9919,6 +7931,7 @@
           <a:lstStyle xmlns:a="http://schemas.openxmlformats.org/drawingml/2006/main"/>
           <a:p xmlns:a="http://schemas.openxmlformats.org/drawingml/2006/main">
             <a:pPr>
+              <a:buNone/>
               <a:defRPr sz="1875" b="1">
                 <a:solidFill>
                   <a:srgbClr val="D5F271"/>
@@ -9976,6 +7989,7 @@
           <a:lstStyle xmlns:a="http://schemas.openxmlformats.org/drawingml/2006/main"/>
           <a:p xmlns:a="http://schemas.openxmlformats.org/drawingml/2006/main">
             <a:pPr>
+              <a:buNone/>
               <a:defRPr sz="1725" b="0">
                 <a:solidFill>
                   <a:srgbClr val="F5F2E9"/>
@@ -9994,7 +8008,7 @@
                 <a:ea typeface="Thonburi"/>
                 <a:cs typeface="Thonburi"/>
               </a:rPr>
-              <a:t>Hypothesis และ signal</a:t>
+              <a:t>Hypothesis and signal</a:t>
             </a:r>
           </a:p>
         </p:txBody>
@@ -10033,6 +8047,7 @@
           <a:lstStyle xmlns:a="http://schemas.openxmlformats.org/drawingml/2006/main"/>
           <a:p xmlns:a="http://schemas.openxmlformats.org/drawingml/2006/main">
             <a:pPr>
+              <a:buNone/>
               <a:defRPr sz="1875" b="1">
                 <a:solidFill>
                   <a:srgbClr val="D5F271"/>
@@ -10090,6 +8105,7 @@
           <a:lstStyle xmlns:a="http://schemas.openxmlformats.org/drawingml/2006/main"/>
           <a:p xmlns:a="http://schemas.openxmlformats.org/drawingml/2006/main">
             <a:pPr>
+              <a:buNone/>
               <a:defRPr sz="1725" b="0">
                 <a:solidFill>
                   <a:srgbClr val="F5F2E9"/>
@@ -10147,6 +8163,7 @@
           <a:lstStyle xmlns:a="http://schemas.openxmlformats.org/drawingml/2006/main"/>
           <a:p xmlns:a="http://schemas.openxmlformats.org/drawingml/2006/main">
             <a:pPr>
+              <a:buNone/>
               <a:defRPr sz="1875" b="1">
                 <a:solidFill>
                   <a:srgbClr val="D5F271"/>
@@ -10204,6 +8221,7 @@
           <a:lstStyle xmlns:a="http://schemas.openxmlformats.org/drawingml/2006/main"/>
           <a:p xmlns:a="http://schemas.openxmlformats.org/drawingml/2006/main">
             <a:pPr>
+              <a:buNone/>
               <a:defRPr sz="1725" b="0">
                 <a:solidFill>
                   <a:srgbClr val="F5F2E9"/>
@@ -10222,7 +8240,7 @@
                 <a:ea typeface="Thonburi"/>
                 <a:cs typeface="Thonburi"/>
               </a:rPr>
-              <a:t>Acceptance และหลักฐาน</a:t>
+              <a:t>Acceptance and evidence</a:t>
             </a:r>
           </a:p>
         </p:txBody>
@@ -10261,6 +8279,7 @@
           <a:lstStyle xmlns:a="http://schemas.openxmlformats.org/drawingml/2006/main"/>
           <a:p xmlns:a="http://schemas.openxmlformats.org/drawingml/2006/main">
             <a:pPr>
+              <a:buNone/>
               <a:defRPr sz="1875" b="1">
                 <a:solidFill>
                   <a:srgbClr val="D5F271"/>
@@ -10318,6 +8337,7 @@
           <a:lstStyle xmlns:a="http://schemas.openxmlformats.org/drawingml/2006/main"/>
           <a:p xmlns:a="http://schemas.openxmlformats.org/drawingml/2006/main">
             <a:pPr>
+              <a:buNone/>
               <a:defRPr sz="1725" b="0">
                 <a:solidFill>
                   <a:srgbClr val="F5F2E9"/>
@@ -10336,7 +8356,7 @@
                 <a:ea typeface="Thonburi"/>
                 <a:cs typeface="Thonburi"/>
               </a:rPr>
-              <a:t>มนุษย์ตัดสินใจ</a:t>
+              <a:t>A human decides</a:t>
             </a:r>
           </a:p>
         </p:txBody>
@@ -10375,6 +8395,7 @@
           <a:lstStyle xmlns:a="http://schemas.openxmlformats.org/drawingml/2006/main"/>
           <a:p xmlns:a="http://schemas.openxmlformats.org/drawingml/2006/main">
             <a:pPr>
+              <a:buNone/>
               <a:defRPr sz="1875" b="1">
                 <a:solidFill>
                   <a:srgbClr val="D5F271"/>
@@ -10432,6 +8453,7 @@
           <a:lstStyle xmlns:a="http://schemas.openxmlformats.org/drawingml/2006/main"/>
           <a:p xmlns:a="http://schemas.openxmlformats.org/drawingml/2006/main">
             <a:pPr>
+              <a:buNone/>
               <a:defRPr sz="1725" b="0">
                 <a:solidFill>
                   <a:srgbClr val="F5F2E9"/>
@@ -10450,7 +8472,7 @@
                 <a:ea typeface="Thonburi"/>
                 <a:cs typeface="Thonburi"/>
               </a:rPr>
-              <a:t>Release ตาม project target</a:t>
+              <a:t>Release to the project target</a:t>
             </a:r>
           </a:p>
         </p:txBody>
@@ -10489,6 +8511,7 @@
           <a:lstStyle xmlns:a="http://schemas.openxmlformats.org/drawingml/2006/main"/>
           <a:p xmlns:a="http://schemas.openxmlformats.org/drawingml/2006/main">
             <a:pPr>
+              <a:buNone/>
               <a:defRPr sz="1875" b="1">
                 <a:solidFill>
                   <a:srgbClr val="D5F271"/>
@@ -10546,6 +8569,7 @@
           <a:lstStyle xmlns:a="http://schemas.openxmlformats.org/drawingml/2006/main"/>
           <a:p xmlns:a="http://schemas.openxmlformats.org/drawingml/2006/main">
             <a:pPr>
+              <a:buNone/>
               <a:defRPr sz="1725" b="0">
                 <a:solidFill>
                   <a:srgbClr val="F5F2E9"/>
@@ -10564,7 +8588,7 @@
                 <a:ea typeface="Thonburi"/>
                 <a:cs typeface="Thonburi"/>
               </a:rPr>
-              <a:t>วิเคราะห์ outcome signal</a:t>
+              <a:t>Study the outcome signal</a:t>
             </a:r>
           </a:p>
         </p:txBody>
@@ -10603,6 +8627,7 @@
           <a:lstStyle xmlns:a="http://schemas.openxmlformats.org/drawingml/2006/main"/>
           <a:p xmlns:a="http://schemas.openxmlformats.org/drawingml/2006/main">
             <a:pPr>
+              <a:buNone/>
               <a:defRPr sz="1575" b="0">
                 <a:solidFill>
                   <a:srgbClr val="B2C7C7"/>
@@ -10621,7 +8646,7 @@
                 <a:ea typeface="Thonburi"/>
                 <a:cs typeface="Thonburi"/>
               </a:rPr>
-              <a:t>แต่ละ Skill ใช้เดี่ยวได้ และทำงานร่วมกันเป็น ADLC pack ในทุก domain</a:t>
+              <a:t>Each Skill works alone. Together, they form an ADLC pack for any domain.</a:t>
             </a:r>
           </a:p>
         </p:txBody>
@@ -10689,6 +8714,7 @@
           <a:lstStyle xmlns:a="http://schemas.openxmlformats.org/drawingml/2006/main"/>
           <a:p xmlns:a="http://schemas.openxmlformats.org/drawingml/2006/main">
             <a:pPr>
+              <a:buNone/>
               <a:defRPr sz="1350" b="0">
                 <a:solidFill>
                   <a:srgbClr val="173234"/>
@@ -10746,6 +8772,7 @@
           <a:lstStyle xmlns:a="http://schemas.openxmlformats.org/drawingml/2006/main"/>
           <a:p xmlns:a="http://schemas.openxmlformats.org/drawingml/2006/main">
             <a:pPr>
+              <a:buNone/>
               <a:defRPr sz="3450" b="1">
                 <a:solidFill>
                   <a:srgbClr val="173234"/>
@@ -10764,7 +8791,7 @@
                 <a:ea typeface="Thonburi"/>
                 <a:cs typeface="Thonburi"/>
               </a:rPr>
-              <a:t>Intent 1: เกมทายเลข</a:t>
+              <a:t>Intent 1: Number guessing game</a:t>
             </a:r>
           </a:p>
         </p:txBody>
@@ -10803,6 +8830,7 @@
           <a:lstStyle xmlns:a="http://schemas.openxmlformats.org/drawingml/2006/main"/>
           <a:p xmlns:a="http://schemas.openxmlformats.org/drawingml/2006/main">
             <a:pPr>
+              <a:buNone/>
               <a:defRPr sz="7500" b="1">
                 <a:solidFill>
                   <a:srgbClr val="173234"/>
@@ -10860,6 +8888,7 @@
           <a:lstStyle xmlns:a="http://schemas.openxmlformats.org/drawingml/2006/main"/>
           <a:p xmlns:a="http://schemas.openxmlformats.org/drawingml/2006/main">
             <a:pPr>
+              <a:buNone/>
               <a:defRPr sz="2400" b="0">
                 <a:solidFill>
                   <a:srgbClr val="173234"/>
@@ -10878,7 +8907,7 @@
                 <a:ea typeface="Thonburi"/>
                 <a:cs typeface="Thonburi"/>
               </a:rPr>
-              <a:t>ช่วงตัวเลข</a:t>
+              <a:t>Number range</a:t>
             </a:r>
           </a:p>
         </p:txBody>
@@ -10917,6 +8946,7 @@
           <a:lstStyle xmlns:a="http://schemas.openxmlformats.org/drawingml/2006/main"/>
           <a:p xmlns:a="http://schemas.openxmlformats.org/drawingml/2006/main">
             <a:pPr>
+              <a:buNone/>
               <a:defRPr sz="8400" b="1">
                 <a:solidFill>
                   <a:srgbClr val="173234"/>
@@ -10974,6 +9004,7 @@
           <a:lstStyle xmlns:a="http://schemas.openxmlformats.org/drawingml/2006/main"/>
           <a:p xmlns:a="http://schemas.openxmlformats.org/drawingml/2006/main">
             <a:pPr>
+              <a:buNone/>
               <a:defRPr sz="2400" b="0">
                 <a:solidFill>
                   <a:srgbClr val="173234"/>
@@ -10992,7 +9023,7 @@
                 <a:ea typeface="Thonburi"/>
                 <a:cs typeface="Thonburi"/>
               </a:rPr>
-              <a:t>โอกาสในการทาย</a:t>
+              <a:t>Guesses</a:t>
             </a:r>
           </a:p>
         </p:txBody>
@@ -11031,6 +9062,7 @@
           <a:lstStyle xmlns:a="http://schemas.openxmlformats.org/drawingml/2006/main"/>
           <a:p xmlns:a="http://schemas.openxmlformats.org/drawingml/2006/main">
             <a:pPr>
+              <a:buNone/>
               <a:defRPr sz="2475" b="0">
                 <a:solidFill>
                   <a:srgbClr val="173234"/>
@@ -11049,7 +9081,7 @@
                 <a:ea typeface="Thonburi"/>
                 <a:cs typeface="Thonburi"/>
               </a:rPr>
-              <a:t>ระบบบอก “ต่ำไป” หรือ “สูงไป” จนชนะหรือแพ้</a:t>
+              <a:t>The game says “Too low” or “Too high” until the player wins or loses</a:t>
             </a:r>
           </a:p>
         </p:txBody>
@@ -11088,6 +9120,7 @@
           <a:lstStyle xmlns:a="http://schemas.openxmlformats.org/drawingml/2006/main"/>
           <a:p xmlns:a="http://schemas.openxmlformats.org/drawingml/2006/main">
             <a:pPr>
+              <a:buNone/>
               <a:defRPr sz="1575" b="0">
                 <a:solidFill>
                   <a:srgbClr val="173234"/>
@@ -11106,7 +9139,7 @@
                 <a:ea typeface="Thonburi"/>
                 <a:cs typeface="Thonburi"/>
               </a:rPr>
-              <a:t>v1 เล่นจบหนึ่งรอบ ไม่มีคะแนน ระดับความยาก หรือระบบสมาชิก</a:t>
+              <a:t>v1 has one full round. It has no score, difficulty level, or login.</a:t>
             </a:r>
           </a:p>
         </p:txBody>
@@ -11174,6 +9207,7 @@
           <a:lstStyle xmlns:a="http://schemas.openxmlformats.org/drawingml/2006/main"/>
           <a:p xmlns:a="http://schemas.openxmlformats.org/drawingml/2006/main">
             <a:pPr>
+              <a:buNone/>
               <a:defRPr sz="1350" b="0">
                 <a:solidFill>
                   <a:srgbClr val="B2C7C7"/>
@@ -11231,6 +9265,7 @@
           <a:lstStyle xmlns:a="http://schemas.openxmlformats.org/drawingml/2006/main"/>
           <a:p xmlns:a="http://schemas.openxmlformats.org/drawingml/2006/main">
             <a:pPr>
+              <a:buNone/>
               <a:defRPr sz="3450" b="1">
                 <a:solidFill>
                   <a:srgbClr val="F5F2E9"/>
@@ -11249,7 +9284,7 @@
                 <a:ea typeface="Thonburi"/>
                 <a:cs typeface="Thonburi"/>
               </a:rPr>
-              <a:t>Intent 1: เกณฑ์ทดลอง</a:t>
+              <a:t>Intent 1: Pilot measures</a:t>
             </a:r>
           </a:p>
         </p:txBody>
@@ -11288,6 +9323,7 @@
           <a:lstStyle xmlns:a="http://schemas.openxmlformats.org/drawingml/2006/main"/>
           <a:p xmlns:a="http://schemas.openxmlformats.org/drawingml/2006/main">
             <a:pPr>
+              <a:buNone/>
               <a:defRPr sz="8400" b="1">
                 <a:solidFill>
                   <a:srgbClr val="D5F271"/>
@@ -11345,6 +9381,7 @@
           <a:lstStyle xmlns:a="http://schemas.openxmlformats.org/drawingml/2006/main"/>
           <a:p xmlns:a="http://schemas.openxmlformats.org/drawingml/2006/main">
             <a:pPr>
+              <a:buNone/>
               <a:defRPr sz="2700" b="1">
                 <a:solidFill>
                   <a:srgbClr val="F5F2E9"/>
@@ -11363,11 +9400,12 @@
                 <a:ea typeface="Thonburi"/>
                 <a:cs typeface="Thonburi"/>
               </a:rPr>
-              <a:t>session จบรอบแรก</a:t>
-            </a:r>
-          </a:p>
-          <a:p xmlns:a="http://schemas.openxmlformats.org/drawingml/2006/main">
-            <a:pPr>
+              <a:t>sessions finish round one</a:t>
+            </a:r>
+          </a:p>
+          <a:p xmlns:a="http://schemas.openxmlformats.org/drawingml/2006/main">
+            <a:pPr>
+              <a:buNone/>
               <a:defRPr sz="2700" b="1">
                 <a:solidFill>
                   <a:srgbClr val="F5F2E9"/>
@@ -11386,7 +9424,7 @@
                 <a:ea typeface="Thonburi"/>
                 <a:cs typeface="Thonburi"/>
               </a:rPr>
-              <a:t>ภายใน 5 นาที</a:t>
+              <a:t>within five minutes</a:t>
             </a:r>
           </a:p>
         </p:txBody>
@@ -11425,6 +9463,7 @@
           <a:lstStyle xmlns:a="http://schemas.openxmlformats.org/drawingml/2006/main"/>
           <a:p xmlns:a="http://schemas.openxmlformats.org/drawingml/2006/main">
             <a:pPr>
+              <a:buNone/>
               <a:defRPr sz="2250" b="0">
                 <a:solidFill>
                   <a:srgbClr val="F5F2E9"/>
@@ -11443,7 +9482,7 @@
                 <a:ea typeface="Thonburi"/>
                 <a:cs typeface="Thonburi"/>
               </a:rPr>
-              <a:t>สมมติฐาน: ผู้เล่นใหม่เริ่มและเล่นจบได้เอง</a:t>
+              <a:t>Hypothesis: A new player can start and finish alone</a:t>
             </a:r>
           </a:p>
         </p:txBody>
@@ -11482,6 +9521,7 @@
           <a:lstStyle xmlns:a="http://schemas.openxmlformats.org/drawingml/2006/main"/>
           <a:p xmlns:a="http://schemas.openxmlformats.org/drawingml/2006/main">
             <a:pPr>
+              <a:buNone/>
               <a:defRPr sz="2175" b="0">
                 <a:solidFill>
                   <a:srgbClr val="FFAC80"/>
@@ -11500,7 +9540,7 @@
                 <a:ea typeface="Thonburi"/>
                 <a:cs typeface="Thonburi"/>
               </a:rPr>
-              <a:t>Guardrail: ไม่มีข้อผิดพลาดที่ขัดขวางการเล่น</a:t>
+              <a:t>Guardrail: No error blocks the game</a:t>
             </a:r>
           </a:p>
         </p:txBody>
@@ -11539,6 +9579,7 @@
           <a:lstStyle xmlns:a="http://schemas.openxmlformats.org/drawingml/2006/main"/>
           <a:p xmlns:a="http://schemas.openxmlformats.org/drawingml/2006/main">
             <a:pPr>
+              <a:buNone/>
               <a:defRPr sz="1575" b="0">
                 <a:solidFill>
                   <a:srgbClr val="B2C7C7"/>
@@ -11557,7 +9598,7 @@
                 <a:ea typeface="Thonburi"/>
                 <a:cs typeface="Thonburi"/>
               </a:rPr>
-              <a:t>ตัวเลขนี้เป็นเป้าหมาย pilot ผลจากการเล่นจริงยังต้องวัด</a:t>
+              <a:t>This is a pilot target. Real play results still need to be measured.</a:t>
             </a:r>
           </a:p>
         </p:txBody>
@@ -11625,6 +9666,7 @@
           <a:lstStyle xmlns:a="http://schemas.openxmlformats.org/drawingml/2006/main"/>
           <a:p xmlns:a="http://schemas.openxmlformats.org/drawingml/2006/main">
             <a:pPr>
+              <a:buNone/>
               <a:defRPr sz="1350" b="0">
                 <a:solidFill>
                   <a:srgbClr val="B2C7C7"/>
@@ -11682,6 +9724,7 @@
           <a:lstStyle xmlns:a="http://schemas.openxmlformats.org/drawingml/2006/main"/>
           <a:p xmlns:a="http://schemas.openxmlformats.org/drawingml/2006/main">
             <a:pPr>
+              <a:buNone/>
               <a:defRPr sz="3450" b="1">
                 <a:solidFill>
                   <a:srgbClr val="F5F2E9"/>
@@ -11700,7 +9743,7 @@
                 <a:ea typeface="Thonburi"/>
                 <a:cs typeface="Thonburi"/>
               </a:rPr>
-              <a:t>หลักฐานที่เกิดขึ้นระหว่างทำ</a:t>
+              <a:t>ADLC evidence chain</a:t>
             </a:r>
           </a:p>
         </p:txBody>
@@ -11739,6 +9782,7 @@
           <a:lstStyle xmlns:a="http://schemas.openxmlformats.org/drawingml/2006/main"/>
           <a:p xmlns:a="http://schemas.openxmlformats.org/drawingml/2006/main">
             <a:pPr>
+              <a:buNone/>
               <a:defRPr sz="2175" b="1">
                 <a:solidFill>
                   <a:srgbClr val="D5F271"/>
@@ -11796,6 +9840,7 @@
           <a:lstStyle xmlns:a="http://schemas.openxmlformats.org/drawingml/2006/main"/>
           <a:p xmlns:a="http://schemas.openxmlformats.org/drawingml/2006/main">
             <a:pPr>
+              <a:buNone/>
               <a:defRPr sz="2100" b="0">
                 <a:solidFill>
                   <a:srgbClr val="F5F2E9"/>
@@ -11814,7 +9859,7 @@
                 <a:ea typeface="Thonburi"/>
                 <a:cs typeface="Thonburi"/>
               </a:rPr>
-              <a:t>สิ่งที่ต้องการเรียนรู้</a:t>
+              <a:t>What we want to learn</a:t>
             </a:r>
           </a:p>
         </p:txBody>
@@ -11853,6 +9898,7 @@
           <a:lstStyle xmlns:a="http://schemas.openxmlformats.org/drawingml/2006/main"/>
           <a:p xmlns:a="http://schemas.openxmlformats.org/drawingml/2006/main">
             <a:pPr>
+              <a:buNone/>
               <a:defRPr sz="2175" b="1">
                 <a:solidFill>
                   <a:srgbClr val="D5F271"/>
@@ -11910,6 +9956,7 @@
           <a:lstStyle xmlns:a="http://schemas.openxmlformats.org/drawingml/2006/main"/>
           <a:p xmlns:a="http://schemas.openxmlformats.org/drawingml/2006/main">
             <a:pPr>
+              <a:buNone/>
               <a:defRPr sz="2100" b="0">
                 <a:solidFill>
                   <a:srgbClr val="F5F2E9"/>
@@ -11928,7 +9975,7 @@
                 <a:ea typeface="Thonburi"/>
                 <a:cs typeface="Thonburi"/>
               </a:rPr>
-              <a:t>พฤติกรรมและวิธีลงมือ</a:t>
+              <a:t>Behavior and work plan</a:t>
             </a:r>
           </a:p>
         </p:txBody>
@@ -11967,6 +10014,7 @@
           <a:lstStyle xmlns:a="http://schemas.openxmlformats.org/drawingml/2006/main"/>
           <a:p xmlns:a="http://schemas.openxmlformats.org/drawingml/2006/main">
             <a:pPr>
+              <a:buNone/>
               <a:defRPr sz="2175" b="1">
                 <a:solidFill>
                   <a:srgbClr val="D5F271"/>
@@ -12024,6 +10072,7 @@
           <a:lstStyle xmlns:a="http://schemas.openxmlformats.org/drawingml/2006/main"/>
           <a:p xmlns:a="http://schemas.openxmlformats.org/drawingml/2006/main">
             <a:pPr>
+              <a:buNone/>
               <a:defRPr sz="2100" b="0">
                 <a:solidFill>
                   <a:srgbClr val="F5F2E9"/>
@@ -12042,7 +10091,7 @@
                 <a:ea typeface="Thonburi"/>
                 <a:cs typeface="Thonburi"/>
               </a:rPr>
-              <a:t>ผลตรวจที่รันจริง</a:t>
+              <a:t>Results from real checks</a:t>
             </a:r>
           </a:p>
         </p:txBody>
@@ -12081,6 +10130,7 @@
           <a:lstStyle xmlns:a="http://schemas.openxmlformats.org/drawingml/2006/main"/>
           <a:p xmlns:a="http://schemas.openxmlformats.org/drawingml/2006/main">
             <a:pPr>
+              <a:buNone/>
               <a:defRPr sz="2175" b="1">
                 <a:solidFill>
                   <a:srgbClr val="D5F271"/>
@@ -12138,6 +10188,7 @@
           <a:lstStyle xmlns:a="http://schemas.openxmlformats.org/drawingml/2006/main"/>
           <a:p xmlns:a="http://schemas.openxmlformats.org/drawingml/2006/main">
             <a:pPr>
+              <a:buNone/>
               <a:defRPr sz="2100" b="0">
                 <a:solidFill>
                   <a:srgbClr val="F5F2E9"/>
@@ -12156,7 +10207,7 @@
                 <a:ea typeface="Thonburi"/>
                 <a:cs typeface="Thonburi"/>
               </a:rPr>
-              <a:t>คำตัดสินและเวอร์ชันทดลอง</a:t>
+              <a:t>Decision and test revision</a:t>
             </a:r>
           </a:p>
         </p:txBody>
@@ -12195,6 +10246,7 @@
           <a:lstStyle xmlns:a="http://schemas.openxmlformats.org/drawingml/2006/main"/>
           <a:p xmlns:a="http://schemas.openxmlformats.org/drawingml/2006/main">
             <a:pPr>
+              <a:buNone/>
               <a:defRPr sz="2175" b="1">
                 <a:solidFill>
                   <a:srgbClr val="D5F271"/>
@@ -12252,6 +10304,7 @@
           <a:lstStyle xmlns:a="http://schemas.openxmlformats.org/drawingml/2006/main"/>
           <a:p xmlns:a="http://schemas.openxmlformats.org/drawingml/2006/main">
             <a:pPr>
+              <a:buNone/>
               <a:defRPr sz="2100" b="0">
                 <a:solidFill>
                   <a:srgbClr val="F5F2E9"/>
@@ -12270,7 +10323,7 @@
                 <a:ea typeface="Thonburi"/>
                 <a:cs typeface="Thonburi"/>
               </a:rPr>
-              <a:t>Signal และคำตัดสินหลัง Observe</a:t>
+              <a:t>Signal and decision after Observe</a:t>
             </a:r>
           </a:p>
         </p:txBody>
@@ -12309,6 +10362,7 @@
           <a:lstStyle xmlns:a="http://schemas.openxmlformats.org/drawingml/2006/main"/>
           <a:p xmlns:a="http://schemas.openxmlformats.org/drawingml/2006/main">
             <a:pPr>
+              <a:buNone/>
               <a:defRPr sz="1575" b="0">
                 <a:solidFill>
                   <a:srgbClr val="B2C7C7"/>
@@ -12327,7 +10381,7 @@
                 <a:ea typeface="Thonburi"/>
                 <a:cs typeface="Thonburi"/>
               </a:rPr>
-              <a:t>ทุกไฟล์ผูกกับ Intent และเวอร์ชันที่ตรวจ</a:t>
+              <a:t>Every file links to the Intent and the checked revision</a:t>
             </a:r>
           </a:p>
         </p:txBody>
